--- a/Project/notebooks/Crowd Density Prediction.pptx
+++ b/Project/notebooks/Crowd Density Prediction.pptx
@@ -5,13 +5,18 @@
     <p:sldMasterId id="2147483648" r:id="rId1"/>
   </p:sldMasterIdLst>
   <p:sldIdLst>
-    <p:sldId id="256" r:id="rId7"/>
-    <p:sldId id="257" r:id="rId8"/>
-    <p:sldId id="258" r:id="rId9"/>
-    <p:sldId id="259" r:id="rId10"/>
-    <p:sldId id="260" r:id="rId11"/>
+    <p:sldId id="256" r:id="rId2"/>
+    <p:sldId id="257" r:id="rId3"/>
+    <p:sldId id="258" r:id="rId4"/>
+    <p:sldId id="259" r:id="rId5"/>
+    <p:sldId id="260" r:id="rId6"/>
+    <p:sldId id="261" r:id="rId7"/>
+    <p:sldId id="262" r:id="rId8"/>
+    <p:sldId id="263" r:id="rId9"/>
+    <p:sldId id="264" r:id="rId10"/>
+    <p:sldId id="265" r:id="rId11"/>
   </p:sldIdLst>
-  <p:sldSz cx="12192000" cy="6858000" type="screen4x3"/>
+  <p:sldSz cx="12192000" cy="6858000"/>
   <p:notesSz cx="6858000" cy="9144000"/>
   <p:defaultTextStyle>
     <a:defPPr>
@@ -108,6 +113,22 @@
       </a:defRPr>
     </a:lvl9pPr>
   </p:defaultTextStyle>
+  <p:extLst>
+    <p:ext uri="{EFAFB233-063F-42B5-8137-9DF3F51BA10A}">
+      <p15:sldGuideLst xmlns:p15="http://schemas.microsoft.com/office/powerpoint/2012/main">
+        <p15:guide id="1" orient="horz" pos="2160">
+          <p15:clr>
+            <a:srgbClr val="A4A3A4"/>
+          </p15:clr>
+        </p15:guide>
+        <p15:guide id="2" pos="2880">
+          <p15:clr>
+            <a:srgbClr val="A4A3A4"/>
+          </p15:clr>
+        </p15:guide>
+      </p15:sldGuideLst>
+    </p:ext>
+  </p:extLst>
 </p:presentation>
 </file>
 
@@ -149,10 +170,9 @@
           <a:lstStyle/>
           <a:p>
             <a:r>
-              <a:rPr lang="en-US" smtClean="0"/>
+              <a:rPr lang="en-US"/>
               <a:t>Click to edit Master title style</a:t>
             </a:r>
-            <a:endParaRPr lang="en-US"/>
           </a:p>
         </p:txBody>
       </p:sp>
@@ -268,10 +288,9 @@
           </a:lstStyle>
           <a:p>
             <a:r>
-              <a:rPr lang="en-US" smtClean="0"/>
+              <a:rPr lang="en-US"/>
               <a:t>Click to edit Master subtitle style</a:t>
             </a:r>
-            <a:endParaRPr lang="en-US"/>
           </a:p>
         </p:txBody>
       </p:sp>
@@ -292,7 +311,7 @@
           <a:p>
             <a:fld id="{5BCAD085-E8A6-8845-BD4E-CB4CCA059FC4}" type="datetimeFigureOut">
               <a:rPr lang="en-US" smtClean="0"/>
-              <a:t>1/27/13</a:t>
+              <a:t>9/1/2026</a:t>
             </a:fld>
             <a:endParaRPr lang="en-US"/>
           </a:p>
@@ -386,10 +405,9 @@
           <a:lstStyle/>
           <a:p>
             <a:r>
-              <a:rPr lang="en-US" smtClean="0"/>
+              <a:rPr lang="en-US"/>
               <a:t>Click to edit Master title style</a:t>
             </a:r>
-            <a:endParaRPr lang="en-US"/>
           </a:p>
         </p:txBody>
       </p:sp>
@@ -410,38 +428,37 @@
           <a:p>
             <a:pPr lvl="0"/>
             <a:r>
-              <a:rPr lang="en-US" smtClean="0"/>
+              <a:rPr lang="en-US"/>
               <a:t>Click to edit Master text styles</a:t>
             </a:r>
           </a:p>
           <a:p>
             <a:pPr lvl="1"/>
             <a:r>
-              <a:rPr lang="en-US" smtClean="0"/>
+              <a:rPr lang="en-US"/>
               <a:t>Second level</a:t>
             </a:r>
           </a:p>
           <a:p>
             <a:pPr lvl="2"/>
             <a:r>
-              <a:rPr lang="en-US" smtClean="0"/>
+              <a:rPr lang="en-US"/>
               <a:t>Third level</a:t>
             </a:r>
           </a:p>
           <a:p>
             <a:pPr lvl="3"/>
             <a:r>
-              <a:rPr lang="en-US" smtClean="0"/>
+              <a:rPr lang="en-US"/>
               <a:t>Fourth level</a:t>
             </a:r>
           </a:p>
           <a:p>
             <a:pPr lvl="4"/>
             <a:r>
-              <a:rPr lang="en-US" smtClean="0"/>
+              <a:rPr lang="en-US"/>
               <a:t>Fifth level</a:t>
             </a:r>
-            <a:endParaRPr lang="en-US"/>
           </a:p>
         </p:txBody>
       </p:sp>
@@ -462,7 +479,7 @@
           <a:p>
             <a:fld id="{5BCAD085-E8A6-8845-BD4E-CB4CCA059FC4}" type="datetimeFigureOut">
               <a:rPr lang="en-US" smtClean="0"/>
-              <a:t>1/27/13</a:t>
+              <a:t>9/1/2026</a:t>
             </a:fld>
             <a:endParaRPr lang="en-US"/>
           </a:p>
@@ -561,10 +578,9 @@
           <a:lstStyle/>
           <a:p>
             <a:r>
-              <a:rPr lang="en-US" smtClean="0"/>
+              <a:rPr lang="en-US"/>
               <a:t>Click to edit Master title style</a:t>
             </a:r>
-            <a:endParaRPr lang="en-US"/>
           </a:p>
         </p:txBody>
       </p:sp>
@@ -590,38 +606,37 @@
           <a:p>
             <a:pPr lvl="0"/>
             <a:r>
-              <a:rPr lang="en-US" smtClean="0"/>
+              <a:rPr lang="en-US"/>
               <a:t>Click to edit Master text styles</a:t>
             </a:r>
           </a:p>
           <a:p>
             <a:pPr lvl="1"/>
             <a:r>
-              <a:rPr lang="en-US" smtClean="0"/>
+              <a:rPr lang="en-US"/>
               <a:t>Second level</a:t>
             </a:r>
           </a:p>
           <a:p>
             <a:pPr lvl="2"/>
             <a:r>
-              <a:rPr lang="en-US" smtClean="0"/>
+              <a:rPr lang="en-US"/>
               <a:t>Third level</a:t>
             </a:r>
           </a:p>
           <a:p>
             <a:pPr lvl="3"/>
             <a:r>
-              <a:rPr lang="en-US" smtClean="0"/>
+              <a:rPr lang="en-US"/>
               <a:t>Fourth level</a:t>
             </a:r>
           </a:p>
           <a:p>
             <a:pPr lvl="4"/>
             <a:r>
-              <a:rPr lang="en-US" smtClean="0"/>
+              <a:rPr lang="en-US"/>
               <a:t>Fifth level</a:t>
             </a:r>
-            <a:endParaRPr lang="en-US"/>
           </a:p>
         </p:txBody>
       </p:sp>
@@ -642,7 +657,7 @@
           <a:p>
             <a:fld id="{5BCAD085-E8A6-8845-BD4E-CB4CCA059FC4}" type="datetimeFigureOut">
               <a:rPr lang="en-US" smtClean="0"/>
-              <a:t>1/27/13</a:t>
+              <a:t>9/1/2026</a:t>
             </a:fld>
             <a:endParaRPr lang="en-US"/>
           </a:p>
@@ -736,10 +751,9 @@
           <a:lstStyle/>
           <a:p>
             <a:r>
-              <a:rPr lang="en-US" smtClean="0"/>
+              <a:rPr lang="en-US"/>
               <a:t>Click to edit Master title style</a:t>
             </a:r>
-            <a:endParaRPr lang="en-US"/>
           </a:p>
         </p:txBody>
       </p:sp>
@@ -760,38 +774,37 @@
           <a:p>
             <a:pPr lvl="0"/>
             <a:r>
-              <a:rPr lang="en-US" smtClean="0"/>
+              <a:rPr lang="en-US"/>
               <a:t>Click to edit Master text styles</a:t>
             </a:r>
           </a:p>
           <a:p>
             <a:pPr lvl="1"/>
             <a:r>
-              <a:rPr lang="en-US" smtClean="0"/>
+              <a:rPr lang="en-US"/>
               <a:t>Second level</a:t>
             </a:r>
           </a:p>
           <a:p>
             <a:pPr lvl="2"/>
             <a:r>
-              <a:rPr lang="en-US" smtClean="0"/>
+              <a:rPr lang="en-US"/>
               <a:t>Third level</a:t>
             </a:r>
           </a:p>
           <a:p>
             <a:pPr lvl="3"/>
             <a:r>
-              <a:rPr lang="en-US" smtClean="0"/>
+              <a:rPr lang="en-US"/>
               <a:t>Fourth level</a:t>
             </a:r>
           </a:p>
           <a:p>
             <a:pPr lvl="4"/>
             <a:r>
-              <a:rPr lang="en-US" smtClean="0"/>
+              <a:rPr lang="en-US"/>
               <a:t>Fifth level</a:t>
             </a:r>
-            <a:endParaRPr lang="en-US"/>
           </a:p>
         </p:txBody>
       </p:sp>
@@ -812,7 +825,7 @@
           <a:p>
             <a:fld id="{5BCAD085-E8A6-8845-BD4E-CB4CCA059FC4}" type="datetimeFigureOut">
               <a:rPr lang="en-US" smtClean="0"/>
-              <a:t>1/27/13</a:t>
+              <a:t>9/1/2026</a:t>
             </a:fld>
             <a:endParaRPr lang="en-US"/>
           </a:p>
@@ -915,10 +928,9 @@
           </a:lstStyle>
           <a:p>
             <a:r>
-              <a:rPr lang="en-US" smtClean="0"/>
+              <a:rPr lang="en-US"/>
               <a:t>Click to edit Master title style</a:t>
             </a:r>
-            <a:endParaRPr lang="en-US"/>
           </a:p>
         </p:txBody>
       </p:sp>
@@ -1035,7 +1047,7 @@
           <a:p>
             <a:pPr lvl="0"/>
             <a:r>
-              <a:rPr lang="en-US" smtClean="0"/>
+              <a:rPr lang="en-US"/>
               <a:t>Click to edit Master text styles</a:t>
             </a:r>
           </a:p>
@@ -1058,7 +1070,7 @@
           <a:p>
             <a:fld id="{5BCAD085-E8A6-8845-BD4E-CB4CCA059FC4}" type="datetimeFigureOut">
               <a:rPr lang="en-US" smtClean="0"/>
-              <a:t>1/27/13</a:t>
+              <a:t>9/1/2026</a:t>
             </a:fld>
             <a:endParaRPr lang="en-US"/>
           </a:p>
@@ -1152,10 +1164,9 @@
           <a:lstStyle/>
           <a:p>
             <a:r>
-              <a:rPr lang="en-US" smtClean="0"/>
+              <a:rPr lang="en-US"/>
               <a:t>Click to edit Master title style</a:t>
             </a:r>
-            <a:endParaRPr lang="en-US"/>
           </a:p>
         </p:txBody>
       </p:sp>
@@ -1209,38 +1220,37 @@
           <a:p>
             <a:pPr lvl="0"/>
             <a:r>
-              <a:rPr lang="en-US" smtClean="0"/>
+              <a:rPr lang="en-US"/>
               <a:t>Click to edit Master text styles</a:t>
             </a:r>
           </a:p>
           <a:p>
             <a:pPr lvl="1"/>
             <a:r>
-              <a:rPr lang="en-US" smtClean="0"/>
+              <a:rPr lang="en-US"/>
               <a:t>Second level</a:t>
             </a:r>
           </a:p>
           <a:p>
             <a:pPr lvl="2"/>
             <a:r>
-              <a:rPr lang="en-US" smtClean="0"/>
+              <a:rPr lang="en-US"/>
               <a:t>Third level</a:t>
             </a:r>
           </a:p>
           <a:p>
             <a:pPr lvl="3"/>
             <a:r>
-              <a:rPr lang="en-US" smtClean="0"/>
+              <a:rPr lang="en-US"/>
               <a:t>Fourth level</a:t>
             </a:r>
           </a:p>
           <a:p>
             <a:pPr lvl="4"/>
             <a:r>
-              <a:rPr lang="en-US" smtClean="0"/>
+              <a:rPr lang="en-US"/>
               <a:t>Fifth level</a:t>
             </a:r>
-            <a:endParaRPr lang="en-US"/>
           </a:p>
         </p:txBody>
       </p:sp>
@@ -1294,38 +1304,37 @@
           <a:p>
             <a:pPr lvl="0"/>
             <a:r>
-              <a:rPr lang="en-US" smtClean="0"/>
+              <a:rPr lang="en-US"/>
               <a:t>Click to edit Master text styles</a:t>
             </a:r>
           </a:p>
           <a:p>
             <a:pPr lvl="1"/>
             <a:r>
-              <a:rPr lang="en-US" smtClean="0"/>
+              <a:rPr lang="en-US"/>
               <a:t>Second level</a:t>
             </a:r>
           </a:p>
           <a:p>
             <a:pPr lvl="2"/>
             <a:r>
-              <a:rPr lang="en-US" smtClean="0"/>
+              <a:rPr lang="en-US"/>
               <a:t>Third level</a:t>
             </a:r>
           </a:p>
           <a:p>
             <a:pPr lvl="3"/>
             <a:r>
-              <a:rPr lang="en-US" smtClean="0"/>
+              <a:rPr lang="en-US"/>
               <a:t>Fourth level</a:t>
             </a:r>
           </a:p>
           <a:p>
             <a:pPr lvl="4"/>
             <a:r>
-              <a:rPr lang="en-US" smtClean="0"/>
+              <a:rPr lang="en-US"/>
               <a:t>Fifth level</a:t>
             </a:r>
-            <a:endParaRPr lang="en-US"/>
           </a:p>
         </p:txBody>
       </p:sp>
@@ -1346,7 +1355,7 @@
           <a:p>
             <a:fld id="{5BCAD085-E8A6-8845-BD4E-CB4CCA059FC4}" type="datetimeFigureOut">
               <a:rPr lang="en-US" smtClean="0"/>
-              <a:t>1/27/13</a:t>
+              <a:t>9/1/2026</a:t>
             </a:fld>
             <a:endParaRPr lang="en-US"/>
           </a:p>
@@ -1444,10 +1453,9 @@
           </a:lstStyle>
           <a:p>
             <a:r>
-              <a:rPr lang="en-US" smtClean="0"/>
+              <a:rPr lang="en-US"/>
               <a:t>Click to edit Master title style</a:t>
             </a:r>
-            <a:endParaRPr lang="en-US"/>
           </a:p>
         </p:txBody>
       </p:sp>
@@ -1510,7 +1518,7 @@
           <a:p>
             <a:pPr lvl="0"/>
             <a:r>
-              <a:rPr lang="en-US" smtClean="0"/>
+              <a:rPr lang="en-US"/>
               <a:t>Click to edit Master text styles</a:t>
             </a:r>
           </a:p>
@@ -1566,38 +1574,37 @@
           <a:p>
             <a:pPr lvl="0"/>
             <a:r>
-              <a:rPr lang="en-US" smtClean="0"/>
+              <a:rPr lang="en-US"/>
               <a:t>Click to edit Master text styles</a:t>
             </a:r>
           </a:p>
           <a:p>
             <a:pPr lvl="1"/>
             <a:r>
-              <a:rPr lang="en-US" smtClean="0"/>
+              <a:rPr lang="en-US"/>
               <a:t>Second level</a:t>
             </a:r>
           </a:p>
           <a:p>
             <a:pPr lvl="2"/>
             <a:r>
-              <a:rPr lang="en-US" smtClean="0"/>
+              <a:rPr lang="en-US"/>
               <a:t>Third level</a:t>
             </a:r>
           </a:p>
           <a:p>
             <a:pPr lvl="3"/>
             <a:r>
-              <a:rPr lang="en-US" smtClean="0"/>
+              <a:rPr lang="en-US"/>
               <a:t>Fourth level</a:t>
             </a:r>
           </a:p>
           <a:p>
             <a:pPr lvl="4"/>
             <a:r>
-              <a:rPr lang="en-US" smtClean="0"/>
+              <a:rPr lang="en-US"/>
               <a:t>Fifth level</a:t>
             </a:r>
-            <a:endParaRPr lang="en-US"/>
           </a:p>
         </p:txBody>
       </p:sp>
@@ -1660,7 +1667,7 @@
           <a:p>
             <a:pPr lvl="0"/>
             <a:r>
-              <a:rPr lang="en-US" smtClean="0"/>
+              <a:rPr lang="en-US"/>
               <a:t>Click to edit Master text styles</a:t>
             </a:r>
           </a:p>
@@ -1716,38 +1723,37 @@
           <a:p>
             <a:pPr lvl="0"/>
             <a:r>
-              <a:rPr lang="en-US" smtClean="0"/>
+              <a:rPr lang="en-US"/>
               <a:t>Click to edit Master text styles</a:t>
             </a:r>
           </a:p>
           <a:p>
             <a:pPr lvl="1"/>
             <a:r>
-              <a:rPr lang="en-US" smtClean="0"/>
+              <a:rPr lang="en-US"/>
               <a:t>Second level</a:t>
             </a:r>
           </a:p>
           <a:p>
             <a:pPr lvl="2"/>
             <a:r>
-              <a:rPr lang="en-US" smtClean="0"/>
+              <a:rPr lang="en-US"/>
               <a:t>Third level</a:t>
             </a:r>
           </a:p>
           <a:p>
             <a:pPr lvl="3"/>
             <a:r>
-              <a:rPr lang="en-US" smtClean="0"/>
+              <a:rPr lang="en-US"/>
               <a:t>Fourth level</a:t>
             </a:r>
           </a:p>
           <a:p>
             <a:pPr lvl="4"/>
             <a:r>
-              <a:rPr lang="en-US" smtClean="0"/>
+              <a:rPr lang="en-US"/>
               <a:t>Fifth level</a:t>
             </a:r>
-            <a:endParaRPr lang="en-US"/>
           </a:p>
         </p:txBody>
       </p:sp>
@@ -1768,7 +1774,7 @@
           <a:p>
             <a:fld id="{5BCAD085-E8A6-8845-BD4E-CB4CCA059FC4}" type="datetimeFigureOut">
               <a:rPr lang="en-US" smtClean="0"/>
-              <a:t>1/27/13</a:t>
+              <a:t>9/1/2026</a:t>
             </a:fld>
             <a:endParaRPr lang="en-US"/>
           </a:p>
@@ -1862,10 +1868,9 @@
           <a:lstStyle/>
           <a:p>
             <a:r>
-              <a:rPr lang="en-US" smtClean="0"/>
+              <a:rPr lang="en-US"/>
               <a:t>Click to edit Master title style</a:t>
             </a:r>
-            <a:endParaRPr lang="en-US"/>
           </a:p>
         </p:txBody>
       </p:sp>
@@ -1886,7 +1891,7 @@
           <a:p>
             <a:fld id="{5BCAD085-E8A6-8845-BD4E-CB4CCA059FC4}" type="datetimeFigureOut">
               <a:rPr lang="en-US" smtClean="0"/>
-              <a:t>1/27/13</a:t>
+              <a:t>9/1/2026</a:t>
             </a:fld>
             <a:endParaRPr lang="en-US"/>
           </a:p>
@@ -1981,7 +1986,7 @@
           <a:p>
             <a:fld id="{5BCAD085-E8A6-8845-BD4E-CB4CCA059FC4}" type="datetimeFigureOut">
               <a:rPr lang="en-US" smtClean="0"/>
-              <a:t>1/27/13</a:t>
+              <a:t>9/1/2026</a:t>
             </a:fld>
             <a:endParaRPr lang="en-US"/>
           </a:p>
@@ -2084,10 +2089,9 @@
           </a:lstStyle>
           <a:p>
             <a:r>
-              <a:rPr lang="en-US" smtClean="0"/>
+              <a:rPr lang="en-US"/>
               <a:t>Click to edit Master title style</a:t>
             </a:r>
-            <a:endParaRPr lang="en-US"/>
           </a:p>
         </p:txBody>
       </p:sp>
@@ -2141,38 +2145,37 @@
           <a:p>
             <a:pPr lvl="0"/>
             <a:r>
-              <a:rPr lang="en-US" smtClean="0"/>
+              <a:rPr lang="en-US"/>
               <a:t>Click to edit Master text styles</a:t>
             </a:r>
           </a:p>
           <a:p>
             <a:pPr lvl="1"/>
             <a:r>
-              <a:rPr lang="en-US" smtClean="0"/>
+              <a:rPr lang="en-US"/>
               <a:t>Second level</a:t>
             </a:r>
           </a:p>
           <a:p>
             <a:pPr lvl="2"/>
             <a:r>
-              <a:rPr lang="en-US" smtClean="0"/>
+              <a:rPr lang="en-US"/>
               <a:t>Third level</a:t>
             </a:r>
           </a:p>
           <a:p>
             <a:pPr lvl="3"/>
             <a:r>
-              <a:rPr lang="en-US" smtClean="0"/>
+              <a:rPr lang="en-US"/>
               <a:t>Fourth level</a:t>
             </a:r>
           </a:p>
           <a:p>
             <a:pPr lvl="4"/>
             <a:r>
-              <a:rPr lang="en-US" smtClean="0"/>
+              <a:rPr lang="en-US"/>
               <a:t>Fifth level</a:t>
             </a:r>
-            <a:endParaRPr lang="en-US"/>
           </a:p>
         </p:txBody>
       </p:sp>
@@ -2235,7 +2238,7 @@
           <a:p>
             <a:pPr lvl="0"/>
             <a:r>
-              <a:rPr lang="en-US" smtClean="0"/>
+              <a:rPr lang="en-US"/>
               <a:t>Click to edit Master text styles</a:t>
             </a:r>
           </a:p>
@@ -2258,7 +2261,7 @@
           <a:p>
             <a:fld id="{5BCAD085-E8A6-8845-BD4E-CB4CCA059FC4}" type="datetimeFigureOut">
               <a:rPr lang="en-US" smtClean="0"/>
-              <a:t>1/27/13</a:t>
+              <a:t>9/1/2026</a:t>
             </a:fld>
             <a:endParaRPr lang="en-US"/>
           </a:p>
@@ -2361,10 +2364,9 @@
           </a:lstStyle>
           <a:p>
             <a:r>
-              <a:rPr lang="en-US" smtClean="0"/>
+              <a:rPr lang="en-US"/>
               <a:t>Click to edit Master title style</a:t>
             </a:r>
-            <a:endParaRPr lang="en-US"/>
           </a:p>
         </p:txBody>
       </p:sp>
@@ -2488,7 +2490,7 @@
           <a:p>
             <a:pPr lvl="0"/>
             <a:r>
-              <a:rPr lang="en-US" smtClean="0"/>
+              <a:rPr lang="en-US"/>
               <a:t>Click to edit Master text styles</a:t>
             </a:r>
           </a:p>
@@ -2511,7 +2513,7 @@
           <a:p>
             <a:fld id="{5BCAD085-E8A6-8845-BD4E-CB4CCA059FC4}" type="datetimeFigureOut">
               <a:rPr lang="en-US" smtClean="0"/>
-              <a:t>1/27/13</a:t>
+              <a:t>9/1/2026</a:t>
             </a:fld>
             <a:endParaRPr lang="en-US"/>
           </a:p>
@@ -2620,10 +2622,9 @@
           <a:lstStyle/>
           <a:p>
             <a:r>
-              <a:rPr lang="en-US" smtClean="0"/>
+              <a:rPr lang="en-US"/>
               <a:t>Click to edit Master title style</a:t>
             </a:r>
-            <a:endParaRPr lang="en-US"/>
           </a:p>
         </p:txBody>
       </p:sp>
@@ -2654,38 +2655,37 @@
           <a:p>
             <a:pPr lvl="0"/>
             <a:r>
-              <a:rPr lang="en-US" smtClean="0"/>
+              <a:rPr lang="en-US"/>
               <a:t>Click to edit Master text styles</a:t>
             </a:r>
           </a:p>
           <a:p>
             <a:pPr lvl="1"/>
             <a:r>
-              <a:rPr lang="en-US" smtClean="0"/>
+              <a:rPr lang="en-US"/>
               <a:t>Second level</a:t>
             </a:r>
           </a:p>
           <a:p>
             <a:pPr lvl="2"/>
             <a:r>
-              <a:rPr lang="en-US" smtClean="0"/>
+              <a:rPr lang="en-US"/>
               <a:t>Third level</a:t>
             </a:r>
           </a:p>
           <a:p>
             <a:pPr lvl="3"/>
             <a:r>
-              <a:rPr lang="en-US" smtClean="0"/>
+              <a:rPr lang="en-US"/>
               <a:t>Fourth level</a:t>
             </a:r>
           </a:p>
           <a:p>
             <a:pPr lvl="4"/>
             <a:r>
-              <a:rPr lang="en-US" smtClean="0"/>
+              <a:rPr lang="en-US"/>
               <a:t>Fifth level</a:t>
             </a:r>
-            <a:endParaRPr lang="en-US"/>
           </a:p>
         </p:txBody>
       </p:sp>
@@ -2724,7 +2724,7 @@
           <a:p>
             <a:fld id="{5BCAD085-E8A6-8845-BD4E-CB4CCA059FC4}" type="datetimeFigureOut">
               <a:rPr lang="en-US" smtClean="0"/>
-              <a:t>1/27/13</a:t>
+              <a:t>9/1/2026</a:t>
             </a:fld>
             <a:endParaRPr lang="en-US"/>
           </a:p>
@@ -3083,7 +3083,7 @@
 </file>
 
 <file path=ppt/slides/slide1.xml><?xml version="1.0" encoding="utf-8"?>
-<p:sld xmlns:a="http://schemas.openxmlformats.org/drawingml/2006/main" xmlns:p="http://schemas.openxmlformats.org/presentationml/2006/main" xmlns:r="http://schemas.openxmlformats.org/officeDocument/2006/relationships">
+<p:sld xmlns:a="http://schemas.openxmlformats.org/drawingml/2006/main" xmlns:r="http://schemas.openxmlformats.org/officeDocument/2006/relationships" xmlns:p="http://schemas.openxmlformats.org/presentationml/2006/main">
   <p:cSld>
     <p:bg>
       <p:bgPr>
@@ -3099,7 +3099,14 @@
         <p:cNvGrpSpPr/>
         <p:nvPr/>
       </p:nvGrpSpPr>
-      <p:grpSpPr/>
+      <p:grpSpPr>
+        <a:xfrm>
+          <a:off x="0" y="0"/>
+          <a:ext cx="0" cy="0"/>
+          <a:chOff x="0" y="0"/>
+          <a:chExt cx="0" cy="0"/>
+        </a:xfrm>
+      </p:grpSpPr>
       <p:pic>
         <p:nvPicPr>
           <p:cNvPr id="2" name="Picture 1" descr="image.png"/>
@@ -3116,7 +3123,7 @@
         </p:blipFill>
         <p:spPr>
           <a:xfrm>
-            <a:off x="762000" y="4545210"/>
+            <a:off x="762000" y="4407098"/>
             <a:ext cx="10668000" cy="1200150"/>
           </a:xfrm>
           <a:prstGeom prst="rect">
@@ -3132,7 +3139,7 @@
         </p:nvSpPr>
         <p:spPr>
           <a:xfrm>
-            <a:off x="762000" y="1112639"/>
+            <a:off x="762000" y="1250751"/>
             <a:ext cx="9525000" cy="228600"/>
           </a:xfrm>
           <a:prstGeom prst="rect">
@@ -3141,20 +3148,20 @@
           <a:noFill/>
         </p:spPr>
         <p:txBody>
-          <a:bodyPr wrap="square" lIns="0" rIns="0" tIns="0" bIns="0" anchor="t">
+          <a:bodyPr wrap="square" lIns="0" tIns="0" rIns="0" bIns="0" anchor="t">
             <a:spAutoFit/>
           </a:bodyPr>
           <a:lstStyle/>
           <a:p>
             <a:pPr algn="l"/>
             <a:r>
-              <a:rPr b="1" sz="1500" i="0" u="none">
+              <a:rPr sz="1500" b="1" i="0" u="none">
                 <a:solidFill>
                   <a:srgbClr val="38BDF8"/>
                 </a:solidFill>
                 <a:latin typeface="Inter"/>
               </a:rPr>
-              <a:t>PROJECT SUMMARY</a:t>
+              <a:t>END-TO-END PIPELINE</a:t>
             </a:r>
           </a:p>
         </p:txBody>
@@ -3167,7 +3174,7 @@
         </p:nvSpPr>
         <p:spPr>
           <a:xfrm>
-            <a:off x="762000" y="1569839"/>
+            <a:off x="762000" y="1707951"/>
             <a:ext cx="10001250" cy="1508521"/>
           </a:xfrm>
           <a:prstGeom prst="rect">
@@ -3176,7 +3183,7 @@
           <a:noFill/>
         </p:spPr>
         <p:txBody>
-          <a:bodyPr wrap="square" lIns="0" rIns="0" tIns="0" bIns="0" anchor="t">
+          <a:bodyPr wrap="square" lIns="0" tIns="0" rIns="0" bIns="0" anchor="t">
             <a:spAutoFit/>
           </a:bodyPr>
           <a:lstStyle/>
@@ -3187,7 +3194,7 @@
               </a:lnSpc>
             </a:pPr>
             <a:r>
-              <a:rPr b="1" sz="5400" i="0" u="none">
+              <a:rPr sz="5400" b="1" i="0" u="none">
                 <a:solidFill>
                   <a:srgbClr val="F8FAFC"/>
                 </a:solidFill>
@@ -3200,7 +3207,7 @@
 </a:t>
             </a:r>
             <a:r>
-              <a:rPr b="1" sz="5400" i="0" u="none">
+              <a:rPr sz="5400" b="1" i="0" u="none">
                 <a:solidFill>
                   <a:srgbClr val="F8FAFC"/>
                 </a:solidFill>
@@ -3219,8 +3226,8 @@
         </p:nvSpPr>
         <p:spPr>
           <a:xfrm>
-            <a:off x="762000" y="3383160"/>
-            <a:ext cx="7620000" cy="552450"/>
+            <a:off x="762000" y="3521273"/>
+            <a:ext cx="7620000" cy="276225"/>
           </a:xfrm>
           <a:prstGeom prst="rect">
             <a:avLst/>
@@ -3228,20 +3235,20 @@
           <a:noFill/>
         </p:spPr>
         <p:txBody>
-          <a:bodyPr wrap="square" lIns="0" rIns="0" tIns="0" bIns="0" anchor="t">
+          <a:bodyPr wrap="square" lIns="0" tIns="0" rIns="0" bIns="0" anchor="t">
             <a:spAutoFit/>
           </a:bodyPr>
           <a:lstStyle/>
           <a:p>
             <a:pPr algn="l"/>
             <a:r>
-              <a:rPr b="0" sz="1800" i="0" u="none">
+              <a:rPr sz="1800" b="0" i="0" u="none">
                 <a:solidFill>
                   <a:srgbClr val="94A3B8"/>
                 </a:solidFill>
                 <a:latin typeface="Inter"/>
               </a:rPr>
-              <a:t>Problem Statement • Model Selection • Comparative Study • Conclusion</a:t>
+              <a:t>Data Integration • Feature Engineering • ML Tuning • Power BI</a:t>
             </a:r>
           </a:p>
         </p:txBody>
@@ -3254,7 +3261,7 @@
         </p:nvSpPr>
         <p:spPr>
           <a:xfrm>
-            <a:off x="762000" y="5011935"/>
+            <a:off x="762000" y="4873823"/>
             <a:ext cx="1476375" cy="457200"/>
           </a:xfrm>
           <a:prstGeom prst="rect">
@@ -3263,7 +3270,7 @@
           <a:noFill/>
         </p:spPr>
         <p:txBody>
-          <a:bodyPr wrap="square" lIns="0" rIns="0" tIns="0" bIns="0" anchor="t">
+          <a:bodyPr wrap="square" lIns="0" tIns="0" rIns="0" bIns="0" anchor="t">
             <a:spAutoFit/>
           </a:bodyPr>
           <a:lstStyle/>
@@ -3274,7 +3281,7 @@
               </a:lnSpc>
             </a:pPr>
             <a:r>
-              <a:rPr b="1" sz="3600" i="0" u="none">
+              <a:rPr sz="3600" b="1" i="0" u="none">
                 <a:solidFill>
                   <a:srgbClr val="F8FAFC"/>
                 </a:solidFill>
@@ -3293,7 +3300,7 @@
         </p:nvSpPr>
         <p:spPr>
           <a:xfrm>
-            <a:off x="762000" y="5545335"/>
+            <a:off x="762000" y="5407223"/>
             <a:ext cx="1476375" cy="200025"/>
           </a:xfrm>
           <a:prstGeom prst="rect">
@@ -3302,14 +3309,14 @@
           <a:noFill/>
         </p:spPr>
         <p:txBody>
-          <a:bodyPr wrap="square" lIns="0" rIns="0" tIns="0" bIns="0" anchor="t">
+          <a:bodyPr wrap="square" lIns="0" tIns="0" rIns="0" bIns="0" anchor="t">
             <a:spAutoFit/>
           </a:bodyPr>
           <a:lstStyle/>
           <a:p>
             <a:pPr algn="l"/>
             <a:r>
-              <a:rPr b="0" sz="1350" i="0" u="none">
+              <a:rPr sz="1350" b="0" i="0" u="none">
                 <a:solidFill>
                   <a:srgbClr val="94A3B8"/>
                 </a:solidFill>
@@ -3328,7 +3335,7 @@
         </p:nvSpPr>
         <p:spPr>
           <a:xfrm>
-            <a:off x="2847975" y="5011935"/>
+            <a:off x="2847975" y="4873823"/>
             <a:ext cx="1552575" cy="457200"/>
           </a:xfrm>
           <a:prstGeom prst="rect">
@@ -3337,7 +3344,7 @@
           <a:noFill/>
         </p:spPr>
         <p:txBody>
-          <a:bodyPr wrap="square" lIns="0" rIns="0" tIns="0" bIns="0" anchor="t">
+          <a:bodyPr wrap="square" lIns="0" tIns="0" rIns="0" bIns="0" anchor="t">
             <a:spAutoFit/>
           </a:bodyPr>
           <a:lstStyle/>
@@ -3348,7 +3355,7 @@
               </a:lnSpc>
             </a:pPr>
             <a:r>
-              <a:rPr b="1" sz="3600" i="0" u="none">
+              <a:rPr sz="3600" b="1" i="0" u="none">
                 <a:solidFill>
                   <a:srgbClr val="F8FAFC"/>
                 </a:solidFill>
@@ -3367,7 +3374,7 @@
         </p:nvSpPr>
         <p:spPr>
           <a:xfrm>
-            <a:off x="2847975" y="5545335"/>
+            <a:off x="2847975" y="5407223"/>
             <a:ext cx="1552575" cy="200025"/>
           </a:xfrm>
           <a:prstGeom prst="rect">
@@ -3376,14 +3383,14 @@
           <a:noFill/>
         </p:spPr>
         <p:txBody>
-          <a:bodyPr wrap="square" lIns="0" rIns="0" tIns="0" bIns="0" anchor="t">
+          <a:bodyPr wrap="square" lIns="0" tIns="0" rIns="0" bIns="0" anchor="t">
             <a:spAutoFit/>
           </a:bodyPr>
           <a:lstStyle/>
           <a:p>
             <a:pPr algn="l"/>
             <a:r>
-              <a:rPr b="0" sz="1350" i="0" u="none">
+              <a:rPr sz="1350" b="0" i="0" u="none">
                 <a:solidFill>
                   <a:srgbClr val="94A3B8"/>
                 </a:solidFill>
@@ -3394,16 +3401,121 @@
           </a:p>
         </p:txBody>
       </p:sp>
-      <p:sp>
-        <p:nvSpPr>
-          <p:cNvPr id="10" name="TextBox 9"/>
+    </p:spTree>
+  </p:cSld>
+  <p:clrMapOvr>
+    <a:masterClrMapping/>
+  </p:clrMapOvr>
+</p:sld>
+</file>
+
+<file path=ppt/slides/slide10.xml><?xml version="1.0" encoding="utf-8"?>
+<p:sld xmlns:a="http://schemas.openxmlformats.org/drawingml/2006/main" xmlns:r="http://schemas.openxmlformats.org/officeDocument/2006/relationships" xmlns:p="http://schemas.openxmlformats.org/presentationml/2006/main">
+  <p:cSld>
+    <p:bg>
+      <p:bgPr>
+        <a:solidFill>
+          <a:srgbClr val="0F172A"/>
+        </a:solidFill>
+        <a:effectLst/>
+      </p:bgPr>
+    </p:bg>
+    <p:spTree>
+      <p:nvGrpSpPr>
+        <p:cNvPr id="1" name=""/>
+        <p:cNvGrpSpPr/>
+        <p:nvPr/>
+      </p:nvGrpSpPr>
+      <p:grpSpPr>
+        <a:xfrm>
+          <a:off x="0" y="0"/>
+          <a:ext cx="0" cy="0"/>
+          <a:chOff x="0" y="0"/>
+          <a:chExt cx="0" cy="0"/>
+        </a:xfrm>
+      </p:grpSpPr>
+      <p:pic>
+        <p:nvPicPr>
+          <p:cNvPr id="2" name="Picture 1" descr="image.png"/>
+          <p:cNvPicPr>
+            <a:picLocks noChangeAspect="1"/>
+          </p:cNvPicPr>
+          <p:nvPr/>
+        </p:nvPicPr>
+        <p:blipFill>
+          <a:blip r:embed="rId2"/>
+          <a:stretch>
+            <a:fillRect/>
+          </a:stretch>
+        </p:blipFill>
+        <p:spPr>
+          <a:xfrm>
+            <a:off x="1333500" y="2709862"/>
+            <a:ext cx="2870150" cy="2533650"/>
+          </a:xfrm>
+          <a:prstGeom prst="rect">
+            <a:avLst/>
+          </a:prstGeom>
+        </p:spPr>
+      </p:pic>
+      <p:pic>
+        <p:nvPicPr>
+          <p:cNvPr id="3" name="Picture 2" descr="image.png"/>
+          <p:cNvPicPr>
+            <a:picLocks noChangeAspect="1"/>
+          </p:cNvPicPr>
+          <p:nvPr/>
+        </p:nvPicPr>
+        <p:blipFill>
+          <a:blip r:embed="rId3"/>
+          <a:stretch>
+            <a:fillRect/>
+          </a:stretch>
+        </p:blipFill>
+        <p:spPr>
+          <a:xfrm>
+            <a:off x="4660850" y="2709862"/>
+            <a:ext cx="2870150" cy="2533650"/>
+          </a:xfrm>
+          <a:prstGeom prst="rect">
+            <a:avLst/>
+          </a:prstGeom>
+        </p:spPr>
+      </p:pic>
+      <p:pic>
+        <p:nvPicPr>
+          <p:cNvPr id="4" name="Picture 3" descr="image.png"/>
+          <p:cNvPicPr>
+            <a:picLocks noChangeAspect="1"/>
+          </p:cNvPicPr>
+          <p:nvPr/>
+        </p:nvPicPr>
+        <p:blipFill>
+          <a:blip r:embed="rId4"/>
+          <a:stretch>
+            <a:fillRect/>
+          </a:stretch>
+        </p:blipFill>
+        <p:spPr>
+          <a:xfrm>
+            <a:off x="7988200" y="2709862"/>
+            <a:ext cx="2870150" cy="2533650"/>
+          </a:xfrm>
+          <a:prstGeom prst="rect">
+            <a:avLst/>
+          </a:prstGeom>
+        </p:spPr>
+      </p:pic>
+      <p:sp>
+        <p:nvSpPr>
+          <p:cNvPr id="5" name="TextBox 4"/>
           <p:cNvSpPr txBox="1"/>
           <p:nvPr/>
         </p:nvSpPr>
         <p:spPr>
           <a:xfrm>
-            <a:off x="5010150" y="5011935"/>
-            <a:ext cx="1047750" cy="457200"/>
+            <a:off x="5298281" y="1004887"/>
+            <a:ext cx="1595437" cy="190500"/>
           </a:xfrm>
           <a:prstGeom prst="rect">
             <a:avLst/>
@@ -3411,28 +3523,177 @@
           <a:noFill/>
         </p:spPr>
         <p:txBody>
-          <a:bodyPr wrap="square" lIns="0" rIns="0" tIns="0" bIns="0" anchor="t">
+          <a:bodyPr wrap="square" lIns="0" tIns="0" rIns="0" bIns="0" anchor="t">
             <a:spAutoFit/>
           </a:bodyPr>
           <a:lstStyle/>
           <a:p>
-            <a:pPr algn="l">
-              <a:lnSpc>
-                <a:spcPts val="3600"/>
-              </a:lnSpc>
-            </a:pPr>
-            <a:r>
-              <a:rPr b="1" sz="3600" i="0" u="none">
+            <a:pPr algn="ctr"/>
+            <a:r>
+              <a:rPr sz="1200" b="1" i="0" u="none">
+                <a:solidFill>
+                  <a:srgbClr val="38BDF8"/>
+                </a:solidFill>
+                <a:latin typeface="Inter"/>
+              </a:rPr>
+              <a:t>09 • CONCLUSION</a:t>
+            </a:r>
+          </a:p>
+        </p:txBody>
+      </p:sp>
+      <p:sp>
+        <p:nvSpPr>
+          <p:cNvPr id="6" name="TextBox 5"/>
+          <p:cNvSpPr txBox="1"/>
+          <p:nvPr/>
+        </p:nvSpPr>
+        <p:spPr>
+          <a:xfrm>
+            <a:off x="3705701" y="1423987"/>
+            <a:ext cx="4780597" cy="676275"/>
+          </a:xfrm>
+          <a:prstGeom prst="rect">
+            <a:avLst/>
+          </a:prstGeom>
+          <a:noFill/>
+        </p:spPr>
+        <p:txBody>
+          <a:bodyPr wrap="square" lIns="0" tIns="0" rIns="0" bIns="0" anchor="t">
+            <a:spAutoFit/>
+          </a:bodyPr>
+          <a:lstStyle/>
+          <a:p>
+            <a:pPr algn="ctr"/>
+            <a:r>
+              <a:rPr sz="4200" b="1" i="0" u="none">
                 <a:solidFill>
                   <a:srgbClr val="F8FAFC"/>
                 </a:solidFill>
                 <a:latin typeface="Space Grotesk"/>
               </a:rPr>
-              <a:t>0.01</a:t>
-            </a:r>
-          </a:p>
-        </p:txBody>
-      </p:sp>
+              <a:t>Pipeline Delivered</a:t>
+            </a:r>
+          </a:p>
+        </p:txBody>
+      </p:sp>
+      <p:pic>
+        <p:nvPicPr>
+          <p:cNvPr id="7" name="Picture 6" descr="image.png"/>
+          <p:cNvPicPr>
+            <a:picLocks noChangeAspect="1"/>
+          </p:cNvPicPr>
+          <p:nvPr/>
+        </p:nvPicPr>
+        <p:blipFill>
+          <a:blip r:embed="rId5"/>
+          <a:stretch>
+            <a:fillRect/>
+          </a:stretch>
+        </p:blipFill>
+        <p:spPr>
+          <a:xfrm>
+            <a:off x="2578000" y="3167062"/>
+            <a:ext cx="381000" cy="381000"/>
+          </a:xfrm>
+          <a:prstGeom prst="rect">
+            <a:avLst/>
+          </a:prstGeom>
+        </p:spPr>
+      </p:pic>
+      <p:sp>
+        <p:nvSpPr>
+          <p:cNvPr id="8" name="TextBox 7"/>
+          <p:cNvSpPr txBox="1"/>
+          <p:nvPr/>
+        </p:nvSpPr>
+        <p:spPr>
+          <a:xfrm>
+            <a:off x="1741806" y="3776662"/>
+            <a:ext cx="2053537" cy="295275"/>
+          </a:xfrm>
+          <a:prstGeom prst="rect">
+            <a:avLst/>
+          </a:prstGeom>
+          <a:noFill/>
+        </p:spPr>
+        <p:txBody>
+          <a:bodyPr wrap="square" lIns="0" tIns="0" rIns="0" bIns="0" anchor="t">
+            <a:spAutoFit/>
+          </a:bodyPr>
+          <a:lstStyle/>
+          <a:p>
+            <a:pPr algn="ctr"/>
+            <a:r>
+              <a:rPr sz="1800" b="1" i="0" u="none">
+                <a:solidFill>
+                  <a:srgbClr val="F8FAFC"/>
+                </a:solidFill>
+                <a:latin typeface="Space Grotesk"/>
+              </a:rPr>
+              <a:t>Engineered</a:t>
+            </a:r>
+          </a:p>
+        </p:txBody>
+      </p:sp>
+      <p:sp>
+        <p:nvSpPr>
+          <p:cNvPr id="9" name="TextBox 8"/>
+          <p:cNvSpPr txBox="1"/>
+          <p:nvPr/>
+        </p:nvSpPr>
+        <p:spPr>
+          <a:xfrm>
+            <a:off x="1790700" y="4186237"/>
+            <a:ext cx="1955750" cy="600075"/>
+          </a:xfrm>
+          <a:prstGeom prst="rect">
+            <a:avLst/>
+          </a:prstGeom>
+          <a:noFill/>
+        </p:spPr>
+        <p:txBody>
+          <a:bodyPr wrap="square" lIns="0" tIns="0" rIns="0" bIns="0" anchor="t">
+            <a:spAutoFit/>
+          </a:bodyPr>
+          <a:lstStyle/>
+          <a:p>
+            <a:pPr algn="ctr"/>
+            <a:r>
+              <a:rPr sz="1350" b="0" i="0" u="none">
+                <a:solidFill>
+                  <a:srgbClr val="94A3B8"/>
+                </a:solidFill>
+                <a:latin typeface="Inter"/>
+              </a:rPr>
+              <a:t>11 unified spatial, sensor, and movement features.</a:t>
+            </a:r>
+          </a:p>
+        </p:txBody>
+      </p:sp>
+      <p:pic>
+        <p:nvPicPr>
+          <p:cNvPr id="10" name="Picture 9" descr="image.png"/>
+          <p:cNvPicPr>
+            <a:picLocks noChangeAspect="1"/>
+          </p:cNvPicPr>
+          <p:nvPr/>
+        </p:nvPicPr>
+        <p:blipFill>
+          <a:blip r:embed="rId6"/>
+          <a:stretch>
+            <a:fillRect/>
+          </a:stretch>
+        </p:blipFill>
+        <p:spPr>
+          <a:xfrm>
+            <a:off x="5905351" y="3167062"/>
+            <a:ext cx="381000" cy="381000"/>
+          </a:xfrm>
+          <a:prstGeom prst="rect">
+            <a:avLst/>
+          </a:prstGeom>
+        </p:spPr>
+      </p:pic>
       <p:sp>
         <p:nvSpPr>
           <p:cNvPr id="11" name="TextBox 10"/>
@@ -3441,8 +3702,8 @@
         </p:nvSpPr>
         <p:spPr>
           <a:xfrm>
-            <a:off x="5010150" y="5545335"/>
-            <a:ext cx="1047750" cy="200025"/>
+            <a:off x="5069156" y="3776662"/>
+            <a:ext cx="2053537" cy="295275"/>
           </a:xfrm>
           <a:prstGeom prst="rect">
             <a:avLst/>
@@ -3450,20 +3711,149 @@
           <a:noFill/>
         </p:spPr>
         <p:txBody>
-          <a:bodyPr wrap="square" lIns="0" rIns="0" tIns="0" bIns="0" anchor="t">
+          <a:bodyPr wrap="square" lIns="0" tIns="0" rIns="0" bIns="0" anchor="t">
             <a:spAutoFit/>
           </a:bodyPr>
           <a:lstStyle/>
           <a:p>
-            <a:pPr algn="l"/>
-            <a:r>
-              <a:rPr b="0" sz="1350" i="0" u="none">
+            <a:pPr algn="ctr"/>
+            <a:r>
+              <a:rPr sz="1800" b="1" i="0" u="none">
+                <a:solidFill>
+                  <a:srgbClr val="F8FAFC"/>
+                </a:solidFill>
+                <a:latin typeface="Space Grotesk"/>
+              </a:rPr>
+              <a:t>Optimized</a:t>
+            </a:r>
+          </a:p>
+        </p:txBody>
+      </p:sp>
+      <p:sp>
+        <p:nvSpPr>
+          <p:cNvPr id="12" name="TextBox 11"/>
+          <p:cNvSpPr txBox="1"/>
+          <p:nvPr/>
+        </p:nvSpPr>
+        <p:spPr>
+          <a:xfrm>
+            <a:off x="5118050" y="4186237"/>
+            <a:ext cx="1955750" cy="600075"/>
+          </a:xfrm>
+          <a:prstGeom prst="rect">
+            <a:avLst/>
+          </a:prstGeom>
+          <a:noFill/>
+        </p:spPr>
+        <p:txBody>
+          <a:bodyPr wrap="square" lIns="0" tIns="0" rIns="0" bIns="0" anchor="t">
+            <a:spAutoFit/>
+          </a:bodyPr>
+          <a:lstStyle/>
+          <a:p>
+            <a:pPr algn="ctr"/>
+            <a:r>
+              <a:rPr sz="1350" b="0" i="0" u="none">
                 <a:solidFill>
                   <a:srgbClr val="94A3B8"/>
                 </a:solidFill>
                 <a:latin typeface="Inter"/>
               </a:rPr>
-              <a:t>Best Ridge α</a:t>
+              <a:t>Ridge regression tuned for highly correlated predictors.</a:t>
+            </a:r>
+          </a:p>
+        </p:txBody>
+      </p:sp>
+      <p:pic>
+        <p:nvPicPr>
+          <p:cNvPr id="13" name="Picture 12" descr="image.png"/>
+          <p:cNvPicPr>
+            <a:picLocks noChangeAspect="1"/>
+          </p:cNvPicPr>
+          <p:nvPr/>
+        </p:nvPicPr>
+        <p:blipFill>
+          <a:blip r:embed="rId7"/>
+          <a:stretch>
+            <a:fillRect/>
+          </a:stretch>
+        </p:blipFill>
+        <p:spPr>
+          <a:xfrm>
+            <a:off x="9208889" y="3167062"/>
+            <a:ext cx="428625" cy="381000"/>
+          </a:xfrm>
+          <a:prstGeom prst="rect">
+            <a:avLst/>
+          </a:prstGeom>
+        </p:spPr>
+      </p:pic>
+      <p:sp>
+        <p:nvSpPr>
+          <p:cNvPr id="14" name="TextBox 13"/>
+          <p:cNvSpPr txBox="1"/>
+          <p:nvPr/>
+        </p:nvSpPr>
+        <p:spPr>
+          <a:xfrm>
+            <a:off x="8396507" y="3776662"/>
+            <a:ext cx="2053537" cy="295275"/>
+          </a:xfrm>
+          <a:prstGeom prst="rect">
+            <a:avLst/>
+          </a:prstGeom>
+          <a:noFill/>
+        </p:spPr>
+        <p:txBody>
+          <a:bodyPr wrap="square" lIns="0" tIns="0" rIns="0" bIns="0" anchor="t">
+            <a:spAutoFit/>
+          </a:bodyPr>
+          <a:lstStyle/>
+          <a:p>
+            <a:pPr algn="ctr"/>
+            <a:r>
+              <a:rPr sz="1800" b="1" i="0" u="none">
+                <a:solidFill>
+                  <a:srgbClr val="F8FAFC"/>
+                </a:solidFill>
+                <a:latin typeface="Space Grotesk"/>
+              </a:rPr>
+              <a:t>Deployed</a:t>
+            </a:r>
+          </a:p>
+        </p:txBody>
+      </p:sp>
+      <p:sp>
+        <p:nvSpPr>
+          <p:cNvPr id="15" name="TextBox 14"/>
+          <p:cNvSpPr txBox="1"/>
+          <p:nvPr/>
+        </p:nvSpPr>
+        <p:spPr>
+          <a:xfrm>
+            <a:off x="8445400" y="4186237"/>
+            <a:ext cx="1955750" cy="600075"/>
+          </a:xfrm>
+          <a:prstGeom prst="rect">
+            <a:avLst/>
+          </a:prstGeom>
+          <a:noFill/>
+        </p:spPr>
+        <p:txBody>
+          <a:bodyPr wrap="square" lIns="0" tIns="0" rIns="0" bIns="0" anchor="t">
+            <a:spAutoFit/>
+          </a:bodyPr>
+          <a:lstStyle/>
+          <a:p>
+            <a:pPr algn="ctr"/>
+            <a:r>
+              <a:rPr sz="1350" b="0" i="0" u="none">
+                <a:solidFill>
+                  <a:srgbClr val="94A3B8"/>
+                </a:solidFill>
+                <a:latin typeface="Inter"/>
+              </a:rPr>
+              <a:t>Interactive Power BI spatial congestion tracking.</a:t>
             </a:r>
           </a:p>
         </p:txBody>
@@ -3477,7 +3867,7 @@
 </file>
 
 <file path=ppt/slides/slide2.xml><?xml version="1.0" encoding="utf-8"?>
-<p:sld xmlns:a="http://schemas.openxmlformats.org/drawingml/2006/main" xmlns:p="http://schemas.openxmlformats.org/presentationml/2006/main" xmlns:r="http://schemas.openxmlformats.org/officeDocument/2006/relationships">
+<p:sld xmlns:a="http://schemas.openxmlformats.org/drawingml/2006/main" xmlns:r="http://schemas.openxmlformats.org/officeDocument/2006/relationships" xmlns:p="http://schemas.openxmlformats.org/presentationml/2006/main">
   <p:cSld>
     <p:bg>
       <p:bgPr>
@@ -3493,7 +3883,14 @@
         <p:cNvGrpSpPr/>
         <p:nvPr/>
       </p:nvGrpSpPr>
-      <p:grpSpPr/>
+      <p:grpSpPr>
+        <a:xfrm>
+          <a:off x="0" y="0"/>
+          <a:ext cx="0" cy="0"/>
+          <a:chOff x="0" y="0"/>
+          <a:chExt cx="0" cy="0"/>
+        </a:xfrm>
+      </p:grpSpPr>
       <p:pic>
         <p:nvPicPr>
           <p:cNvPr id="2" name="Picture 1" descr="image.png"/>
@@ -3582,8 +3979,8 @@
         </p:blipFill>
         <p:spPr>
           <a:xfrm>
-            <a:off x="8077200" y="2243137"/>
-            <a:ext cx="3352800" cy="2390775"/>
+            <a:off x="8077200" y="2357437"/>
+            <a:ext cx="3352800" cy="2162175"/>
           </a:xfrm>
           <a:prstGeom prst="rect">
             <a:avLst/>
@@ -3607,14 +4004,14 @@
           <a:noFill/>
         </p:spPr>
         <p:txBody>
-          <a:bodyPr wrap="square" lIns="0" rIns="0" tIns="0" bIns="0" anchor="t">
+          <a:bodyPr wrap="square" lIns="0" tIns="0" rIns="0" bIns="0" anchor="t">
             <a:spAutoFit/>
           </a:bodyPr>
           <a:lstStyle/>
           <a:p>
             <a:pPr algn="l"/>
             <a:r>
-              <a:rPr b="1" sz="1200" i="0" u="none">
+              <a:rPr sz="1200" b="1" i="0" u="none">
                 <a:solidFill>
                   <a:srgbClr val="38BDF8"/>
                 </a:solidFill>
@@ -3642,14 +4039,14 @@
           <a:noFill/>
         </p:spPr>
         <p:txBody>
-          <a:bodyPr wrap="square" lIns="0" rIns="0" tIns="0" bIns="0" anchor="t">
+          <a:bodyPr wrap="square" lIns="0" tIns="0" rIns="0" bIns="0" anchor="t">
             <a:spAutoFit/>
           </a:bodyPr>
           <a:lstStyle/>
           <a:p>
             <a:pPr algn="l"/>
             <a:r>
-              <a:rPr b="1" sz="3600" i="0" u="none">
+              <a:rPr sz="3600" b="1" i="0" u="none">
                 <a:solidFill>
                   <a:srgbClr val="0F172A"/>
                 </a:solidFill>
@@ -3677,14 +4074,14 @@
           <a:noFill/>
         </p:spPr>
         <p:txBody>
-          <a:bodyPr wrap="square" lIns="0" rIns="0" tIns="0" bIns="0" anchor="t">
+          <a:bodyPr wrap="square" lIns="0" tIns="0" rIns="0" bIns="0" anchor="t">
             <a:spAutoFit/>
           </a:bodyPr>
           <a:lstStyle/>
           <a:p>
             <a:pPr algn="ctr"/>
             <a:r>
-              <a:rPr b="1" sz="1800" i="0" u="none">
+              <a:rPr sz="1800" b="1" i="0" u="none">
                 <a:solidFill>
                   <a:srgbClr val="38BDF8"/>
                 </a:solidFill>
@@ -3693,7 +4090,7 @@
               <a:t>Target Variable:</a:t>
             </a:r>
             <a:r>
-              <a:rPr b="0" sz="1800" i="0" u="none">
+              <a:rPr sz="1800" b="0" i="0" u="none">
                 <a:solidFill>
                   <a:srgbClr val="F8FAFC"/>
                 </a:solidFill>
@@ -3702,7 +4099,7 @@
               <a:t> Predict continuous </a:t>
             </a:r>
             <a:r>
-              <a:rPr b="1" sz="1800" i="0" u="none">
+              <a:rPr sz="1800" b="1" i="0" u="none">
                 <a:solidFill>
                   <a:srgbClr val="F8FAFC"/>
                 </a:solidFill>
@@ -3711,7 +4108,7 @@
               <a:t>People_Count</a:t>
             </a:r>
             <a:r>
-              <a:rPr b="0" sz="1800" i="0" u="none">
+              <a:rPr sz="1800" b="0" i="0" u="none">
                 <a:solidFill>
                   <a:srgbClr val="F8FAFC"/>
                 </a:solidFill>
@@ -3763,14 +4160,14 @@
           <a:noFill/>
         </p:spPr>
         <p:txBody>
-          <a:bodyPr wrap="square" lIns="0" rIns="0" tIns="0" bIns="0" anchor="t">
+          <a:bodyPr wrap="square" lIns="0" tIns="0" rIns="0" bIns="0" anchor="t">
             <a:spAutoFit/>
           </a:bodyPr>
           <a:lstStyle/>
           <a:p>
             <a:pPr algn="l"/>
             <a:r>
-              <a:rPr b="1" sz="1800" i="0" u="none">
+              <a:rPr sz="1800" b="1" i="0" u="none">
                 <a:solidFill>
                   <a:srgbClr val="0F172A"/>
                 </a:solidFill>
@@ -3798,14 +4195,14 @@
           <a:noFill/>
         </p:spPr>
         <p:txBody>
-          <a:bodyPr wrap="square" lIns="0" rIns="0" tIns="0" bIns="0" anchor="t">
+          <a:bodyPr wrap="square" lIns="0" tIns="0" rIns="0" bIns="0" anchor="t">
             <a:spAutoFit/>
           </a:bodyPr>
           <a:lstStyle/>
           <a:p>
             <a:pPr algn="l"/>
             <a:r>
-              <a:rPr b="0" sz="1500" i="0" u="none">
+              <a:rPr sz="1500" b="0" i="0" u="none">
                 <a:solidFill>
                   <a:srgbClr val="64748B"/>
                 </a:solidFill>
@@ -3857,14 +4254,14 @@
           <a:noFill/>
         </p:spPr>
         <p:txBody>
-          <a:bodyPr wrap="square" lIns="0" rIns="0" tIns="0" bIns="0" anchor="t">
+          <a:bodyPr wrap="square" lIns="0" tIns="0" rIns="0" bIns="0" anchor="t">
             <a:spAutoFit/>
           </a:bodyPr>
           <a:lstStyle/>
           <a:p>
             <a:pPr algn="l"/>
             <a:r>
-              <a:rPr b="1" sz="1800" i="0" u="none">
+              <a:rPr sz="1800" b="1" i="0" u="none">
                 <a:solidFill>
                   <a:srgbClr val="0F172A"/>
                 </a:solidFill>
@@ -3892,14 +4289,14 @@
           <a:noFill/>
         </p:spPr>
         <p:txBody>
-          <a:bodyPr wrap="square" lIns="0" rIns="0" tIns="0" bIns="0" anchor="t">
+          <a:bodyPr wrap="square" lIns="0" tIns="0" rIns="0" bIns="0" anchor="t">
             <a:spAutoFit/>
           </a:bodyPr>
           <a:lstStyle/>
           <a:p>
             <a:pPr algn="l"/>
             <a:r>
-              <a:rPr b="0" sz="1500" i="0" u="none">
+              <a:rPr sz="1500" b="0" i="0" u="none">
                 <a:solidFill>
                   <a:srgbClr val="64748B"/>
                 </a:solidFill>
@@ -3926,7 +4323,7 @@
         </p:blipFill>
         <p:spPr>
           <a:xfrm>
-            <a:off x="8458200" y="2624137"/>
+            <a:off x="8458200" y="2738437"/>
             <a:ext cx="304800" cy="304800"/>
           </a:xfrm>
           <a:prstGeom prst="rect">
@@ -3942,7 +4339,7 @@
         </p:nvSpPr>
         <p:spPr>
           <a:xfrm>
-            <a:off x="8458200" y="3157537"/>
+            <a:off x="8458200" y="3271837"/>
             <a:ext cx="2720340" cy="295275"/>
           </a:xfrm>
           <a:prstGeom prst="rect">
@@ -3951,14 +4348,14 @@
           <a:noFill/>
         </p:spPr>
         <p:txBody>
-          <a:bodyPr wrap="square" lIns="0" rIns="0" tIns="0" bIns="0" anchor="t">
+          <a:bodyPr wrap="square" lIns="0" tIns="0" rIns="0" bIns="0" anchor="t">
             <a:spAutoFit/>
           </a:bodyPr>
           <a:lstStyle/>
           <a:p>
             <a:pPr algn="l"/>
             <a:r>
-              <a:rPr b="1" sz="1800" i="0" u="none">
+              <a:rPr sz="1800" b="1" i="0" u="none">
                 <a:solidFill>
                   <a:srgbClr val="0F172A"/>
                 </a:solidFill>
@@ -3977,8 +4374,8 @@
         </p:nvSpPr>
         <p:spPr>
           <a:xfrm>
-            <a:off x="8458200" y="3567112"/>
-            <a:ext cx="2590800" cy="685800"/>
+            <a:off x="8458200" y="3681412"/>
+            <a:ext cx="2590800" cy="457200"/>
           </a:xfrm>
           <a:prstGeom prst="rect">
             <a:avLst/>
@@ -3986,20 +4383,20 @@
           <a:noFill/>
         </p:spPr>
         <p:txBody>
-          <a:bodyPr wrap="square" lIns="0" rIns="0" tIns="0" bIns="0" anchor="t">
+          <a:bodyPr wrap="square" lIns="0" tIns="0" rIns="0" bIns="0" anchor="t">
             <a:spAutoFit/>
           </a:bodyPr>
           <a:lstStyle/>
           <a:p>
             <a:pPr algn="l"/>
             <a:r>
-              <a:rPr b="0" sz="1500" i="0" u="none">
+              <a:rPr sz="1500" b="0" i="0" u="none">
                 <a:solidFill>
                   <a:srgbClr val="64748B"/>
                 </a:solidFill>
                 <a:latin typeface="Inter"/>
               </a:rPr>
-              <a:t>Optimize security allocation and crowd-flow management.</a:t>
+              <a:t>Optimize security allocation and flow management.</a:t>
             </a:r>
           </a:p>
         </p:txBody>
@@ -4013,7 +4410,7 @@
 </file>
 
 <file path=ppt/slides/slide3.xml><?xml version="1.0" encoding="utf-8"?>
-<p:sld xmlns:a="http://schemas.openxmlformats.org/drawingml/2006/main" xmlns:p="http://schemas.openxmlformats.org/presentationml/2006/main" xmlns:r="http://schemas.openxmlformats.org/officeDocument/2006/relationships">
+<p:sld xmlns:a="http://schemas.openxmlformats.org/drawingml/2006/main" xmlns:r="http://schemas.openxmlformats.org/officeDocument/2006/relationships" xmlns:p="http://schemas.openxmlformats.org/presentationml/2006/main">
   <p:cSld>
     <p:bg>
       <p:bgPr>
@@ -4029,7 +4426,14 @@
         <p:cNvGrpSpPr/>
         <p:nvPr/>
       </p:nvGrpSpPr>
-      <p:grpSpPr/>
+      <p:grpSpPr>
+        <a:xfrm>
+          <a:off x="0" y="0"/>
+          <a:ext cx="0" cy="0"/>
+          <a:chOff x="0" y="0"/>
+          <a:chExt cx="0" cy="0"/>
+        </a:xfrm>
+      </p:grpSpPr>
       <p:pic>
         <p:nvPicPr>
           <p:cNvPr id="2" name="Picture 1" descr="image.png"/>
@@ -4046,17 +4450,104 @@
         </p:blipFill>
         <p:spPr>
           <a:xfrm>
-            <a:off x="6091237" y="0"/>
-            <a:ext cx="6100762" cy="6858000"/>
+            <a:off x="4663380" y="0"/>
+            <a:ext cx="7528619" cy="6858000"/>
           </a:xfrm>
           <a:prstGeom prst="rect">
             <a:avLst/>
           </a:prstGeom>
         </p:spPr>
       </p:pic>
+      <p:sp>
+        <p:nvSpPr>
+          <p:cNvPr id="3" name="TextBox 2"/>
+          <p:cNvSpPr txBox="1"/>
+          <p:nvPr/>
+        </p:nvSpPr>
+        <p:spPr>
+          <a:xfrm>
+            <a:off x="762000" y="1392584"/>
+            <a:ext cx="3901380" cy="190500"/>
+          </a:xfrm>
+          <a:prstGeom prst="rect">
+            <a:avLst/>
+          </a:prstGeom>
+          <a:noFill/>
+        </p:spPr>
+        <p:txBody>
+          <a:bodyPr wrap="square" lIns="0" tIns="0" rIns="0" bIns="0" anchor="t">
+            <a:spAutoFit/>
+          </a:bodyPr>
+          <a:lstStyle/>
+          <a:p>
+            <a:pPr algn="l"/>
+            <a:r>
+              <a:rPr sz="1200" b="1" i="0" u="none">
+                <a:solidFill>
+                  <a:srgbClr val="38BDF8"/>
+                </a:solidFill>
+                <a:latin typeface="Inter"/>
+              </a:rPr>
+              <a:t>02 • EXPLORATORY ANALYSIS</a:t>
+            </a:r>
+          </a:p>
+        </p:txBody>
+      </p:sp>
+      <p:sp>
+        <p:nvSpPr>
+          <p:cNvPr id="4" name="TextBox 3"/>
+          <p:cNvSpPr txBox="1"/>
+          <p:nvPr/>
+        </p:nvSpPr>
+        <p:spPr>
+          <a:xfrm>
+            <a:off x="762000" y="1735484"/>
+            <a:ext cx="4096449" cy="1005780"/>
+          </a:xfrm>
+          <a:prstGeom prst="rect">
+            <a:avLst/>
+          </a:prstGeom>
+          <a:noFill/>
+        </p:spPr>
+        <p:txBody>
+          <a:bodyPr wrap="square" lIns="0" tIns="0" rIns="0" bIns="0" anchor="t">
+            <a:spAutoFit/>
+          </a:bodyPr>
+          <a:lstStyle/>
+          <a:p>
+            <a:pPr algn="l">
+              <a:lnSpc>
+                <a:spcPts val="3959"/>
+              </a:lnSpc>
+            </a:pPr>
+            <a:r>
+              <a:rPr sz="3600" b="1" i="0" u="none">
+                <a:solidFill>
+                  <a:srgbClr val="0F172A"/>
+                </a:solidFill>
+                <a:latin typeface="Space Grotesk"/>
+              </a:rPr>
+              <a:t>Sensor Data &amp;</a:t>
+            </a:r>
+            <a:r>
+              <a:t>
+</a:t>
+            </a:r>
+            <a:r>
+              <a:rPr sz="3600" b="1" i="0" u="none">
+                <a:solidFill>
+                  <a:srgbClr val="0F172A"/>
+                </a:solidFill>
+                <a:latin typeface="Space Grotesk"/>
+              </a:rPr>
+              <a:t> Spatial Mapping</a:t>
+            </a:r>
+          </a:p>
+        </p:txBody>
+      </p:sp>
       <p:pic>
         <p:nvPicPr>
-          <p:cNvPr id="3" name="Picture 2" descr="image.png"/>
+          <p:cNvPr id="6" name="Picture 5" descr="image.png"/>
           <p:cNvPicPr>
             <a:picLocks noChangeAspect="1"/>
           </p:cNvPicPr>
@@ -4070,8 +4561,8 @@
         </p:blipFill>
         <p:spPr>
           <a:xfrm>
-            <a:off x="6862762" y="1209675"/>
-            <a:ext cx="4567237" cy="4438650"/>
+            <a:off x="762000" y="3227040"/>
+            <a:ext cx="228600" cy="247650"/>
           </a:xfrm>
           <a:prstGeom prst="rect">
             <a:avLst/>
@@ -4080,14 +4571,14 @@
       </p:pic>
       <p:sp>
         <p:nvSpPr>
-          <p:cNvPr id="4" name="TextBox 3"/>
+          <p:cNvPr id="7" name="TextBox 6"/>
           <p:cNvSpPr txBox="1"/>
           <p:nvPr/>
         </p:nvSpPr>
         <p:spPr>
           <a:xfrm>
-            <a:off x="762000" y="1190625"/>
-            <a:ext cx="4567237" cy="190500"/>
+            <a:off x="1181100" y="3198465"/>
+            <a:ext cx="3656394" cy="295275"/>
           </a:xfrm>
           <a:prstGeom prst="rect">
             <a:avLst/>
@@ -4095,34 +4586,34 @@
           <a:noFill/>
         </p:spPr>
         <p:txBody>
-          <a:bodyPr wrap="square" lIns="0" rIns="0" tIns="0" bIns="0" anchor="t">
+          <a:bodyPr wrap="square" lIns="0" tIns="0" rIns="0" bIns="0" anchor="t">
             <a:spAutoFit/>
           </a:bodyPr>
           <a:lstStyle/>
           <a:p>
             <a:pPr algn="l"/>
             <a:r>
-              <a:rPr b="1" sz="1200" i="0" u="none">
-                <a:solidFill>
-                  <a:srgbClr val="38BDF8"/>
-                </a:solidFill>
-                <a:latin typeface="Inter"/>
-              </a:rPr>
-              <a:t>02 • MODEL SELECTION</a:t>
-            </a:r>
-          </a:p>
-        </p:txBody>
-      </p:sp>
-      <p:sp>
-        <p:nvSpPr>
-          <p:cNvPr id="5" name="TextBox 4"/>
+              <a:rPr sz="1800" b="1" i="0" u="none">
+                <a:solidFill>
+                  <a:srgbClr val="0F172A"/>
+                </a:solidFill>
+                <a:latin typeface="Space Grotesk"/>
+              </a:rPr>
+              <a:t>Target Distribution</a:t>
+            </a:r>
+          </a:p>
+        </p:txBody>
+      </p:sp>
+      <p:sp>
+        <p:nvSpPr>
+          <p:cNvPr id="8" name="TextBox 7"/>
           <p:cNvSpPr txBox="1"/>
           <p:nvPr/>
         </p:nvSpPr>
         <p:spPr>
           <a:xfrm>
-            <a:off x="762000" y="1533525"/>
-            <a:ext cx="4795599" cy="581025"/>
+            <a:off x="1181100" y="3569940"/>
+            <a:ext cx="3482280" cy="457200"/>
           </a:xfrm>
           <a:prstGeom prst="rect">
             <a:avLst/>
@@ -4130,254 +4621,27 @@
           <a:noFill/>
         </p:spPr>
         <p:txBody>
-          <a:bodyPr wrap="square" lIns="0" rIns="0" tIns="0" bIns="0" anchor="t">
+          <a:bodyPr wrap="square" lIns="0" tIns="0" rIns="0" bIns="0" anchor="t">
             <a:spAutoFit/>
           </a:bodyPr>
           <a:lstStyle/>
           <a:p>
             <a:pPr algn="l"/>
             <a:r>
-              <a:rPr b="1" sz="3600" i="0" u="none">
-                <a:solidFill>
-                  <a:srgbClr val="0F172A"/>
-                </a:solidFill>
-                <a:latin typeface="Space Grotesk"/>
-              </a:rPr>
-              <a:t>Ridge Regression</a:t>
-            </a:r>
-          </a:p>
-        </p:txBody>
-      </p:sp>
-      <p:sp>
-        <p:nvSpPr>
-          <p:cNvPr id="6" name="TextBox 5"/>
-          <p:cNvSpPr txBox="1"/>
-          <p:nvPr/>
-        </p:nvSpPr>
-        <p:spPr>
-          <a:xfrm>
-            <a:off x="7319962" y="1666875"/>
-            <a:ext cx="3652837" cy="228600"/>
-          </a:xfrm>
-          <a:prstGeom prst="rect">
-            <a:avLst/>
-          </a:prstGeom>
-          <a:noFill/>
-        </p:spPr>
-        <p:txBody>
-          <a:bodyPr wrap="square" lIns="0" rIns="0" tIns="0" bIns="0" anchor="t">
-            <a:spAutoFit/>
-          </a:bodyPr>
-          <a:lstStyle/>
-          <a:p>
-            <a:pPr algn="ctr"/>
-            <a:r>
-              <a:rPr b="1" sz="1500" i="0" u="none">
-                <a:solidFill>
-                  <a:srgbClr val="0F172A"/>
+              <a:rPr sz="1500" b="0" i="0" u="none">
+                <a:solidFill>
+                  <a:srgbClr val="64748B"/>
                 </a:solidFill>
                 <a:latin typeface="Inter"/>
               </a:rPr>
-              <a:t>FINAL TEST RESULT</a:t>
-            </a:r>
-          </a:p>
-        </p:txBody>
-      </p:sp>
-      <p:sp>
-        <p:nvSpPr>
-          <p:cNvPr id="7" name="TextBox 6"/>
-          <p:cNvSpPr txBox="1"/>
-          <p:nvPr/>
-        </p:nvSpPr>
-        <p:spPr>
-          <a:xfrm>
-            <a:off x="7319962" y="2200275"/>
-            <a:ext cx="3652837" cy="762000"/>
-          </a:xfrm>
-          <a:prstGeom prst="rect">
-            <a:avLst/>
-          </a:prstGeom>
-          <a:noFill/>
-        </p:spPr>
-        <p:txBody>
-          <a:bodyPr wrap="square" lIns="0" rIns="0" tIns="0" bIns="0" anchor="t">
-            <a:spAutoFit/>
-          </a:bodyPr>
-          <a:lstStyle/>
-          <a:p>
-            <a:pPr algn="ctr">
-              <a:lnSpc>
-                <a:spcPts val="6000"/>
-              </a:lnSpc>
-            </a:pPr>
-            <a:r>
-              <a:rPr b="1" sz="6000" i="0" u="none">
-                <a:solidFill>
-                  <a:srgbClr val="0F172A"/>
-                </a:solidFill>
-                <a:latin typeface="Space Grotesk"/>
-              </a:rPr>
-              <a:t>1.44</a:t>
-            </a:r>
-          </a:p>
-        </p:txBody>
-      </p:sp>
-      <p:sp>
-        <p:nvSpPr>
-          <p:cNvPr id="8" name="TextBox 7"/>
-          <p:cNvSpPr txBox="1"/>
-          <p:nvPr/>
-        </p:nvSpPr>
-        <p:spPr>
-          <a:xfrm>
-            <a:off x="7319962" y="3076575"/>
-            <a:ext cx="3652837" cy="228600"/>
-          </a:xfrm>
-          <a:prstGeom prst="rect">
-            <a:avLst/>
-          </a:prstGeom>
-          <a:noFill/>
-        </p:spPr>
-        <p:txBody>
-          <a:bodyPr wrap="square" lIns="0" rIns="0" tIns="0" bIns="0" anchor="t">
-            <a:spAutoFit/>
-          </a:bodyPr>
-          <a:lstStyle/>
-          <a:p>
-            <a:pPr algn="ctr"/>
-            <a:r>
-              <a:rPr b="0" sz="1500" i="0" u="none">
-                <a:solidFill>
-                  <a:srgbClr val="64748B"/>
-                </a:solidFill>
-                <a:latin typeface="Inter Medium"/>
-              </a:rPr>
-              <a:t>Root Mean Squared Error</a:t>
-            </a:r>
-          </a:p>
-        </p:txBody>
-      </p:sp>
-      <p:sp>
-        <p:nvSpPr>
-          <p:cNvPr id="9" name="Rectangle 8"/>
-          <p:cNvSpPr/>
-          <p:nvPr/>
-        </p:nvSpPr>
-        <p:spPr>
-          <a:xfrm>
-            <a:off x="8841581" y="3686175"/>
-            <a:ext cx="609600" cy="19050"/>
-          </a:xfrm>
-          <a:prstGeom prst="rect">
-            <a:avLst/>
-          </a:prstGeom>
-          <a:solidFill>
-            <a:srgbClr val="E2E8F0"/>
-          </a:solidFill>
-          <a:ln>
-            <a:noFill/>
-          </a:ln>
-          <a:effectLst/>
-        </p:spPr>
-        <p:style>
-          <a:lnRef idx="1">
-            <a:schemeClr val="accent1"/>
-          </a:lnRef>
-          <a:fillRef idx="3">
-            <a:schemeClr val="accent1"/>
-          </a:fillRef>
-          <a:effectRef idx="2">
-            <a:schemeClr val="accent1"/>
-          </a:effectRef>
-          <a:fontRef idx="minor">
-            <a:schemeClr val="lt1"/>
-          </a:fontRef>
-        </p:style>
-        <p:txBody>
-          <a:bodyPr rtlCol="0" anchor="ctr"/>
-          <a:lstStyle/>
-          <a:p>
-            <a:pPr algn="ctr"/>
-          </a:p>
-        </p:txBody>
-      </p:sp>
-      <p:sp>
-        <p:nvSpPr>
-          <p:cNvPr id="10" name="TextBox 9"/>
-          <p:cNvSpPr txBox="1"/>
-          <p:nvPr/>
-        </p:nvSpPr>
-        <p:spPr>
-          <a:xfrm>
-            <a:off x="7319962" y="4086225"/>
-            <a:ext cx="3652837" cy="762000"/>
-          </a:xfrm>
-          <a:prstGeom prst="rect">
-            <a:avLst/>
-          </a:prstGeom>
-          <a:noFill/>
-        </p:spPr>
-        <p:txBody>
-          <a:bodyPr wrap="square" lIns="0" rIns="0" tIns="0" bIns="0" anchor="t">
-            <a:spAutoFit/>
-          </a:bodyPr>
-          <a:lstStyle/>
-          <a:p>
-            <a:pPr algn="ctr">
-              <a:lnSpc>
-                <a:spcPts val="6000"/>
-              </a:lnSpc>
-            </a:pPr>
-            <a:r>
-              <a:rPr b="1" sz="6000" i="0" u="none">
-                <a:solidFill>
-                  <a:srgbClr val="0F172A"/>
-                </a:solidFill>
-                <a:latin typeface="Space Grotesk"/>
-              </a:rPr>
-              <a:t>99.9%</a:t>
-            </a:r>
-          </a:p>
-        </p:txBody>
-      </p:sp>
-      <p:sp>
-        <p:nvSpPr>
-          <p:cNvPr id="11" name="TextBox 10"/>
-          <p:cNvSpPr txBox="1"/>
-          <p:nvPr/>
-        </p:nvSpPr>
-        <p:spPr>
-          <a:xfrm>
-            <a:off x="7319962" y="4962525"/>
-            <a:ext cx="3652837" cy="228600"/>
-          </a:xfrm>
-          <a:prstGeom prst="rect">
-            <a:avLst/>
-          </a:prstGeom>
-          <a:noFill/>
-        </p:spPr>
-        <p:txBody>
-          <a:bodyPr wrap="square" lIns="0" rIns="0" tIns="0" bIns="0" anchor="t">
-            <a:spAutoFit/>
-          </a:bodyPr>
-          <a:lstStyle/>
-          <a:p>
-            <a:pPr algn="ctr"/>
-            <a:r>
-              <a:rPr b="0" sz="1500" i="0" u="none">
-                <a:solidFill>
-                  <a:srgbClr val="64748B"/>
-                </a:solidFill>
-                <a:latin typeface="Inter Medium"/>
-              </a:rPr>
-              <a:t>Explained Variance (R²)</a:t>
+              <a:t>Even frequency spread across historical data.</a:t>
             </a:r>
           </a:p>
         </p:txBody>
       </p:sp>
       <p:pic>
         <p:nvPicPr>
-          <p:cNvPr id="12" name="Picture 11" descr="image.png"/>
+          <p:cNvPr id="9" name="Picture 8" descr="image.png"/>
           <p:cNvPicPr>
             <a:picLocks noChangeAspect="1"/>
           </p:cNvPicPr>
@@ -4391,8 +4655,8 @@
         </p:blipFill>
         <p:spPr>
           <a:xfrm>
-            <a:off x="762000" y="2600325"/>
-            <a:ext cx="257175" cy="247650"/>
+            <a:off x="762000" y="4360515"/>
+            <a:ext cx="228600" cy="247650"/>
           </a:xfrm>
           <a:prstGeom prst="rect">
             <a:avLst/>
@@ -4401,14 +4665,14 @@
       </p:pic>
       <p:sp>
         <p:nvSpPr>
-          <p:cNvPr id="13" name="TextBox 12"/>
+          <p:cNvPr id="10" name="TextBox 9"/>
           <p:cNvSpPr txBox="1"/>
           <p:nvPr/>
         </p:nvSpPr>
         <p:spPr>
           <a:xfrm>
-            <a:off x="1209675" y="2571750"/>
-            <a:ext cx="4325540" cy="295275"/>
+            <a:off x="1181100" y="4331940"/>
+            <a:ext cx="3656394" cy="295275"/>
           </a:xfrm>
           <a:prstGeom prst="rect">
             <a:avLst/>
@@ -4416,34 +4680,34 @@
           <a:noFill/>
         </p:spPr>
         <p:txBody>
-          <a:bodyPr wrap="square" lIns="0" rIns="0" tIns="0" bIns="0" anchor="t">
+          <a:bodyPr wrap="square" lIns="0" tIns="0" rIns="0" bIns="0" anchor="t">
             <a:spAutoFit/>
           </a:bodyPr>
           <a:lstStyle/>
           <a:p>
             <a:pPr algn="l"/>
             <a:r>
-              <a:rPr b="1" sz="1800" i="0" u="none">
+              <a:rPr sz="1800" b="1" i="0" u="none">
                 <a:solidFill>
                   <a:srgbClr val="0F172A"/>
                 </a:solidFill>
                 <a:latin typeface="Space Grotesk"/>
               </a:rPr>
-              <a:t>L2 Regularization</a:t>
-            </a:r>
-          </a:p>
-        </p:txBody>
-      </p:sp>
-      <p:sp>
-        <p:nvSpPr>
-          <p:cNvPr id="14" name="TextBox 13"/>
+              <a:t>Clear Predictors</a:t>
+            </a:r>
+          </a:p>
+        </p:txBody>
+      </p:sp>
+      <p:sp>
+        <p:nvSpPr>
+          <p:cNvPr id="11" name="TextBox 10"/>
           <p:cNvSpPr txBox="1"/>
           <p:nvPr/>
         </p:nvSpPr>
         <p:spPr>
           <a:xfrm>
-            <a:off x="1209675" y="2943225"/>
-            <a:ext cx="4119562" cy="457200"/>
+            <a:off x="1181100" y="4703415"/>
+            <a:ext cx="3482280" cy="457200"/>
           </a:xfrm>
           <a:prstGeom prst="rect">
             <a:avLst/>
@@ -4451,27 +4715,33 @@
           <a:noFill/>
         </p:spPr>
         <p:txBody>
-          <a:bodyPr wrap="square" lIns="0" rIns="0" tIns="0" bIns="0" anchor="t">
+          <a:bodyPr wrap="square" lIns="0" tIns="0" rIns="0" bIns="0" anchor="t">
             <a:spAutoFit/>
           </a:bodyPr>
           <a:lstStyle/>
           <a:p>
             <a:pPr algn="l"/>
             <a:r>
-              <a:rPr b="0" sz="1500" i="0" u="none">
+              <a:rPr sz="1500" b="0" i="0" u="none">
                 <a:solidFill>
                   <a:srgbClr val="64748B"/>
                 </a:solidFill>
                 <a:latin typeface="Inter"/>
               </a:rPr>
-              <a:t>Controls coefficient magnitude for correlated predictors.</a:t>
+              <a:t>Perfect linear alignment with detected heads.</a:t>
             </a:r>
           </a:p>
         </p:txBody>
       </p:sp>
       <p:pic>
         <p:nvPicPr>
-          <p:cNvPr id="15" name="Picture 14" descr="image.png"/>
+          <p:cNvPr id="13" name="Picture 12">
+            <a:extLst>
+              <a:ext uri="{FF2B5EF4-FFF2-40B4-BE49-F238E27FC236}">
+                <a16:creationId xmlns:a16="http://schemas.microsoft.com/office/drawing/2014/main" id="{A1625C79-6479-A899-202A-72FC520EFD2C}"/>
+              </a:ext>
+            </a:extLst>
+          </p:cNvPr>
           <p:cNvPicPr>
             <a:picLocks noChangeAspect="1"/>
           </p:cNvPicPr>
@@ -4485,87 +4755,23 @@
         </p:blipFill>
         <p:spPr>
           <a:xfrm>
-            <a:off x="762000" y="3733800"/>
-            <a:ext cx="228600" cy="247650"/>
+            <a:off x="4797846" y="98737"/>
+            <a:ext cx="3406435" cy="3375953"/>
           </a:xfrm>
           <a:prstGeom prst="rect">
             <a:avLst/>
           </a:prstGeom>
         </p:spPr>
       </p:pic>
-      <p:sp>
-        <p:nvSpPr>
-          <p:cNvPr id="16" name="TextBox 15"/>
-          <p:cNvSpPr txBox="1"/>
-          <p:nvPr/>
-        </p:nvSpPr>
-        <p:spPr>
-          <a:xfrm>
-            <a:off x="1181100" y="3705225"/>
-            <a:ext cx="4355544" cy="295275"/>
-          </a:xfrm>
-          <a:prstGeom prst="rect">
-            <a:avLst/>
-          </a:prstGeom>
-          <a:noFill/>
-        </p:spPr>
-        <p:txBody>
-          <a:bodyPr wrap="square" lIns="0" rIns="0" tIns="0" bIns="0" anchor="t">
-            <a:spAutoFit/>
-          </a:bodyPr>
-          <a:lstStyle/>
-          <a:p>
-            <a:pPr algn="l"/>
-            <a:r>
-              <a:rPr b="1" sz="1800" i="0" u="none">
-                <a:solidFill>
-                  <a:srgbClr val="0F172A"/>
-                </a:solidFill>
-                <a:latin typeface="Space Grotesk"/>
-              </a:rPr>
-              <a:t>Hyperparameter Tuning</a:t>
-            </a:r>
-          </a:p>
-        </p:txBody>
-      </p:sp>
-      <p:sp>
-        <p:nvSpPr>
-          <p:cNvPr id="17" name="TextBox 16"/>
-          <p:cNvSpPr txBox="1"/>
-          <p:nvPr/>
-        </p:nvSpPr>
-        <p:spPr>
-          <a:xfrm>
-            <a:off x="1181100" y="4076700"/>
-            <a:ext cx="4148137" cy="457200"/>
-          </a:xfrm>
-          <a:prstGeom prst="rect">
-            <a:avLst/>
-          </a:prstGeom>
-          <a:noFill/>
-        </p:spPr>
-        <p:txBody>
-          <a:bodyPr wrap="square" lIns="0" rIns="0" tIns="0" bIns="0" anchor="t">
-            <a:spAutoFit/>
-          </a:bodyPr>
-          <a:lstStyle/>
-          <a:p>
-            <a:pPr algn="l"/>
-            <a:r>
-              <a:rPr b="0" sz="1500" i="0" u="none">
-                <a:solidFill>
-                  <a:srgbClr val="64748B"/>
-                </a:solidFill>
-                <a:latin typeface="Inter"/>
-              </a:rPr>
-              <a:t>5-fold GridSearchCV across multiple penalties.</a:t>
-            </a:r>
-          </a:p>
-        </p:txBody>
-      </p:sp>
       <p:pic>
         <p:nvPicPr>
-          <p:cNvPr id="18" name="Picture 17" descr="image.png"/>
+          <p:cNvPr id="15" name="Picture 14">
+            <a:extLst>
+              <a:ext uri="{FF2B5EF4-FFF2-40B4-BE49-F238E27FC236}">
+                <a16:creationId xmlns:a16="http://schemas.microsoft.com/office/drawing/2014/main" id="{510882BD-4B5C-2CE4-945F-9A55FA8AE1B7}"/>
+              </a:ext>
+            </a:extLst>
+          </p:cNvPr>
           <p:cNvPicPr>
             <a:picLocks noChangeAspect="1"/>
           </p:cNvPicPr>
@@ -4579,84 +4785,44 @@
         </p:blipFill>
         <p:spPr>
           <a:xfrm>
-            <a:off x="762000" y="4867275"/>
-            <a:ext cx="228600" cy="247650"/>
+            <a:off x="8427689" y="106358"/>
+            <a:ext cx="3520745" cy="3368332"/>
           </a:xfrm>
           <a:prstGeom prst="rect">
             <a:avLst/>
           </a:prstGeom>
         </p:spPr>
       </p:pic>
-      <p:sp>
-        <p:nvSpPr>
-          <p:cNvPr id="19" name="TextBox 18"/>
-          <p:cNvSpPr txBox="1"/>
-          <p:nvPr/>
-        </p:nvSpPr>
-        <p:spPr>
-          <a:xfrm>
-            <a:off x="1181100" y="4838700"/>
-            <a:ext cx="4355544" cy="295275"/>
-          </a:xfrm>
-          <a:prstGeom prst="rect">
-            <a:avLst/>
-          </a:prstGeom>
-          <a:noFill/>
-        </p:spPr>
-        <p:txBody>
-          <a:bodyPr wrap="square" lIns="0" rIns="0" tIns="0" bIns="0" anchor="t">
-            <a:spAutoFit/>
-          </a:bodyPr>
-          <a:lstStyle/>
-          <a:p>
-            <a:pPr algn="l"/>
-            <a:r>
-              <a:rPr b="1" sz="1800" i="0" u="none">
-                <a:solidFill>
-                  <a:srgbClr val="0F172A"/>
-                </a:solidFill>
-                <a:latin typeface="Space Grotesk"/>
-              </a:rPr>
-              <a:t>Optimal Alpha</a:t>
-            </a:r>
-          </a:p>
-        </p:txBody>
-      </p:sp>
-      <p:sp>
-        <p:nvSpPr>
-          <p:cNvPr id="20" name="TextBox 19"/>
-          <p:cNvSpPr txBox="1"/>
-          <p:nvPr/>
-        </p:nvSpPr>
-        <p:spPr>
-          <a:xfrm>
-            <a:off x="1181100" y="5210175"/>
-            <a:ext cx="4148137" cy="457200"/>
-          </a:xfrm>
-          <a:prstGeom prst="rect">
-            <a:avLst/>
-          </a:prstGeom>
-          <a:noFill/>
-        </p:spPr>
-        <p:txBody>
-          <a:bodyPr wrap="square" lIns="0" rIns="0" tIns="0" bIns="0" anchor="t">
-            <a:spAutoFit/>
-          </a:bodyPr>
-          <a:lstStyle/>
-          <a:p>
-            <a:pPr algn="l"/>
-            <a:r>
-              <a:rPr b="0" sz="1500" i="0" u="none">
-                <a:solidFill>
-                  <a:srgbClr val="64748B"/>
-                </a:solidFill>
-                <a:latin typeface="Inter"/>
-              </a:rPr>
-              <a:t>α = 0.01 selected for final unseen test evaluation.</a:t>
-            </a:r>
-          </a:p>
-        </p:txBody>
-      </p:sp>
+      <p:pic>
+        <p:nvPicPr>
+          <p:cNvPr id="17" name="Picture 16">
+            <a:extLst>
+              <a:ext uri="{FF2B5EF4-FFF2-40B4-BE49-F238E27FC236}">
+                <a16:creationId xmlns:a16="http://schemas.microsoft.com/office/drawing/2014/main" id="{D8459F82-223F-4039-81F3-7EB4CACC1C1D}"/>
+              </a:ext>
+            </a:extLst>
+          </p:cNvPr>
+          <p:cNvPicPr>
+            <a:picLocks noChangeAspect="1"/>
+          </p:cNvPicPr>
+          <p:nvPr/>
+        </p:nvPicPr>
+        <p:blipFill>
+          <a:blip r:embed="rId7"/>
+          <a:stretch>
+            <a:fillRect/>
+          </a:stretch>
+        </p:blipFill>
+        <p:spPr>
+          <a:xfrm>
+            <a:off x="6501063" y="3501230"/>
+            <a:ext cx="3322608" cy="3330229"/>
+          </a:xfrm>
+          <a:prstGeom prst="rect">
+            <a:avLst/>
+          </a:prstGeom>
+        </p:spPr>
+      </p:pic>
     </p:spTree>
   </p:cSld>
   <p:clrMapOvr>
@@ -4666,7 +4832,1132 @@
 </file>
 
 <file path=ppt/slides/slide4.xml><?xml version="1.0" encoding="utf-8"?>
-<p:sld xmlns:a="http://schemas.openxmlformats.org/drawingml/2006/main" xmlns:p="http://schemas.openxmlformats.org/presentationml/2006/main" xmlns:r="http://schemas.openxmlformats.org/officeDocument/2006/relationships">
+<p:sld xmlns:a="http://schemas.openxmlformats.org/drawingml/2006/main" xmlns:r="http://schemas.openxmlformats.org/officeDocument/2006/relationships" xmlns:p="http://schemas.openxmlformats.org/presentationml/2006/main">
+  <p:cSld>
+    <p:bg>
+      <p:bgPr>
+        <a:solidFill>
+          <a:srgbClr val="FFFFFF"/>
+        </a:solidFill>
+        <a:effectLst/>
+      </p:bgPr>
+    </p:bg>
+    <p:spTree>
+      <p:nvGrpSpPr>
+        <p:cNvPr id="1" name=""/>
+        <p:cNvGrpSpPr/>
+        <p:nvPr/>
+      </p:nvGrpSpPr>
+      <p:grpSpPr>
+        <a:xfrm>
+          <a:off x="0" y="0"/>
+          <a:ext cx="0" cy="0"/>
+          <a:chOff x="0" y="0"/>
+          <a:chExt cx="0" cy="0"/>
+        </a:xfrm>
+      </p:grpSpPr>
+      <p:pic>
+        <p:nvPicPr>
+          <p:cNvPr id="2" name="Picture 1" descr="image.png"/>
+          <p:cNvPicPr>
+            <a:picLocks noChangeAspect="1"/>
+          </p:cNvPicPr>
+          <p:nvPr/>
+        </p:nvPicPr>
+        <p:blipFill>
+          <a:blip r:embed="rId2"/>
+          <a:stretch>
+            <a:fillRect/>
+          </a:stretch>
+        </p:blipFill>
+        <p:spPr>
+          <a:xfrm>
+            <a:off x="0" y="0"/>
+            <a:ext cx="6766619" cy="6858000"/>
+          </a:xfrm>
+          <a:prstGeom prst="rect">
+            <a:avLst/>
+          </a:prstGeom>
+        </p:spPr>
+      </p:pic>
+      <p:pic>
+        <p:nvPicPr>
+          <p:cNvPr id="3" name="Picture 2" descr="image.png"/>
+          <p:cNvPicPr>
+            <a:picLocks noChangeAspect="1"/>
+          </p:cNvPicPr>
+          <p:nvPr/>
+        </p:nvPicPr>
+        <p:blipFill>
+          <a:blip r:embed="rId3"/>
+          <a:stretch>
+            <a:fillRect/>
+          </a:stretch>
+        </p:blipFill>
+        <p:spPr>
+          <a:xfrm>
+            <a:off x="7528619" y="2893665"/>
+            <a:ext cx="3901380" cy="1285875"/>
+          </a:xfrm>
+          <a:prstGeom prst="rect">
+            <a:avLst/>
+          </a:prstGeom>
+        </p:spPr>
+      </p:pic>
+      <p:pic>
+        <p:nvPicPr>
+          <p:cNvPr id="4" name="Picture 3" descr="image.png"/>
+          <p:cNvPicPr>
+            <a:picLocks noChangeAspect="1"/>
+          </p:cNvPicPr>
+          <p:nvPr/>
+        </p:nvPicPr>
+        <p:blipFill>
+          <a:blip r:embed="rId3"/>
+          <a:stretch>
+            <a:fillRect/>
+          </a:stretch>
+        </p:blipFill>
+        <p:spPr>
+          <a:xfrm>
+            <a:off x="7528619" y="4484340"/>
+            <a:ext cx="3901380" cy="1285875"/>
+          </a:xfrm>
+          <a:prstGeom prst="rect">
+            <a:avLst/>
+          </a:prstGeom>
+        </p:spPr>
+      </p:pic>
+      <p:pic>
+        <p:nvPicPr>
+          <p:cNvPr id="5" name="Picture 4" descr="image.png"/>
+          <p:cNvPicPr>
+            <a:picLocks noChangeAspect="1"/>
+          </p:cNvPicPr>
+          <p:nvPr/>
+        </p:nvPicPr>
+        <p:blipFill>
+          <a:blip r:embed="rId4"/>
+          <a:stretch>
+            <a:fillRect/>
+          </a:stretch>
+        </p:blipFill>
+        <p:spPr>
+          <a:xfrm>
+            <a:off x="457200" y="457200"/>
+            <a:ext cx="5852219" cy="5943600"/>
+          </a:xfrm>
+          <a:prstGeom prst="rect">
+            <a:avLst/>
+          </a:prstGeom>
+        </p:spPr>
+      </p:pic>
+      <p:sp>
+        <p:nvSpPr>
+          <p:cNvPr id="6" name="TextBox 5"/>
+          <p:cNvSpPr txBox="1"/>
+          <p:nvPr/>
+        </p:nvSpPr>
+        <p:spPr>
+          <a:xfrm>
+            <a:off x="7528619" y="1087784"/>
+            <a:ext cx="3901380" cy="190500"/>
+          </a:xfrm>
+          <a:prstGeom prst="rect">
+            <a:avLst/>
+          </a:prstGeom>
+          <a:noFill/>
+        </p:spPr>
+        <p:txBody>
+          <a:bodyPr wrap="square" lIns="0" tIns="0" rIns="0" bIns="0" anchor="t">
+            <a:spAutoFit/>
+          </a:bodyPr>
+          <a:lstStyle/>
+          <a:p>
+            <a:pPr algn="l"/>
+            <a:r>
+              <a:rPr sz="1200" b="1" i="0" u="none">
+                <a:solidFill>
+                  <a:srgbClr val="38BDF8"/>
+                </a:solidFill>
+                <a:latin typeface="Inter"/>
+              </a:rPr>
+              <a:t>03 • VARIABLE RELATIONSHIPS</a:t>
+            </a:r>
+          </a:p>
+        </p:txBody>
+      </p:sp>
+      <p:sp>
+        <p:nvSpPr>
+          <p:cNvPr id="7" name="TextBox 6"/>
+          <p:cNvSpPr txBox="1"/>
+          <p:nvPr/>
+        </p:nvSpPr>
+        <p:spPr>
+          <a:xfrm>
+            <a:off x="7528619" y="1430684"/>
+            <a:ext cx="4096449" cy="1005780"/>
+          </a:xfrm>
+          <a:prstGeom prst="rect">
+            <a:avLst/>
+          </a:prstGeom>
+          <a:noFill/>
+        </p:spPr>
+        <p:txBody>
+          <a:bodyPr wrap="square" lIns="0" tIns="0" rIns="0" bIns="0" anchor="t">
+            <a:spAutoFit/>
+          </a:bodyPr>
+          <a:lstStyle/>
+          <a:p>
+            <a:pPr algn="l">
+              <a:lnSpc>
+                <a:spcPts val="3959"/>
+              </a:lnSpc>
+            </a:pPr>
+            <a:r>
+              <a:rPr sz="3600" b="1" i="0" u="none">
+                <a:solidFill>
+                  <a:srgbClr val="0F172A"/>
+                </a:solidFill>
+                <a:latin typeface="Space Grotesk"/>
+              </a:rPr>
+              <a:t>Near-Perfect Predictors</a:t>
+            </a:r>
+          </a:p>
+        </p:txBody>
+      </p:sp>
+      <p:sp>
+        <p:nvSpPr>
+          <p:cNvPr id="8" name="TextBox 7"/>
+          <p:cNvSpPr txBox="1"/>
+          <p:nvPr/>
+        </p:nvSpPr>
+        <p:spPr>
+          <a:xfrm>
+            <a:off x="7795319" y="3122265"/>
+            <a:ext cx="3576384" cy="295275"/>
+          </a:xfrm>
+          <a:prstGeom prst="rect">
+            <a:avLst/>
+          </a:prstGeom>
+          <a:noFill/>
+        </p:spPr>
+        <p:txBody>
+          <a:bodyPr wrap="square" lIns="0" tIns="0" rIns="0" bIns="0" anchor="t">
+            <a:spAutoFit/>
+          </a:bodyPr>
+          <a:lstStyle/>
+          <a:p>
+            <a:pPr algn="l"/>
+            <a:r>
+              <a:rPr sz="1800" b="1" i="0" u="none">
+                <a:solidFill>
+                  <a:srgbClr val="0F172A"/>
+                </a:solidFill>
+                <a:latin typeface="Space Grotesk"/>
+              </a:rPr>
+              <a:t>r = 1.00</a:t>
+            </a:r>
+          </a:p>
+        </p:txBody>
+      </p:sp>
+      <p:sp>
+        <p:nvSpPr>
+          <p:cNvPr id="9" name="TextBox 8"/>
+          <p:cNvSpPr txBox="1"/>
+          <p:nvPr/>
+        </p:nvSpPr>
+        <p:spPr>
+          <a:xfrm>
+            <a:off x="7795319" y="3493740"/>
+            <a:ext cx="3406080" cy="457200"/>
+          </a:xfrm>
+          <a:prstGeom prst="rect">
+            <a:avLst/>
+          </a:prstGeom>
+          <a:noFill/>
+        </p:spPr>
+        <p:txBody>
+          <a:bodyPr wrap="square" lIns="0" tIns="0" rIns="0" bIns="0" anchor="t">
+            <a:spAutoFit/>
+          </a:bodyPr>
+          <a:lstStyle/>
+          <a:p>
+            <a:pPr algn="l"/>
+            <a:r>
+              <a:rPr sz="1500" b="0" i="0" u="none">
+                <a:solidFill>
+                  <a:srgbClr val="64748B"/>
+                </a:solidFill>
+                <a:latin typeface="Inter"/>
+              </a:rPr>
+              <a:t>Detected_Heads and Turnstile_Count strictly mirror People_Count.</a:t>
+            </a:r>
+          </a:p>
+        </p:txBody>
+      </p:sp>
+      <p:sp>
+        <p:nvSpPr>
+          <p:cNvPr id="10" name="TextBox 9"/>
+          <p:cNvSpPr txBox="1"/>
+          <p:nvPr/>
+        </p:nvSpPr>
+        <p:spPr>
+          <a:xfrm>
+            <a:off x="7795319" y="4712940"/>
+            <a:ext cx="3576384" cy="295275"/>
+          </a:xfrm>
+          <a:prstGeom prst="rect">
+            <a:avLst/>
+          </a:prstGeom>
+          <a:noFill/>
+        </p:spPr>
+        <p:txBody>
+          <a:bodyPr wrap="square" lIns="0" tIns="0" rIns="0" bIns="0" anchor="t">
+            <a:spAutoFit/>
+          </a:bodyPr>
+          <a:lstStyle/>
+          <a:p>
+            <a:pPr algn="l"/>
+            <a:r>
+              <a:rPr sz="1800" b="1" i="0" u="none">
+                <a:solidFill>
+                  <a:srgbClr val="0F172A"/>
+                </a:solidFill>
+                <a:latin typeface="Space Grotesk"/>
+              </a:rPr>
+              <a:t>Research Note</a:t>
+            </a:r>
+          </a:p>
+        </p:txBody>
+      </p:sp>
+      <p:sp>
+        <p:nvSpPr>
+          <p:cNvPr id="11" name="TextBox 10"/>
+          <p:cNvSpPr txBox="1"/>
+          <p:nvPr/>
+        </p:nvSpPr>
+        <p:spPr>
+          <a:xfrm>
+            <a:off x="7795319" y="5084415"/>
+            <a:ext cx="3406080" cy="457200"/>
+          </a:xfrm>
+          <a:prstGeom prst="rect">
+            <a:avLst/>
+          </a:prstGeom>
+          <a:noFill/>
+        </p:spPr>
+        <p:txBody>
+          <a:bodyPr wrap="square" lIns="0" tIns="0" rIns="0" bIns="0" anchor="t">
+            <a:spAutoFit/>
+          </a:bodyPr>
+          <a:lstStyle/>
+          <a:p>
+            <a:pPr algn="l"/>
+            <a:r>
+              <a:rPr sz="1500" b="0" i="0" u="none">
+                <a:solidFill>
+                  <a:srgbClr val="64748B"/>
+                </a:solidFill>
+                <a:latin typeface="Inter"/>
+              </a:rPr>
+              <a:t>Extremely strong correlations explain linear baseline success.</a:t>
+            </a:r>
+          </a:p>
+        </p:txBody>
+      </p:sp>
+    </p:spTree>
+  </p:cSld>
+  <p:clrMapOvr>
+    <a:masterClrMapping/>
+  </p:clrMapOvr>
+</p:sld>
+</file>
+
+<file path=ppt/slides/slide5.xml><?xml version="1.0" encoding="utf-8"?>
+<p:sld xmlns:a="http://schemas.openxmlformats.org/drawingml/2006/main" xmlns:r="http://schemas.openxmlformats.org/officeDocument/2006/relationships" xmlns:p="http://schemas.openxmlformats.org/presentationml/2006/main">
+  <p:cSld>
+    <p:bg>
+      <p:bgPr>
+        <a:solidFill>
+          <a:srgbClr val="FFFFFF"/>
+        </a:solidFill>
+        <a:effectLst/>
+      </p:bgPr>
+    </p:bg>
+    <p:spTree>
+      <p:nvGrpSpPr>
+        <p:cNvPr id="1" name=""/>
+        <p:cNvGrpSpPr/>
+        <p:nvPr/>
+      </p:nvGrpSpPr>
+      <p:grpSpPr>
+        <a:xfrm>
+          <a:off x="0" y="0"/>
+          <a:ext cx="0" cy="0"/>
+          <a:chOff x="0" y="0"/>
+          <a:chExt cx="0" cy="0"/>
+        </a:xfrm>
+      </p:grpSpPr>
+      <p:pic>
+        <p:nvPicPr>
+          <p:cNvPr id="2" name="Picture 1" descr="image.png"/>
+          <p:cNvPicPr>
+            <a:picLocks noChangeAspect="1"/>
+          </p:cNvPicPr>
+          <p:nvPr/>
+        </p:nvPicPr>
+        <p:blipFill>
+          <a:blip r:embed="rId2"/>
+          <a:stretch>
+            <a:fillRect/>
+          </a:stretch>
+        </p:blipFill>
+        <p:spPr>
+          <a:xfrm>
+            <a:off x="762000" y="2143125"/>
+            <a:ext cx="5181600" cy="4426743"/>
+          </a:xfrm>
+          <a:prstGeom prst="rect">
+            <a:avLst/>
+          </a:prstGeom>
+        </p:spPr>
+      </p:pic>
+      <p:pic>
+        <p:nvPicPr>
+          <p:cNvPr id="3" name="Picture 2" descr="image.png"/>
+          <p:cNvPicPr>
+            <a:picLocks noChangeAspect="1"/>
+          </p:cNvPicPr>
+          <p:nvPr/>
+        </p:nvPicPr>
+        <p:blipFill>
+          <a:blip r:embed="rId3"/>
+          <a:stretch>
+            <a:fillRect/>
+          </a:stretch>
+        </p:blipFill>
+        <p:spPr>
+          <a:xfrm>
+            <a:off x="6248400" y="2143125"/>
+            <a:ext cx="5181600" cy="4426743"/>
+          </a:xfrm>
+          <a:prstGeom prst="rect">
+            <a:avLst/>
+          </a:prstGeom>
+        </p:spPr>
+      </p:pic>
+      <p:sp>
+        <p:nvSpPr>
+          <p:cNvPr id="4" name="TextBox 3"/>
+          <p:cNvSpPr txBox="1"/>
+          <p:nvPr/>
+        </p:nvSpPr>
+        <p:spPr>
+          <a:xfrm>
+            <a:off x="762000" y="762000"/>
+            <a:ext cx="10668000" cy="190500"/>
+          </a:xfrm>
+          <a:prstGeom prst="rect">
+            <a:avLst/>
+          </a:prstGeom>
+          <a:noFill/>
+        </p:spPr>
+        <p:txBody>
+          <a:bodyPr wrap="square" lIns="0" tIns="0" rIns="0" bIns="0" anchor="t">
+            <a:spAutoFit/>
+          </a:bodyPr>
+          <a:lstStyle/>
+          <a:p>
+            <a:pPr algn="l"/>
+            <a:r>
+              <a:rPr sz="1200" b="1" i="0" u="none">
+                <a:solidFill>
+                  <a:srgbClr val="38BDF8"/>
+                </a:solidFill>
+                <a:latin typeface="Inter"/>
+              </a:rPr>
+              <a:t>04 • FEATURE SELECTION</a:t>
+            </a:r>
+          </a:p>
+        </p:txBody>
+      </p:sp>
+      <p:sp>
+        <p:nvSpPr>
+          <p:cNvPr id="5" name="TextBox 4"/>
+          <p:cNvSpPr txBox="1"/>
+          <p:nvPr/>
+        </p:nvSpPr>
+        <p:spPr>
+          <a:xfrm>
+            <a:off x="762000" y="1104900"/>
+            <a:ext cx="11201400" cy="581025"/>
+          </a:xfrm>
+          <a:prstGeom prst="rect">
+            <a:avLst/>
+          </a:prstGeom>
+          <a:noFill/>
+        </p:spPr>
+        <p:txBody>
+          <a:bodyPr wrap="square" lIns="0" tIns="0" rIns="0" bIns="0" anchor="t">
+            <a:spAutoFit/>
+          </a:bodyPr>
+          <a:lstStyle/>
+          <a:p>
+            <a:pPr algn="l"/>
+            <a:r>
+              <a:rPr sz="3600" b="1" i="0" u="none">
+                <a:solidFill>
+                  <a:srgbClr val="0F172A"/>
+                </a:solidFill>
+                <a:latin typeface="Space Grotesk"/>
+              </a:rPr>
+              <a:t>Retained vs. Rejected Inputs</a:t>
+            </a:r>
+          </a:p>
+        </p:txBody>
+      </p:sp>
+      <p:pic>
+        <p:nvPicPr>
+          <p:cNvPr id="6" name="Picture 5" descr="image.png"/>
+          <p:cNvPicPr>
+            <a:picLocks noChangeAspect="1"/>
+          </p:cNvPicPr>
+          <p:nvPr/>
+        </p:nvPicPr>
+        <p:blipFill>
+          <a:blip r:embed="rId4"/>
+          <a:stretch>
+            <a:fillRect/>
+          </a:stretch>
+        </p:blipFill>
+        <p:spPr>
+          <a:xfrm>
+            <a:off x="1219200" y="2676525"/>
+            <a:ext cx="304800" cy="304800"/>
+          </a:xfrm>
+          <a:prstGeom prst="rect">
+            <a:avLst/>
+          </a:prstGeom>
+        </p:spPr>
+      </p:pic>
+      <p:sp>
+        <p:nvSpPr>
+          <p:cNvPr id="7" name="TextBox 6"/>
+          <p:cNvSpPr txBox="1"/>
+          <p:nvPr/>
+        </p:nvSpPr>
+        <p:spPr>
+          <a:xfrm>
+            <a:off x="1676400" y="2638425"/>
+            <a:ext cx="3170396" cy="381000"/>
+          </a:xfrm>
+          <a:prstGeom prst="rect">
+            <a:avLst/>
+          </a:prstGeom>
+          <a:noFill/>
+        </p:spPr>
+        <p:txBody>
+          <a:bodyPr wrap="square" lIns="0" tIns="0" rIns="0" bIns="0" anchor="t">
+            <a:spAutoFit/>
+          </a:bodyPr>
+          <a:lstStyle/>
+          <a:p>
+            <a:pPr algn="l"/>
+            <a:r>
+              <a:rPr sz="2400" b="1" i="0" u="none">
+                <a:solidFill>
+                  <a:srgbClr val="0F172A"/>
+                </a:solidFill>
+                <a:latin typeface="Space Grotesk"/>
+              </a:rPr>
+              <a:t>11 Retained Features</a:t>
+            </a:r>
+          </a:p>
+        </p:txBody>
+      </p:sp>
+      <p:sp>
+        <p:nvSpPr>
+          <p:cNvPr id="8" name="TextBox 7"/>
+          <p:cNvSpPr txBox="1"/>
+          <p:nvPr/>
+        </p:nvSpPr>
+        <p:spPr>
+          <a:xfrm>
+            <a:off x="1504950" y="3324225"/>
+            <a:ext cx="3981450" cy="228600"/>
+          </a:xfrm>
+          <a:prstGeom prst="rect">
+            <a:avLst/>
+          </a:prstGeom>
+          <a:noFill/>
+        </p:spPr>
+        <p:txBody>
+          <a:bodyPr wrap="square" lIns="0" tIns="0" rIns="0" bIns="0" anchor="ctr">
+            <a:spAutoFit/>
+          </a:bodyPr>
+          <a:lstStyle/>
+          <a:p>
+            <a:pPr algn="l"/>
+            <a:r>
+              <a:rPr sz="1500" b="0" i="0" u="none">
+                <a:solidFill>
+                  <a:srgbClr val="334155"/>
+                </a:solidFill>
+                <a:latin typeface="Inter"/>
+              </a:rPr>
+              <a:t>Turnstile Count &amp; BLE Pings</a:t>
+            </a:r>
+          </a:p>
+        </p:txBody>
+      </p:sp>
+      <p:sp>
+        <p:nvSpPr>
+          <p:cNvPr id="9" name="TextBox 8"/>
+          <p:cNvSpPr txBox="1"/>
+          <p:nvPr/>
+        </p:nvSpPr>
+        <p:spPr>
+          <a:xfrm>
+            <a:off x="1504950" y="3743325"/>
+            <a:ext cx="3981450" cy="228600"/>
+          </a:xfrm>
+          <a:prstGeom prst="rect">
+            <a:avLst/>
+          </a:prstGeom>
+          <a:noFill/>
+        </p:spPr>
+        <p:txBody>
+          <a:bodyPr wrap="square" lIns="0" tIns="0" rIns="0" bIns="0" anchor="ctr">
+            <a:spAutoFit/>
+          </a:bodyPr>
+          <a:lstStyle/>
+          <a:p>
+            <a:pPr algn="l"/>
+            <a:r>
+              <a:rPr sz="1500" b="0" i="0" u="none">
+                <a:solidFill>
+                  <a:srgbClr val="334155"/>
+                </a:solidFill>
+                <a:latin typeface="Inter"/>
+              </a:rPr>
+              <a:t>Pressure Mat Activations</a:t>
+            </a:r>
+          </a:p>
+        </p:txBody>
+      </p:sp>
+      <p:sp>
+        <p:nvSpPr>
+          <p:cNvPr id="10" name="TextBox 9"/>
+          <p:cNvSpPr txBox="1"/>
+          <p:nvPr/>
+        </p:nvSpPr>
+        <p:spPr>
+          <a:xfrm>
+            <a:off x="1504950" y="4162425"/>
+            <a:ext cx="3981450" cy="228600"/>
+          </a:xfrm>
+          <a:prstGeom prst="rect">
+            <a:avLst/>
+          </a:prstGeom>
+          <a:noFill/>
+        </p:spPr>
+        <p:txBody>
+          <a:bodyPr wrap="square" lIns="0" tIns="0" rIns="0" bIns="0" anchor="ctr">
+            <a:spAutoFit/>
+          </a:bodyPr>
+          <a:lstStyle/>
+          <a:p>
+            <a:pPr algn="l"/>
+            <a:r>
+              <a:rPr sz="1500" b="0" i="0" u="none">
+                <a:solidFill>
+                  <a:srgbClr val="334155"/>
+                </a:solidFill>
+                <a:latin typeface="Inter"/>
+              </a:rPr>
+              <a:t>Detected Heads &amp; Visibility</a:t>
+            </a:r>
+          </a:p>
+        </p:txBody>
+      </p:sp>
+      <p:sp>
+        <p:nvSpPr>
+          <p:cNvPr id="11" name="TextBox 10"/>
+          <p:cNvSpPr txBox="1"/>
+          <p:nvPr/>
+        </p:nvSpPr>
+        <p:spPr>
+          <a:xfrm>
+            <a:off x="1504950" y="4581525"/>
+            <a:ext cx="3981450" cy="228600"/>
+          </a:xfrm>
+          <a:prstGeom prst="rect">
+            <a:avLst/>
+          </a:prstGeom>
+          <a:noFill/>
+        </p:spPr>
+        <p:txBody>
+          <a:bodyPr wrap="square" lIns="0" tIns="0" rIns="0" bIns="0" anchor="ctr">
+            <a:spAutoFit/>
+          </a:bodyPr>
+          <a:lstStyle/>
+          <a:p>
+            <a:pPr algn="l"/>
+            <a:r>
+              <a:rPr sz="1500" b="0" i="0" u="none">
+                <a:solidFill>
+                  <a:srgbClr val="334155"/>
+                </a:solidFill>
+                <a:latin typeface="Inter"/>
+              </a:rPr>
+              <a:t>Spatial (Seat X, Y)</a:t>
+            </a:r>
+          </a:p>
+        </p:txBody>
+      </p:sp>
+      <p:sp>
+        <p:nvSpPr>
+          <p:cNvPr id="12" name="TextBox 11"/>
+          <p:cNvSpPr txBox="1"/>
+          <p:nvPr/>
+        </p:nvSpPr>
+        <p:spPr>
+          <a:xfrm>
+            <a:off x="1504950" y="5000625"/>
+            <a:ext cx="3981450" cy="228600"/>
+          </a:xfrm>
+          <a:prstGeom prst="rect">
+            <a:avLst/>
+          </a:prstGeom>
+          <a:noFill/>
+        </p:spPr>
+        <p:txBody>
+          <a:bodyPr wrap="square" lIns="0" tIns="0" rIns="0" bIns="0" anchor="ctr">
+            <a:spAutoFit/>
+          </a:bodyPr>
+          <a:lstStyle/>
+          <a:p>
+            <a:pPr algn="l"/>
+            <a:r>
+              <a:rPr sz="1500" b="0" i="0" u="none">
+                <a:solidFill>
+                  <a:srgbClr val="334155"/>
+                </a:solidFill>
+                <a:latin typeface="Inter"/>
+              </a:rPr>
+              <a:t>Attendance Metrics</a:t>
+            </a:r>
+          </a:p>
+        </p:txBody>
+      </p:sp>
+      <p:sp>
+        <p:nvSpPr>
+          <p:cNvPr id="13" name="TextBox 12"/>
+          <p:cNvSpPr txBox="1"/>
+          <p:nvPr/>
+        </p:nvSpPr>
+        <p:spPr>
+          <a:xfrm>
+            <a:off x="1504950" y="5419725"/>
+            <a:ext cx="3981450" cy="228600"/>
+          </a:xfrm>
+          <a:prstGeom prst="rect">
+            <a:avLst/>
+          </a:prstGeom>
+          <a:noFill/>
+        </p:spPr>
+        <p:txBody>
+          <a:bodyPr wrap="square" lIns="0" tIns="0" rIns="0" bIns="0" anchor="ctr">
+            <a:spAutoFit/>
+          </a:bodyPr>
+          <a:lstStyle/>
+          <a:p>
+            <a:pPr algn="l"/>
+            <a:r>
+              <a:rPr sz="1500" b="0" i="0" u="none">
+                <a:solidFill>
+                  <a:srgbClr val="334155"/>
+                </a:solidFill>
+                <a:latin typeface="Inter"/>
+              </a:rPr>
+              <a:t>Aggregated Inflow &amp; Outflow</a:t>
+            </a:r>
+          </a:p>
+        </p:txBody>
+      </p:sp>
+      <p:pic>
+        <p:nvPicPr>
+          <p:cNvPr id="14" name="Picture 13" descr="image.png"/>
+          <p:cNvPicPr>
+            <a:picLocks noChangeAspect="1"/>
+          </p:cNvPicPr>
+          <p:nvPr/>
+        </p:nvPicPr>
+        <p:blipFill>
+          <a:blip r:embed="rId5"/>
+          <a:stretch>
+            <a:fillRect/>
+          </a:stretch>
+        </p:blipFill>
+        <p:spPr>
+          <a:xfrm>
+            <a:off x="6705600" y="2676525"/>
+            <a:ext cx="304800" cy="304800"/>
+          </a:xfrm>
+          <a:prstGeom prst="rect">
+            <a:avLst/>
+          </a:prstGeom>
+        </p:spPr>
+      </p:pic>
+      <p:sp>
+        <p:nvSpPr>
+          <p:cNvPr id="15" name="TextBox 14"/>
+          <p:cNvSpPr txBox="1"/>
+          <p:nvPr/>
+        </p:nvSpPr>
+        <p:spPr>
+          <a:xfrm>
+            <a:off x="7162800" y="2638425"/>
+            <a:ext cx="2860357" cy="381000"/>
+          </a:xfrm>
+          <a:prstGeom prst="rect">
+            <a:avLst/>
+          </a:prstGeom>
+          <a:noFill/>
+        </p:spPr>
+        <p:txBody>
+          <a:bodyPr wrap="square" lIns="0" tIns="0" rIns="0" bIns="0" anchor="t">
+            <a:spAutoFit/>
+          </a:bodyPr>
+          <a:lstStyle/>
+          <a:p>
+            <a:pPr algn="l"/>
+            <a:r>
+              <a:rPr sz="2400" b="1" i="0" u="none">
+                <a:solidFill>
+                  <a:srgbClr val="0F172A"/>
+                </a:solidFill>
+                <a:latin typeface="Space Grotesk"/>
+              </a:rPr>
+              <a:t>Rejected Variables</a:t>
+            </a:r>
+          </a:p>
+        </p:txBody>
+      </p:sp>
+      <p:sp>
+        <p:nvSpPr>
+          <p:cNvPr id="16" name="TextBox 15"/>
+          <p:cNvSpPr txBox="1"/>
+          <p:nvPr/>
+        </p:nvSpPr>
+        <p:spPr>
+          <a:xfrm>
+            <a:off x="6705600" y="3324225"/>
+            <a:ext cx="4267200" cy="784621"/>
+          </a:xfrm>
+          <a:prstGeom prst="rect">
+            <a:avLst/>
+          </a:prstGeom>
+          <a:noFill/>
+        </p:spPr>
+        <p:txBody>
+          <a:bodyPr wrap="square" lIns="0" tIns="0" rIns="0" bIns="0" anchor="t">
+            <a:spAutoFit/>
+          </a:bodyPr>
+          <a:lstStyle/>
+          <a:p>
+            <a:pPr algn="l"/>
+            <a:r>
+              <a:rPr sz="1200" b="1" i="0" u="none">
+                <a:solidFill>
+                  <a:srgbClr val="0F172A"/>
+                </a:solidFill>
+                <a:latin typeface="Inter"/>
+              </a:rPr>
+              <a:t>Event_ID &amp; Seat_ID</a:t>
+            </a:r>
+            <a:r>
+              <a:rPr sz="1200" b="0" i="0" u="none">
+                <a:solidFill>
+                  <a:srgbClr val="000000"/>
+                </a:solidFill>
+                <a:latin typeface="Inter"/>
+              </a:rPr>
+              <a:t> </a:t>
+            </a:r>
+            <a:r>
+              <a:rPr sz="1200" b="0" i="0" u="none">
+                <a:solidFill>
+                  <a:srgbClr val="64748B"/>
+                </a:solidFill>
+                <a:latin typeface="Inter"/>
+              </a:rPr>
+              <a:t>Excluded to prevent data leakage and event overfitting.</a:t>
+            </a:r>
+          </a:p>
+        </p:txBody>
+      </p:sp>
+      <p:sp>
+        <p:nvSpPr>
+          <p:cNvPr id="17" name="TextBox 16"/>
+          <p:cNvSpPr txBox="1"/>
+          <p:nvPr/>
+        </p:nvSpPr>
+        <p:spPr>
+          <a:xfrm>
+            <a:off x="6705600" y="4413646"/>
+            <a:ext cx="4076700" cy="544710"/>
+          </a:xfrm>
+          <a:prstGeom prst="rect">
+            <a:avLst/>
+          </a:prstGeom>
+          <a:noFill/>
+        </p:spPr>
+        <p:txBody>
+          <a:bodyPr wrap="square" lIns="0" tIns="0" rIns="0" bIns="0" anchor="t">
+            <a:spAutoFit/>
+          </a:bodyPr>
+          <a:lstStyle/>
+          <a:p>
+            <a:pPr algn="l"/>
+            <a:r>
+              <a:rPr sz="1200" b="1" i="0" u="none">
+                <a:solidFill>
+                  <a:srgbClr val="0F172A"/>
+                </a:solidFill>
+                <a:latin typeface="Inter"/>
+              </a:rPr>
+              <a:t>Raw Flow Edges</a:t>
+            </a:r>
+            <a:r>
+              <a:rPr sz="1200" b="0" i="0" u="none">
+                <a:solidFill>
+                  <a:srgbClr val="000000"/>
+                </a:solidFill>
+                <a:latin typeface="Inter"/>
+              </a:rPr>
+              <a:t> </a:t>
+            </a:r>
+            <a:r>
+              <a:rPr sz="1200" b="0" i="0" u="none">
+                <a:solidFill>
+                  <a:srgbClr val="64748B"/>
+                </a:solidFill>
+                <a:latin typeface="Inter"/>
+              </a:rPr>
+              <a:t>Aggregated into numerical inflow/outflow instead.</a:t>
+            </a:r>
+          </a:p>
+        </p:txBody>
+      </p:sp>
+      <p:sp>
+        <p:nvSpPr>
+          <p:cNvPr id="18" name="TextBox 17"/>
+          <p:cNvSpPr txBox="1"/>
+          <p:nvPr/>
+        </p:nvSpPr>
+        <p:spPr>
+          <a:xfrm>
+            <a:off x="6705600" y="5263157"/>
+            <a:ext cx="4067175" cy="544710"/>
+          </a:xfrm>
+          <a:prstGeom prst="rect">
+            <a:avLst/>
+          </a:prstGeom>
+          <a:noFill/>
+        </p:spPr>
+        <p:txBody>
+          <a:bodyPr wrap="square" lIns="0" tIns="0" rIns="0" bIns="0" anchor="t">
+            <a:spAutoFit/>
+          </a:bodyPr>
+          <a:lstStyle/>
+          <a:p>
+            <a:pPr algn="l"/>
+            <a:r>
+              <a:rPr sz="1200" b="1" i="0" u="none">
+                <a:solidFill>
+                  <a:srgbClr val="0F172A"/>
+                </a:solidFill>
+                <a:latin typeface="Inter"/>
+              </a:rPr>
+              <a:t>Categorical Strings</a:t>
+            </a:r>
+            <a:r>
+              <a:rPr sz="1200" b="0" i="0" u="none">
+                <a:solidFill>
+                  <a:srgbClr val="000000"/>
+                </a:solidFill>
+                <a:latin typeface="Inter"/>
+              </a:rPr>
+              <a:t> </a:t>
+            </a:r>
+            <a:r>
+              <a:rPr sz="1200" b="0" i="0" u="none">
+                <a:solidFill>
+                  <a:srgbClr val="64748B"/>
+                </a:solidFill>
+                <a:latin typeface="Inter"/>
+              </a:rPr>
+              <a:t>Dropped for strict numerical-only scaling pipeline.</a:t>
+            </a:r>
+          </a:p>
+        </p:txBody>
+      </p:sp>
+      <p:pic>
+        <p:nvPicPr>
+          <p:cNvPr id="19" name="Picture 18" descr="image.png"/>
+          <p:cNvPicPr>
+            <a:picLocks noChangeAspect="1"/>
+          </p:cNvPicPr>
+          <p:nvPr/>
+        </p:nvPicPr>
+        <p:blipFill>
+          <a:blip r:embed="rId6"/>
+          <a:stretch>
+            <a:fillRect/>
+          </a:stretch>
+        </p:blipFill>
+        <p:spPr>
+          <a:xfrm>
+            <a:off x="1219200" y="3362325"/>
+            <a:ext cx="133350" cy="152400"/>
+          </a:xfrm>
+          <a:prstGeom prst="rect">
+            <a:avLst/>
+          </a:prstGeom>
+        </p:spPr>
+      </p:pic>
+      <p:pic>
+        <p:nvPicPr>
+          <p:cNvPr id="20" name="Picture 19" descr="image.png"/>
+          <p:cNvPicPr>
+            <a:picLocks noChangeAspect="1"/>
+          </p:cNvPicPr>
+          <p:nvPr/>
+        </p:nvPicPr>
+        <p:blipFill>
+          <a:blip r:embed="rId6"/>
+          <a:stretch>
+            <a:fillRect/>
+          </a:stretch>
+        </p:blipFill>
+        <p:spPr>
+          <a:xfrm>
+            <a:off x="1219200" y="3781425"/>
+            <a:ext cx="133350" cy="152400"/>
+          </a:xfrm>
+          <a:prstGeom prst="rect">
+            <a:avLst/>
+          </a:prstGeom>
+        </p:spPr>
+      </p:pic>
+      <p:pic>
+        <p:nvPicPr>
+          <p:cNvPr id="21" name="Picture 20" descr="image.png"/>
+          <p:cNvPicPr>
+            <a:picLocks noChangeAspect="1"/>
+          </p:cNvPicPr>
+          <p:nvPr/>
+        </p:nvPicPr>
+        <p:blipFill>
+          <a:blip r:embed="rId6"/>
+          <a:stretch>
+            <a:fillRect/>
+          </a:stretch>
+        </p:blipFill>
+        <p:spPr>
+          <a:xfrm>
+            <a:off x="1219200" y="4200525"/>
+            <a:ext cx="133350" cy="152400"/>
+          </a:xfrm>
+          <a:prstGeom prst="rect">
+            <a:avLst/>
+          </a:prstGeom>
+        </p:spPr>
+      </p:pic>
+      <p:pic>
+        <p:nvPicPr>
+          <p:cNvPr id="22" name="Picture 21" descr="image.png"/>
+          <p:cNvPicPr>
+            <a:picLocks noChangeAspect="1"/>
+          </p:cNvPicPr>
+          <p:nvPr/>
+        </p:nvPicPr>
+        <p:blipFill>
+          <a:blip r:embed="rId6"/>
+          <a:stretch>
+            <a:fillRect/>
+          </a:stretch>
+        </p:blipFill>
+        <p:spPr>
+          <a:xfrm>
+            <a:off x="1219200" y="4619625"/>
+            <a:ext cx="133350" cy="152400"/>
+          </a:xfrm>
+          <a:prstGeom prst="rect">
+            <a:avLst/>
+          </a:prstGeom>
+        </p:spPr>
+      </p:pic>
+      <p:pic>
+        <p:nvPicPr>
+          <p:cNvPr id="23" name="Picture 22" descr="image.png"/>
+          <p:cNvPicPr>
+            <a:picLocks noChangeAspect="1"/>
+          </p:cNvPicPr>
+          <p:nvPr/>
+        </p:nvPicPr>
+        <p:blipFill>
+          <a:blip r:embed="rId6"/>
+          <a:stretch>
+            <a:fillRect/>
+          </a:stretch>
+        </p:blipFill>
+        <p:spPr>
+          <a:xfrm>
+            <a:off x="1219200" y="5038725"/>
+            <a:ext cx="133350" cy="152400"/>
+          </a:xfrm>
+          <a:prstGeom prst="rect">
+            <a:avLst/>
+          </a:prstGeom>
+        </p:spPr>
+      </p:pic>
+      <p:pic>
+        <p:nvPicPr>
+          <p:cNvPr id="24" name="Picture 23" descr="image.png"/>
+          <p:cNvPicPr>
+            <a:picLocks noChangeAspect="1"/>
+          </p:cNvPicPr>
+          <p:nvPr/>
+        </p:nvPicPr>
+        <p:blipFill>
+          <a:blip r:embed="rId6"/>
+          <a:stretch>
+            <a:fillRect/>
+          </a:stretch>
+        </p:blipFill>
+        <p:spPr>
+          <a:xfrm>
+            <a:off x="1219200" y="5457825"/>
+            <a:ext cx="133350" cy="152400"/>
+          </a:xfrm>
+          <a:prstGeom prst="rect">
+            <a:avLst/>
+          </a:prstGeom>
+        </p:spPr>
+      </p:pic>
+    </p:spTree>
+  </p:cSld>
+  <p:clrMapOvr>
+    <a:masterClrMapping/>
+  </p:clrMapOvr>
+</p:sld>
+</file>
+
+<file path=ppt/slides/slide6.xml><?xml version="1.0" encoding="utf-8"?>
+<p:sld xmlns:a="http://schemas.openxmlformats.org/drawingml/2006/main" xmlns:r="http://schemas.openxmlformats.org/officeDocument/2006/relationships" xmlns:p="http://schemas.openxmlformats.org/presentationml/2006/main">
   <p:cSld>
     <p:bg>
       <p:bgPr>
@@ -4682,938 +5973,17 @@
         <p:cNvGrpSpPr/>
         <p:nvPr/>
       </p:nvGrpSpPr>
-      <p:grpSpPr/>
-      <p:sp>
-        <p:nvSpPr>
-          <p:cNvPr id="2" name="TextBox 1"/>
-          <p:cNvSpPr txBox="1"/>
-          <p:nvPr/>
-        </p:nvSpPr>
-        <p:spPr>
-          <a:xfrm>
-            <a:off x="762000" y="762000"/>
-            <a:ext cx="10668000" cy="190500"/>
-          </a:xfrm>
-          <a:prstGeom prst="rect">
-            <a:avLst/>
-          </a:prstGeom>
-          <a:noFill/>
-        </p:spPr>
-        <p:txBody>
-          <a:bodyPr wrap="square" lIns="0" rIns="0" tIns="0" bIns="0" anchor="t">
-            <a:spAutoFit/>
-          </a:bodyPr>
-          <a:lstStyle/>
-          <a:p>
-            <a:pPr algn="l"/>
-            <a:r>
-              <a:rPr b="1" sz="1200" i="0" u="none">
-                <a:solidFill>
-                  <a:srgbClr val="38BDF8"/>
-                </a:solidFill>
-                <a:latin typeface="Inter"/>
-              </a:rPr>
-              <a:t>03 • COMPARATIVE STUDY</a:t>
-            </a:r>
-          </a:p>
-        </p:txBody>
-      </p:sp>
-      <p:sp>
-        <p:nvSpPr>
-          <p:cNvPr id="3" name="TextBox 2"/>
-          <p:cNvSpPr txBox="1"/>
-          <p:nvPr/>
-        </p:nvSpPr>
-        <p:spPr>
-          <a:xfrm>
-            <a:off x="762000" y="1104900"/>
-            <a:ext cx="11201400" cy="581025"/>
-          </a:xfrm>
-          <a:prstGeom prst="rect">
-            <a:avLst/>
-          </a:prstGeom>
-          <a:noFill/>
-        </p:spPr>
-        <p:txBody>
-          <a:bodyPr wrap="square" lIns="0" rIns="0" tIns="0" bIns="0" anchor="t">
-            <a:spAutoFit/>
-          </a:bodyPr>
-          <a:lstStyle/>
-          <a:p>
-            <a:pPr algn="l"/>
-            <a:r>
-              <a:rPr b="1" sz="3600" i="0" u="none">
-                <a:solidFill>
-                  <a:srgbClr val="0F172A"/>
-                </a:solidFill>
-                <a:latin typeface="Space Grotesk"/>
-              </a:rPr>
-              <a:t>Algorithm Performance</a:t>
-            </a:r>
-          </a:p>
-        </p:txBody>
-      </p:sp>
-      <p:graphicFrame>
-        <p:nvGraphicFramePr>
-          <p:cNvPr id="4" name="Table 3"/>
-          <p:cNvGraphicFramePr>
-            <a:graphicFrameLocks noGrp="1"/>
-          </p:cNvGraphicFramePr>
-          <p:nvPr/>
-        </p:nvGraphicFramePr>
-        <p:xfrm>
-          <a:off x="762000" y="2143125"/>
-          <a:ext cx="10668000" cy="4562475"/>
-        </p:xfrm>
-        <a:graphic>
-          <a:graphicData uri="http://schemas.openxmlformats.org/drawingml/2006/table">
-            <a:tbl>
-              <a:tblPr firstRow="1" bandRow="1">
-                <a:tableStyleId>{5C22544A-7EE6-4342-B048-85BDC9FD1C3A}</a:tableStyleId>
-                <a:lnL>
-                  <a:noFill/>
-                </a:lnL>
-                <a:lnR>
-                  <a:noFill/>
-                </a:lnR>
-                <a:lnT>
-                  <a:noFill/>
-                </a:lnT>
-                <a:lnB>
-                  <a:noFill/>
-                </a:lnB>
-                <a:lnV>
-                  <a:noFill/>
-                </a:lnV>
-                <a:lnH>
-                  <a:noFill/>
-                </a:lnH>
-              </a:tblPr>
-              <a:tblGrid>
-                <a:gridCol w="3200400"/>
-                <a:gridCol w="2133600"/>
-                <a:gridCol w="2133600"/>
-                <a:gridCol w="3200400"/>
-              </a:tblGrid>
-              <a:tr h="760412">
-                <a:tc>
-                  <a:txBody>
-                    <a:bodyPr/>
-                    <a:lstStyle/>
-                    <a:p>
-                      <a:pPr algn="l"/>
-                      <a:r>
-                        <a:rPr b="1" sz="1650" i="0" u="none">
-                          <a:solidFill>
-                            <a:srgbClr val="0F172A"/>
-                          </a:solidFill>
-                          <a:latin typeface="Space Grotesk"/>
-                        </a:rPr>
-                        <a:t>Model</a:t>
-                      </a:r>
-                    </a:p>
-                  </a:txBody>
-                  <a:tcPr anchor="ctr" marL="63500" marR="63500" marT="25400" marB="25400">
-                    <a:lnL>
-                      <a:noFill/>
-                    </a:lnL>
-                    <a:lnR>
-                      <a:noFill/>
-                    </a:lnR>
-                    <a:lnT>
-                      <a:noFill/>
-                    </a:lnT>
-                    <a:lnB>
-                      <a:noFill/>
-                    </a:lnB>
-                    <a:noFill/>
-                  </a:tcPr>
-                </a:tc>
-                <a:tc>
-                  <a:txBody>
-                    <a:bodyPr/>
-                    <a:lstStyle/>
-                    <a:p>
-                      <a:pPr algn="l"/>
-                      <a:r>
-                        <a:rPr b="1" sz="1650" i="0" u="none">
-                          <a:solidFill>
-                            <a:srgbClr val="0F172A"/>
-                          </a:solidFill>
-                          <a:latin typeface="Space Grotesk"/>
-                        </a:rPr>
-                        <a:t>RMSE</a:t>
-                      </a:r>
-                    </a:p>
-                  </a:txBody>
-                  <a:tcPr anchor="ctr" marL="63500" marR="63500" marT="25400" marB="25400">
-                    <a:lnL>
-                      <a:noFill/>
-                    </a:lnL>
-                    <a:lnR>
-                      <a:noFill/>
-                    </a:lnR>
-                    <a:lnT>
-                      <a:noFill/>
-                    </a:lnT>
-                    <a:lnB>
-                      <a:noFill/>
-                    </a:lnB>
-                    <a:noFill/>
-                  </a:tcPr>
-                </a:tc>
-                <a:tc>
-                  <a:txBody>
-                    <a:bodyPr/>
-                    <a:lstStyle/>
-                    <a:p>
-                      <a:pPr algn="l"/>
-                      <a:r>
-                        <a:rPr b="1" sz="1650" i="0" u="none">
-                          <a:solidFill>
-                            <a:srgbClr val="0F172A"/>
-                          </a:solidFill>
-                          <a:latin typeface="Space Grotesk"/>
-                        </a:rPr>
-                        <a:t>R² Score</a:t>
-                      </a:r>
-                    </a:p>
-                  </a:txBody>
-                  <a:tcPr anchor="ctr" marL="63500" marR="63500" marT="25400" marB="25400">
-                    <a:lnL>
-                      <a:noFill/>
-                    </a:lnL>
-                    <a:lnR>
-                      <a:noFill/>
-                    </a:lnR>
-                    <a:lnT>
-                      <a:noFill/>
-                    </a:lnT>
-                    <a:lnB>
-                      <a:noFill/>
-                    </a:lnB>
-                    <a:noFill/>
-                  </a:tcPr>
-                </a:tc>
-                <a:tc>
-                  <a:txBody>
-                    <a:bodyPr/>
-                    <a:lstStyle/>
-                    <a:p>
-                      <a:pPr algn="l"/>
-                      <a:r>
-                        <a:rPr b="1" sz="1650" i="0" u="none">
-                          <a:solidFill>
-                            <a:srgbClr val="0F172A"/>
-                          </a:solidFill>
-                          <a:latin typeface="Space Grotesk"/>
-                        </a:rPr>
-                        <a:t>Observation</a:t>
-                      </a:r>
-                    </a:p>
-                  </a:txBody>
-                  <a:tcPr anchor="ctr" marL="63500" marR="63500" marT="25400" marB="25400">
-                    <a:lnL>
-                      <a:noFill/>
-                    </a:lnL>
-                    <a:lnR>
-                      <a:noFill/>
-                    </a:lnR>
-                    <a:lnT>
-                      <a:noFill/>
-                    </a:lnT>
-                    <a:lnB>
-                      <a:noFill/>
-                    </a:lnB>
-                    <a:noFill/>
-                  </a:tcPr>
-                </a:tc>
-              </a:tr>
-              <a:tr h="760412">
-                <a:tc>
-                  <a:txBody>
-                    <a:bodyPr/>
-                    <a:lstStyle/>
-                    <a:p>
-                      <a:pPr algn="l"/>
-                      <a:r>
-                        <a:rPr b="1" sz="1650" i="0" u="none">
-                          <a:solidFill>
-                            <a:srgbClr val="0F172A"/>
-                          </a:solidFill>
-                          <a:latin typeface="Inter"/>
-                        </a:rPr>
-                        <a:t>Linear Regression</a:t>
-                      </a:r>
-                    </a:p>
-                  </a:txBody>
-                  <a:tcPr anchor="ctr" marL="419100" marR="63500" marT="25400" marB="25400">
-                    <a:lnL>
-                      <a:noFill/>
-                    </a:lnL>
-                    <a:lnR>
-                      <a:noFill/>
-                    </a:lnR>
-                    <a:lnT>
-                      <a:noFill/>
-                    </a:lnT>
-                    <a:lnB>
-                      <a:noFill/>
-                    </a:lnB>
-                    <a:solidFill>
-                      <a:srgbClr val="FFFFFF"/>
-                    </a:solidFill>
-                  </a:tcPr>
-                </a:tc>
-                <a:tc>
-                  <a:txBody>
-                    <a:bodyPr/>
-                    <a:lstStyle/>
-                    <a:p>
-                      <a:pPr algn="l"/>
-                      <a:r>
-                        <a:rPr b="1" sz="1650" i="0" u="none">
-                          <a:solidFill>
-                            <a:srgbClr val="0F172A"/>
-                          </a:solidFill>
-                          <a:latin typeface="Inter"/>
-                        </a:rPr>
-                        <a:t>1.4404</a:t>
-                      </a:r>
-                    </a:p>
-                  </a:txBody>
-                  <a:tcPr anchor="ctr" marL="63500" marR="63500" marT="25400" marB="25400">
-                    <a:lnL>
-                      <a:noFill/>
-                    </a:lnL>
-                    <a:lnR>
-                      <a:noFill/>
-                    </a:lnR>
-                    <a:lnT>
-                      <a:noFill/>
-                    </a:lnT>
-                    <a:lnB>
-                      <a:noFill/>
-                    </a:lnB>
-                    <a:solidFill>
-                      <a:srgbClr val="FFFFFF"/>
-                    </a:solidFill>
-                  </a:tcPr>
-                </a:tc>
-                <a:tc>
-                  <a:txBody>
-                    <a:bodyPr/>
-                    <a:lstStyle/>
-                    <a:p>
-                      <a:pPr algn="l"/>
-                      <a:r>
-                        <a:rPr b="1" sz="1650" i="0" u="none">
-                          <a:solidFill>
-                            <a:srgbClr val="0F172A"/>
-                          </a:solidFill>
-                          <a:latin typeface="Inter"/>
-                        </a:rPr>
-                        <a:t>0.9989</a:t>
-                      </a:r>
-                    </a:p>
-                  </a:txBody>
-                  <a:tcPr anchor="ctr" marL="63500" marR="63500" marT="25400" marB="25400">
-                    <a:lnL>
-                      <a:noFill/>
-                    </a:lnL>
-                    <a:lnR>
-                      <a:noFill/>
-                    </a:lnR>
-                    <a:lnT>
-                      <a:noFill/>
-                    </a:lnT>
-                    <a:lnB>
-                      <a:noFill/>
-                    </a:lnB>
-                    <a:solidFill>
-                      <a:srgbClr val="FFFFFF"/>
-                    </a:solidFill>
-                  </a:tcPr>
-                </a:tc>
-                <a:tc>
-                  <a:txBody>
-                    <a:bodyPr/>
-                    <a:lstStyle/>
-                    <a:p>
-                      <a:pPr algn="l"/>
-                      <a:r>
-                        <a:rPr b="1" sz="1650" i="0" u="none">
-                          <a:solidFill>
-                            <a:srgbClr val="0F172A"/>
-                          </a:solidFill>
-                          <a:latin typeface="Inter"/>
-                        </a:rPr>
-                        <a:t>Best baseline performance.</a:t>
-                      </a:r>
-                    </a:p>
-                  </a:txBody>
-                  <a:tcPr anchor="ctr" marL="63500" marR="63500" marT="25400" marB="25400">
-                    <a:lnL>
-                      <a:noFill/>
-                    </a:lnL>
-                    <a:lnR>
-                      <a:noFill/>
-                    </a:lnR>
-                    <a:lnT>
-                      <a:noFill/>
-                    </a:lnT>
-                    <a:lnB>
-                      <a:noFill/>
-                    </a:lnB>
-                    <a:solidFill>
-                      <a:srgbClr val="FFFFFF"/>
-                    </a:solidFill>
-                  </a:tcPr>
-                </a:tc>
-              </a:tr>
-              <a:tr h="760412">
-                <a:tc>
-                  <a:txBody>
-                    <a:bodyPr/>
-                    <a:lstStyle/>
-                    <a:p>
-                      <a:pPr algn="l"/>
-                      <a:r>
-                        <a:rPr b="0" sz="1650" i="0" u="none">
-                          <a:solidFill>
-                            <a:srgbClr val="334155"/>
-                          </a:solidFill>
-                          <a:latin typeface="Inter Medium"/>
-                        </a:rPr>
-                        <a:t>Gradient Boosting</a:t>
-                      </a:r>
-                    </a:p>
-                  </a:txBody>
-                  <a:tcPr anchor="ctr" marL="63500" marR="63500" marT="25400" marB="25400">
-                    <a:lnL>
-                      <a:noFill/>
-                    </a:lnL>
-                    <a:lnR>
-                      <a:noFill/>
-                    </a:lnR>
-                    <a:lnT>
-                      <a:noFill/>
-                    </a:lnT>
-                    <a:lnB>
-                      <a:noFill/>
-                    </a:lnB>
-                    <a:noFill/>
-                  </a:tcPr>
-                </a:tc>
-                <a:tc>
-                  <a:txBody>
-                    <a:bodyPr/>
-                    <a:lstStyle/>
-                    <a:p>
-                      <a:pPr algn="l"/>
-                      <a:r>
-                        <a:rPr b="0" sz="1650" i="0" u="none">
-                          <a:solidFill>
-                            <a:srgbClr val="64748B"/>
-                          </a:solidFill>
-                          <a:latin typeface="Inter"/>
-                        </a:rPr>
-                        <a:t>1.7437</a:t>
-                      </a:r>
-                    </a:p>
-                  </a:txBody>
-                  <a:tcPr anchor="ctr" marL="63500" marR="63500" marT="25400" marB="25400">
-                    <a:lnL>
-                      <a:noFill/>
-                    </a:lnL>
-                    <a:lnR>
-                      <a:noFill/>
-                    </a:lnR>
-                    <a:lnT>
-                      <a:noFill/>
-                    </a:lnT>
-                    <a:lnB>
-                      <a:noFill/>
-                    </a:lnB>
-                    <a:noFill/>
-                  </a:tcPr>
-                </a:tc>
-                <a:tc>
-                  <a:txBody>
-                    <a:bodyPr/>
-                    <a:lstStyle/>
-                    <a:p>
-                      <a:pPr algn="l"/>
-                      <a:r>
-                        <a:rPr b="0" sz="1650" i="0" u="none">
-                          <a:solidFill>
-                            <a:srgbClr val="64748B"/>
-                          </a:solidFill>
-                          <a:latin typeface="Inter"/>
-                        </a:rPr>
-                        <a:t>0.9984</a:t>
-                      </a:r>
-                    </a:p>
-                  </a:txBody>
-                  <a:tcPr anchor="ctr" marL="63500" marR="63500" marT="25400" marB="25400">
-                    <a:lnL>
-                      <a:noFill/>
-                    </a:lnL>
-                    <a:lnR>
-                      <a:noFill/>
-                    </a:lnR>
-                    <a:lnT>
-                      <a:noFill/>
-                    </a:lnT>
-                    <a:lnB>
-                      <a:noFill/>
-                    </a:lnB>
-                    <a:noFill/>
-                  </a:tcPr>
-                </a:tc>
-                <a:tc>
-                  <a:txBody>
-                    <a:bodyPr/>
-                    <a:lstStyle/>
-                    <a:p>
-                      <a:pPr algn="l"/>
-                      <a:r>
-                        <a:rPr b="0" sz="1650" i="0" u="none">
-                          <a:solidFill>
-                            <a:srgbClr val="64748B"/>
-                          </a:solidFill>
-                          <a:latin typeface="Inter"/>
-                        </a:rPr>
-                        <a:t>Strong generalization.</a:t>
-                      </a:r>
-                    </a:p>
-                  </a:txBody>
-                  <a:tcPr anchor="ctr" marL="63500" marR="63500" marT="25400" marB="25400">
-                    <a:lnL>
-                      <a:noFill/>
-                    </a:lnL>
-                    <a:lnR>
-                      <a:noFill/>
-                    </a:lnR>
-                    <a:lnT>
-                      <a:noFill/>
-                    </a:lnT>
-                    <a:lnB>
-                      <a:noFill/>
-                    </a:lnB>
-                    <a:noFill/>
-                  </a:tcPr>
-                </a:tc>
-              </a:tr>
-              <a:tr h="760412">
-                <a:tc>
-                  <a:txBody>
-                    <a:bodyPr/>
-                    <a:lstStyle/>
-                    <a:p>
-                      <a:pPr algn="l"/>
-                      <a:r>
-                        <a:rPr b="0" sz="1650" i="0" u="none">
-                          <a:solidFill>
-                            <a:srgbClr val="334155"/>
-                          </a:solidFill>
-                          <a:latin typeface="Inter Medium"/>
-                        </a:rPr>
-                        <a:t>XGBoost</a:t>
-                      </a:r>
-                    </a:p>
-                  </a:txBody>
-                  <a:tcPr anchor="ctr" marL="63500" marR="63500" marT="25400" marB="25400">
-                    <a:lnL>
-                      <a:noFill/>
-                    </a:lnL>
-                    <a:lnR>
-                      <a:noFill/>
-                    </a:lnR>
-                    <a:lnT>
-                      <a:noFill/>
-                    </a:lnT>
-                    <a:lnB>
-                      <a:noFill/>
-                    </a:lnB>
-                    <a:noFill/>
-                  </a:tcPr>
-                </a:tc>
-                <a:tc>
-                  <a:txBody>
-                    <a:bodyPr/>
-                    <a:lstStyle/>
-                    <a:p>
-                      <a:pPr algn="l"/>
-                      <a:r>
-                        <a:rPr b="0" sz="1650" i="0" u="none">
-                          <a:solidFill>
-                            <a:srgbClr val="64748B"/>
-                          </a:solidFill>
-                          <a:latin typeface="Inter"/>
-                        </a:rPr>
-                        <a:t>1.7506</a:t>
-                      </a:r>
-                    </a:p>
-                  </a:txBody>
-                  <a:tcPr anchor="ctr" marL="63500" marR="63500" marT="25400" marB="25400">
-                    <a:lnL>
-                      <a:noFill/>
-                    </a:lnL>
-                    <a:lnR>
-                      <a:noFill/>
-                    </a:lnR>
-                    <a:lnT>
-                      <a:noFill/>
-                    </a:lnT>
-                    <a:lnB>
-                      <a:noFill/>
-                    </a:lnB>
-                    <a:noFill/>
-                  </a:tcPr>
-                </a:tc>
-                <a:tc>
-                  <a:txBody>
-                    <a:bodyPr/>
-                    <a:lstStyle/>
-                    <a:p>
-                      <a:pPr algn="l"/>
-                      <a:r>
-                        <a:rPr b="0" sz="1650" i="0" u="none">
-                          <a:solidFill>
-                            <a:srgbClr val="64748B"/>
-                          </a:solidFill>
-                          <a:latin typeface="Inter"/>
-                        </a:rPr>
-                        <a:t>0.9984</a:t>
-                      </a:r>
-                    </a:p>
-                  </a:txBody>
-                  <a:tcPr anchor="ctr" marL="63500" marR="63500" marT="25400" marB="25400">
-                    <a:lnL>
-                      <a:noFill/>
-                    </a:lnL>
-                    <a:lnR>
-                      <a:noFill/>
-                    </a:lnR>
-                    <a:lnT>
-                      <a:noFill/>
-                    </a:lnT>
-                    <a:lnB>
-                      <a:noFill/>
-                    </a:lnB>
-                    <a:noFill/>
-                  </a:tcPr>
-                </a:tc>
-                <a:tc>
-                  <a:txBody>
-                    <a:bodyPr/>
-                    <a:lstStyle/>
-                    <a:p>
-                      <a:pPr algn="l"/>
-                      <a:r>
-                        <a:rPr b="0" sz="1650" i="0" u="none">
-                          <a:solidFill>
-                            <a:srgbClr val="64748B"/>
-                          </a:solidFill>
-                          <a:latin typeface="Inter"/>
-                        </a:rPr>
-                        <a:t>Strong generalization.</a:t>
-                      </a:r>
-                    </a:p>
-                  </a:txBody>
-                  <a:tcPr anchor="ctr" marL="63500" marR="63500" marT="25400" marB="25400">
-                    <a:lnL>
-                      <a:noFill/>
-                    </a:lnL>
-                    <a:lnR>
-                      <a:noFill/>
-                    </a:lnR>
-                    <a:lnT>
-                      <a:noFill/>
-                    </a:lnT>
-                    <a:lnB>
-                      <a:noFill/>
-                    </a:lnB>
-                    <a:noFill/>
-                  </a:tcPr>
-                </a:tc>
-              </a:tr>
-              <a:tr h="760412">
-                <a:tc>
-                  <a:txBody>
-                    <a:bodyPr/>
-                    <a:lstStyle/>
-                    <a:p>
-                      <a:pPr algn="l"/>
-                      <a:r>
-                        <a:rPr b="0" sz="1650" i="0" u="none">
-                          <a:solidFill>
-                            <a:srgbClr val="334155"/>
-                          </a:solidFill>
-                          <a:latin typeface="Inter Medium"/>
-                        </a:rPr>
-                        <a:t>Random Forest</a:t>
-                      </a:r>
-                    </a:p>
-                  </a:txBody>
-                  <a:tcPr anchor="ctr" marL="63500" marR="63500" marT="25400" marB="25400">
-                    <a:lnL>
-                      <a:noFill/>
-                    </a:lnL>
-                    <a:lnR>
-                      <a:noFill/>
-                    </a:lnR>
-                    <a:lnT>
-                      <a:noFill/>
-                    </a:lnT>
-                    <a:lnB>
-                      <a:noFill/>
-                    </a:lnB>
-                    <a:noFill/>
-                  </a:tcPr>
-                </a:tc>
-                <a:tc>
-                  <a:txBody>
-                    <a:bodyPr/>
-                    <a:lstStyle/>
-                    <a:p>
-                      <a:pPr algn="l"/>
-                      <a:r>
-                        <a:rPr b="0" sz="1650" i="0" u="none">
-                          <a:solidFill>
-                            <a:srgbClr val="64748B"/>
-                          </a:solidFill>
-                          <a:latin typeface="Inter"/>
-                        </a:rPr>
-                        <a:t>1.8749</a:t>
-                      </a:r>
-                    </a:p>
-                  </a:txBody>
-                  <a:tcPr anchor="ctr" marL="63500" marR="63500" marT="25400" marB="25400">
-                    <a:lnL>
-                      <a:noFill/>
-                    </a:lnL>
-                    <a:lnR>
-                      <a:noFill/>
-                    </a:lnR>
-                    <a:lnT>
-                      <a:noFill/>
-                    </a:lnT>
-                    <a:lnB>
-                      <a:noFill/>
-                    </a:lnB>
-                    <a:noFill/>
-                  </a:tcPr>
-                </a:tc>
-                <a:tc>
-                  <a:txBody>
-                    <a:bodyPr/>
-                    <a:lstStyle/>
-                    <a:p>
-                      <a:pPr algn="l"/>
-                      <a:r>
-                        <a:rPr b="0" sz="1650" i="0" u="none">
-                          <a:solidFill>
-                            <a:srgbClr val="64748B"/>
-                          </a:solidFill>
-                          <a:latin typeface="Inter"/>
-                        </a:rPr>
-                        <a:t>0.9981</a:t>
-                      </a:r>
-                    </a:p>
-                  </a:txBody>
-                  <a:tcPr anchor="ctr" marL="63500" marR="63500" marT="25400" marB="25400">
-                    <a:lnL>
-                      <a:noFill/>
-                    </a:lnL>
-                    <a:lnR>
-                      <a:noFill/>
-                    </a:lnR>
-                    <a:lnT>
-                      <a:noFill/>
-                    </a:lnT>
-                    <a:lnB>
-                      <a:noFill/>
-                    </a:lnB>
-                    <a:noFill/>
-                  </a:tcPr>
-                </a:tc>
-                <a:tc>
-                  <a:txBody>
-                    <a:bodyPr/>
-                    <a:lstStyle/>
-                    <a:p>
-                      <a:pPr algn="l"/>
-                      <a:r>
-                        <a:rPr b="0" sz="1650" i="0" u="none">
-                          <a:solidFill>
-                            <a:srgbClr val="64748B"/>
-                          </a:solidFill>
-                          <a:latin typeface="Inter"/>
-                        </a:rPr>
-                        <a:t>Adequate non-linear fit.</a:t>
-                      </a:r>
-                    </a:p>
-                  </a:txBody>
-                  <a:tcPr anchor="ctr" marL="63500" marR="63500" marT="25400" marB="25400">
-                    <a:lnL>
-                      <a:noFill/>
-                    </a:lnL>
-                    <a:lnR>
-                      <a:noFill/>
-                    </a:lnR>
-                    <a:lnT>
-                      <a:noFill/>
-                    </a:lnT>
-                    <a:lnB>
-                      <a:noFill/>
-                    </a:lnB>
-                    <a:noFill/>
-                  </a:tcPr>
-                </a:tc>
-              </a:tr>
-              <a:tr h="760415">
-                <a:tc>
-                  <a:txBody>
-                    <a:bodyPr/>
-                    <a:lstStyle/>
-                    <a:p>
-                      <a:pPr algn="l"/>
-                      <a:r>
-                        <a:rPr b="0" sz="1650" i="0" u="none">
-                          <a:solidFill>
-                            <a:srgbClr val="334155"/>
-                          </a:solidFill>
-                          <a:latin typeface="Inter Medium"/>
-                        </a:rPr>
-                        <a:t>Decision Tree</a:t>
-                      </a:r>
-                    </a:p>
-                  </a:txBody>
-                  <a:tcPr anchor="ctr" marL="63500" marR="63500" marT="25400" marB="25400">
-                    <a:lnL>
-                      <a:noFill/>
-                    </a:lnL>
-                    <a:lnR>
-                      <a:noFill/>
-                    </a:lnR>
-                    <a:lnT>
-                      <a:noFill/>
-                    </a:lnT>
-                    <a:lnB>
-                      <a:noFill/>
-                    </a:lnB>
-                    <a:noFill/>
-                  </a:tcPr>
-                </a:tc>
-                <a:tc>
-                  <a:txBody>
-                    <a:bodyPr/>
-                    <a:lstStyle/>
-                    <a:p>
-                      <a:pPr algn="l"/>
-                      <a:r>
-                        <a:rPr b="0" sz="1650" i="0" u="none">
-                          <a:solidFill>
-                            <a:srgbClr val="64748B"/>
-                          </a:solidFill>
-                          <a:latin typeface="Inter"/>
-                        </a:rPr>
-                        <a:t>2.7350</a:t>
-                      </a:r>
-                    </a:p>
-                  </a:txBody>
-                  <a:tcPr anchor="ctr" marL="63500" marR="63500" marT="25400" marB="25400">
-                    <a:lnL>
-                      <a:noFill/>
-                    </a:lnL>
-                    <a:lnR>
-                      <a:noFill/>
-                    </a:lnR>
-                    <a:lnT>
-                      <a:noFill/>
-                    </a:lnT>
-                    <a:lnB>
-                      <a:noFill/>
-                    </a:lnB>
-                    <a:noFill/>
-                  </a:tcPr>
-                </a:tc>
-                <a:tc>
-                  <a:txBody>
-                    <a:bodyPr/>
-                    <a:lstStyle/>
-                    <a:p>
-                      <a:pPr algn="l"/>
-                      <a:r>
-                        <a:rPr b="0" sz="1650" i="0" u="none">
-                          <a:solidFill>
-                            <a:srgbClr val="64748B"/>
-                          </a:solidFill>
-                          <a:latin typeface="Inter"/>
-                        </a:rPr>
-                        <a:t>0.9960</a:t>
-                      </a:r>
-                    </a:p>
-                  </a:txBody>
-                  <a:tcPr anchor="ctr" marL="63500" marR="63500" marT="25400" marB="25400">
-                    <a:lnL>
-                      <a:noFill/>
-                    </a:lnL>
-                    <a:lnR>
-                      <a:noFill/>
-                    </a:lnR>
-                    <a:lnT>
-                      <a:noFill/>
-                    </a:lnT>
-                    <a:lnB>
-                      <a:noFill/>
-                    </a:lnB>
-                    <a:noFill/>
-                  </a:tcPr>
-                </a:tc>
-                <a:tc>
-                  <a:txBody>
-                    <a:bodyPr/>
-                    <a:lstStyle/>
-                    <a:p>
-                      <a:pPr algn="l"/>
-                      <a:r>
-                        <a:rPr b="0" sz="1650" i="0" u="none">
-                          <a:solidFill>
-                            <a:srgbClr val="64748B"/>
-                          </a:solidFill>
-                          <a:latin typeface="Inter"/>
-                        </a:rPr>
-                        <a:t>Highest prediction error.</a:t>
-                      </a:r>
-                    </a:p>
-                  </a:txBody>
-                  <a:tcPr anchor="ctr" marL="63500" marR="63500" marT="25400" marB="25400">
-                    <a:lnL>
-                      <a:noFill/>
-                    </a:lnL>
-                    <a:lnR>
-                      <a:noFill/>
-                    </a:lnR>
-                    <a:lnT>
-                      <a:noFill/>
-                    </a:lnT>
-                    <a:lnB>
-                      <a:noFill/>
-                    </a:lnB>
-                    <a:noFill/>
-                  </a:tcPr>
-                </a:tc>
-              </a:tr>
-            </a:tbl>
-          </a:graphicData>
-        </a:graphic>
-      </p:graphicFrame>
+      <p:grpSpPr>
+        <a:xfrm>
+          <a:off x="0" y="0"/>
+          <a:ext cx="0" cy="0"/>
+          <a:chOff x="0" y="0"/>
+          <a:chExt cx="0" cy="0"/>
+        </a:xfrm>
+      </p:grpSpPr>
       <p:pic>
         <p:nvPicPr>
-          <p:cNvPr id="5" name="Picture 4" descr="image.png"/>
+          <p:cNvPr id="2" name="Picture 1" descr="image.png"/>
           <p:cNvPicPr>
             <a:picLocks noChangeAspect="1"/>
           </p:cNvPicPr>
@@ -5627,8 +5997,8 @@
         </p:blipFill>
         <p:spPr>
           <a:xfrm>
-            <a:off x="990600" y="3305175"/>
-            <a:ext cx="190500" cy="171450"/>
+            <a:off x="762000" y="2143125"/>
+            <a:ext cx="3352800" cy="3952875"/>
           </a:xfrm>
           <a:prstGeom prst="rect">
             <a:avLst/>
@@ -5637,7 +6007,7 @@
       </p:pic>
       <p:pic>
         <p:nvPicPr>
-          <p:cNvPr id="6" name="Picture 5" descr="image.png"/>
+          <p:cNvPr id="3" name="Picture 2" descr="image.png"/>
           <p:cNvPicPr>
             <a:picLocks noChangeAspect="1"/>
           </p:cNvPicPr>
@@ -5651,14 +6021,390 @@
         </p:blipFill>
         <p:spPr>
           <a:xfrm>
-            <a:off x="990600" y="3305175"/>
-            <a:ext cx="190500" cy="171450"/>
+            <a:off x="4419600" y="2143125"/>
+            <a:ext cx="3352800" cy="3952875"/>
           </a:xfrm>
           <a:prstGeom prst="rect">
             <a:avLst/>
           </a:prstGeom>
         </p:spPr>
       </p:pic>
+      <p:pic>
+        <p:nvPicPr>
+          <p:cNvPr id="4" name="Picture 3" descr="image.png"/>
+          <p:cNvPicPr>
+            <a:picLocks noChangeAspect="1"/>
+          </p:cNvPicPr>
+          <p:nvPr/>
+        </p:nvPicPr>
+        <p:blipFill>
+          <a:blip r:embed="rId3"/>
+          <a:stretch>
+            <a:fillRect/>
+          </a:stretch>
+        </p:blipFill>
+        <p:spPr>
+          <a:xfrm>
+            <a:off x="8077200" y="2143125"/>
+            <a:ext cx="3352800" cy="3952875"/>
+          </a:xfrm>
+          <a:prstGeom prst="rect">
+            <a:avLst/>
+          </a:prstGeom>
+        </p:spPr>
+      </p:pic>
+      <p:sp>
+        <p:nvSpPr>
+          <p:cNvPr id="5" name="TextBox 4"/>
+          <p:cNvSpPr txBox="1"/>
+          <p:nvPr/>
+        </p:nvSpPr>
+        <p:spPr>
+          <a:xfrm>
+            <a:off x="762000" y="762000"/>
+            <a:ext cx="10668000" cy="190500"/>
+          </a:xfrm>
+          <a:prstGeom prst="rect">
+            <a:avLst/>
+          </a:prstGeom>
+          <a:noFill/>
+        </p:spPr>
+        <p:txBody>
+          <a:bodyPr wrap="square" lIns="0" tIns="0" rIns="0" bIns="0" anchor="t">
+            <a:spAutoFit/>
+          </a:bodyPr>
+          <a:lstStyle/>
+          <a:p>
+            <a:pPr algn="l"/>
+            <a:r>
+              <a:rPr sz="1200" b="1" i="0" u="none">
+                <a:solidFill>
+                  <a:srgbClr val="38BDF8"/>
+                </a:solidFill>
+                <a:latin typeface="Inter"/>
+              </a:rPr>
+              <a:t>05 • PREPROCESSING</a:t>
+            </a:r>
+          </a:p>
+        </p:txBody>
+      </p:sp>
+      <p:sp>
+        <p:nvSpPr>
+          <p:cNvPr id="6" name="TextBox 5"/>
+          <p:cNvSpPr txBox="1"/>
+          <p:nvPr/>
+        </p:nvSpPr>
+        <p:spPr>
+          <a:xfrm>
+            <a:off x="762000" y="1104900"/>
+            <a:ext cx="11201400" cy="581025"/>
+          </a:xfrm>
+          <a:prstGeom prst="rect">
+            <a:avLst/>
+          </a:prstGeom>
+          <a:noFill/>
+        </p:spPr>
+        <p:txBody>
+          <a:bodyPr wrap="square" lIns="0" tIns="0" rIns="0" bIns="0" anchor="t">
+            <a:spAutoFit/>
+          </a:bodyPr>
+          <a:lstStyle/>
+          <a:p>
+            <a:pPr algn="l"/>
+            <a:r>
+              <a:rPr sz="3600" b="1" i="0" u="none">
+                <a:solidFill>
+                  <a:srgbClr val="0F172A"/>
+                </a:solidFill>
+                <a:latin typeface="Space Grotesk"/>
+              </a:rPr>
+              <a:t>Data Pipeline Architecture</a:t>
+            </a:r>
+          </a:p>
+        </p:txBody>
+      </p:sp>
+      <p:pic>
+        <p:nvPicPr>
+          <p:cNvPr id="7" name="Picture 6" descr="image.png"/>
+          <p:cNvPicPr>
+            <a:picLocks noChangeAspect="1"/>
+          </p:cNvPicPr>
+          <p:nvPr/>
+        </p:nvPicPr>
+        <p:blipFill>
+          <a:blip r:embed="rId4"/>
+          <a:stretch>
+            <a:fillRect/>
+          </a:stretch>
+        </p:blipFill>
+        <p:spPr>
+          <a:xfrm>
+            <a:off x="2209800" y="3148012"/>
+            <a:ext cx="457200" cy="457200"/>
+          </a:xfrm>
+          <a:prstGeom prst="rect">
+            <a:avLst/>
+          </a:prstGeom>
+        </p:spPr>
+      </p:pic>
+      <p:sp>
+        <p:nvSpPr>
+          <p:cNvPr id="8" name="TextBox 7"/>
+          <p:cNvSpPr txBox="1"/>
+          <p:nvPr/>
+        </p:nvSpPr>
+        <p:spPr>
+          <a:xfrm>
+            <a:off x="1688306" y="3910012"/>
+            <a:ext cx="1500187" cy="342900"/>
+          </a:xfrm>
+          <a:prstGeom prst="rect">
+            <a:avLst/>
+          </a:prstGeom>
+          <a:noFill/>
+        </p:spPr>
+        <p:txBody>
+          <a:bodyPr wrap="square" lIns="0" tIns="0" rIns="0" bIns="0" anchor="t">
+            <a:spAutoFit/>
+          </a:bodyPr>
+          <a:lstStyle/>
+          <a:p>
+            <a:pPr algn="ctr"/>
+            <a:r>
+              <a:rPr sz="2100" b="1" i="0" u="none">
+                <a:solidFill>
+                  <a:srgbClr val="0F172A"/>
+                </a:solidFill>
+                <a:latin typeface="Space Grotesk"/>
+              </a:rPr>
+              <a:t>80/20 Split</a:t>
+            </a:r>
+          </a:p>
+        </p:txBody>
+      </p:sp>
+      <p:sp>
+        <p:nvSpPr>
+          <p:cNvPr id="9" name="TextBox 8"/>
+          <p:cNvSpPr txBox="1"/>
+          <p:nvPr/>
+        </p:nvSpPr>
+        <p:spPr>
+          <a:xfrm>
+            <a:off x="1219200" y="4405312"/>
+            <a:ext cx="2438400" cy="685800"/>
+          </a:xfrm>
+          <a:prstGeom prst="rect">
+            <a:avLst/>
+          </a:prstGeom>
+          <a:noFill/>
+        </p:spPr>
+        <p:txBody>
+          <a:bodyPr wrap="square" lIns="0" tIns="0" rIns="0" bIns="0" anchor="t">
+            <a:spAutoFit/>
+          </a:bodyPr>
+          <a:lstStyle/>
+          <a:p>
+            <a:pPr algn="ctr"/>
+            <a:r>
+              <a:rPr sz="1500" b="0" i="0" u="none">
+                <a:solidFill>
+                  <a:srgbClr val="64748B"/>
+                </a:solidFill>
+                <a:latin typeface="Inter"/>
+              </a:rPr>
+              <a:t>Strict separation of training and generalization test data.</a:t>
+            </a:r>
+          </a:p>
+        </p:txBody>
+      </p:sp>
+      <p:pic>
+        <p:nvPicPr>
+          <p:cNvPr id="10" name="Picture 9" descr="image.png"/>
+          <p:cNvPicPr>
+            <a:picLocks noChangeAspect="1"/>
+          </p:cNvPicPr>
+          <p:nvPr/>
+        </p:nvPicPr>
+        <p:blipFill>
+          <a:blip r:embed="rId5"/>
+          <a:stretch>
+            <a:fillRect/>
+          </a:stretch>
+        </p:blipFill>
+        <p:spPr>
+          <a:xfrm>
+            <a:off x="5810250" y="3148012"/>
+            <a:ext cx="571500" cy="457200"/>
+          </a:xfrm>
+          <a:prstGeom prst="rect">
+            <a:avLst/>
+          </a:prstGeom>
+        </p:spPr>
+      </p:pic>
+      <p:sp>
+        <p:nvSpPr>
+          <p:cNvPr id="11" name="TextBox 10"/>
+          <p:cNvSpPr txBox="1"/>
+          <p:nvPr/>
+        </p:nvSpPr>
+        <p:spPr>
+          <a:xfrm>
+            <a:off x="5055870" y="3910012"/>
+            <a:ext cx="2080260" cy="342900"/>
+          </a:xfrm>
+          <a:prstGeom prst="rect">
+            <a:avLst/>
+          </a:prstGeom>
+          <a:noFill/>
+        </p:spPr>
+        <p:txBody>
+          <a:bodyPr wrap="square" lIns="0" tIns="0" rIns="0" bIns="0" anchor="t">
+            <a:spAutoFit/>
+          </a:bodyPr>
+          <a:lstStyle/>
+          <a:p>
+            <a:pPr algn="ctr"/>
+            <a:r>
+              <a:rPr sz="2100" b="1" i="0" u="none">
+                <a:solidFill>
+                  <a:srgbClr val="0F172A"/>
+                </a:solidFill>
+                <a:latin typeface="Space Grotesk"/>
+              </a:rPr>
+              <a:t>StandardScaler</a:t>
+            </a:r>
+          </a:p>
+        </p:txBody>
+      </p:sp>
+      <p:sp>
+        <p:nvSpPr>
+          <p:cNvPr id="12" name="TextBox 11"/>
+          <p:cNvSpPr txBox="1"/>
+          <p:nvPr/>
+        </p:nvSpPr>
+        <p:spPr>
+          <a:xfrm>
+            <a:off x="4876800" y="4405312"/>
+            <a:ext cx="2438400" cy="685800"/>
+          </a:xfrm>
+          <a:prstGeom prst="rect">
+            <a:avLst/>
+          </a:prstGeom>
+          <a:noFill/>
+        </p:spPr>
+        <p:txBody>
+          <a:bodyPr wrap="square" lIns="0" tIns="0" rIns="0" bIns="0" anchor="t">
+            <a:spAutoFit/>
+          </a:bodyPr>
+          <a:lstStyle/>
+          <a:p>
+            <a:pPr algn="ctr"/>
+            <a:r>
+              <a:rPr sz="1500" b="0" i="0" u="none">
+                <a:solidFill>
+                  <a:srgbClr val="64748B"/>
+                </a:solidFill>
+                <a:latin typeface="Inter"/>
+              </a:rPr>
+              <a:t>Converts varying numerical scales into standard z-scores.</a:t>
+            </a:r>
+          </a:p>
+        </p:txBody>
+      </p:sp>
+      <p:pic>
+        <p:nvPicPr>
+          <p:cNvPr id="13" name="Picture 12" descr="image.png"/>
+          <p:cNvPicPr>
+            <a:picLocks noChangeAspect="1"/>
+          </p:cNvPicPr>
+          <p:nvPr/>
+        </p:nvPicPr>
+        <p:blipFill>
+          <a:blip r:embed="rId6"/>
+          <a:stretch>
+            <a:fillRect/>
+          </a:stretch>
+        </p:blipFill>
+        <p:spPr>
+          <a:xfrm>
+            <a:off x="9525000" y="3300412"/>
+            <a:ext cx="457200" cy="457200"/>
+          </a:xfrm>
+          <a:prstGeom prst="rect">
+            <a:avLst/>
+          </a:prstGeom>
+        </p:spPr>
+      </p:pic>
+      <p:sp>
+        <p:nvSpPr>
+          <p:cNvPr id="14" name="TextBox 13"/>
+          <p:cNvSpPr txBox="1"/>
+          <p:nvPr/>
+        </p:nvSpPr>
+        <p:spPr>
+          <a:xfrm>
+            <a:off x="8748474" y="4062412"/>
+            <a:ext cx="2010251" cy="342900"/>
+          </a:xfrm>
+          <a:prstGeom prst="rect">
+            <a:avLst/>
+          </a:prstGeom>
+          <a:noFill/>
+        </p:spPr>
+        <p:txBody>
+          <a:bodyPr wrap="square" lIns="0" tIns="0" rIns="0" bIns="0" anchor="t">
+            <a:spAutoFit/>
+          </a:bodyPr>
+          <a:lstStyle/>
+          <a:p>
+            <a:pPr algn="ctr"/>
+            <a:r>
+              <a:rPr sz="2100" b="1" i="0" u="none">
+                <a:solidFill>
+                  <a:srgbClr val="0F172A"/>
+                </a:solidFill>
+                <a:latin typeface="Space Grotesk"/>
+              </a:rPr>
+              <a:t>Target Variable</a:t>
+            </a:r>
+          </a:p>
+        </p:txBody>
+      </p:sp>
+      <p:sp>
+        <p:nvSpPr>
+          <p:cNvPr id="15" name="TextBox 14"/>
+          <p:cNvSpPr txBox="1"/>
+          <p:nvPr/>
+        </p:nvSpPr>
+        <p:spPr>
+          <a:xfrm>
+            <a:off x="8705850" y="4557712"/>
+            <a:ext cx="2095500" cy="381000"/>
+          </a:xfrm>
+          <a:prstGeom prst="rect">
+            <a:avLst/>
+          </a:prstGeom>
+          <a:noFill/>
+        </p:spPr>
+        <p:txBody>
+          <a:bodyPr wrap="square" lIns="0" tIns="0" rIns="0" bIns="0" anchor="t">
+            <a:spAutoFit/>
+          </a:bodyPr>
+          <a:lstStyle/>
+          <a:p>
+            <a:pPr algn="ctr"/>
+            <a:r>
+              <a:rPr sz="2400" b="1" i="0" u="none">
+                <a:solidFill>
+                  <a:srgbClr val="0F172A"/>
+                </a:solidFill>
+                <a:latin typeface="Space Grotesk"/>
+              </a:rPr>
+              <a:t>People_Count</a:t>
+            </a:r>
+          </a:p>
+        </p:txBody>
+      </p:sp>
     </p:spTree>
   </p:cSld>
   <p:clrMapOvr>
@@ -5667,8 +6413,8 @@
 </p:sld>
 </file>
 
-<file path=ppt/slides/slide5.xml><?xml version="1.0" encoding="utf-8"?>
-<p:sld xmlns:a="http://schemas.openxmlformats.org/drawingml/2006/main" xmlns:p="http://schemas.openxmlformats.org/presentationml/2006/main" xmlns:r="http://schemas.openxmlformats.org/officeDocument/2006/relationships">
+<file path=ppt/slides/slide7.xml><?xml version="1.0" encoding="utf-8"?>
+<p:sld xmlns:a="http://schemas.openxmlformats.org/drawingml/2006/main" xmlns:r="http://schemas.openxmlformats.org/officeDocument/2006/relationships" xmlns:p="http://schemas.openxmlformats.org/presentationml/2006/main">
   <p:cSld>
     <p:bg>
       <p:bgPr>
@@ -5684,10 +6430,981 @@
         <p:cNvGrpSpPr/>
         <p:nvPr/>
       </p:nvGrpSpPr>
-      <p:grpSpPr/>
+      <p:grpSpPr>
+        <a:xfrm>
+          <a:off x="0" y="0"/>
+          <a:ext cx="0" cy="0"/>
+          <a:chOff x="0" y="0"/>
+          <a:chExt cx="0" cy="0"/>
+        </a:xfrm>
+      </p:grpSpPr>
+      <p:sp>
+        <p:nvSpPr>
+          <p:cNvPr id="2" name="TextBox 1"/>
+          <p:cNvSpPr txBox="1"/>
+          <p:nvPr/>
+        </p:nvSpPr>
+        <p:spPr>
+          <a:xfrm>
+            <a:off x="762000" y="762000"/>
+            <a:ext cx="10668000" cy="190500"/>
+          </a:xfrm>
+          <a:prstGeom prst="rect">
+            <a:avLst/>
+          </a:prstGeom>
+          <a:noFill/>
+        </p:spPr>
+        <p:txBody>
+          <a:bodyPr wrap="square" lIns="0" tIns="0" rIns="0" bIns="0" anchor="t">
+            <a:spAutoFit/>
+          </a:bodyPr>
+          <a:lstStyle/>
+          <a:p>
+            <a:pPr algn="l"/>
+            <a:r>
+              <a:rPr sz="1200" b="1" i="0" u="none">
+                <a:solidFill>
+                  <a:srgbClr val="38BDF8"/>
+                </a:solidFill>
+                <a:latin typeface="Inter"/>
+              </a:rPr>
+              <a:t>06 • MODEL SELECTION</a:t>
+            </a:r>
+          </a:p>
+        </p:txBody>
+      </p:sp>
+      <p:sp>
+        <p:nvSpPr>
+          <p:cNvPr id="3" name="TextBox 2"/>
+          <p:cNvSpPr txBox="1"/>
+          <p:nvPr/>
+        </p:nvSpPr>
+        <p:spPr>
+          <a:xfrm>
+            <a:off x="762000" y="1104900"/>
+            <a:ext cx="11201400" cy="581025"/>
+          </a:xfrm>
+          <a:prstGeom prst="rect">
+            <a:avLst/>
+          </a:prstGeom>
+          <a:noFill/>
+        </p:spPr>
+        <p:txBody>
+          <a:bodyPr wrap="square" lIns="0" tIns="0" rIns="0" bIns="0" anchor="t">
+            <a:spAutoFit/>
+          </a:bodyPr>
+          <a:lstStyle/>
+          <a:p>
+            <a:pPr algn="l"/>
+            <a:r>
+              <a:rPr sz="3600" b="1" i="0" u="none">
+                <a:solidFill>
+                  <a:srgbClr val="0F172A"/>
+                </a:solidFill>
+                <a:latin typeface="Space Grotesk"/>
+              </a:rPr>
+              <a:t>Algorithm Performance</a:t>
+            </a:r>
+          </a:p>
+        </p:txBody>
+      </p:sp>
+      <p:graphicFrame>
+        <p:nvGraphicFramePr>
+          <p:cNvPr id="4" name="Table 3"/>
+          <p:cNvGraphicFramePr>
+            <a:graphicFrameLocks noGrp="1"/>
+          </p:cNvGraphicFramePr>
+          <p:nvPr/>
+        </p:nvGraphicFramePr>
+        <p:xfrm>
+          <a:off x="762000" y="2143125"/>
+          <a:ext cx="10668000" cy="4562475"/>
+        </p:xfrm>
+        <a:graphic>
+          <a:graphicData uri="http://schemas.openxmlformats.org/drawingml/2006/table">
+            <a:tbl>
+              <a:tblPr firstRow="1" bandRow="1">
+                <a:tableStyleId>{5C22544A-7EE6-4342-B048-85BDC9FD1C3A}</a:tableStyleId>
+              </a:tblPr>
+              <a:tblGrid>
+                <a:gridCol w="3200400">
+                  <a:extLst>
+                    <a:ext uri="{9D8B030D-6E8A-4147-A177-3AD203B41FA5}">
+                      <a16:colId xmlns:a16="http://schemas.microsoft.com/office/drawing/2014/main" val="20000"/>
+                    </a:ext>
+                  </a:extLst>
+                </a:gridCol>
+                <a:gridCol w="2133600">
+                  <a:extLst>
+                    <a:ext uri="{9D8B030D-6E8A-4147-A177-3AD203B41FA5}">
+                      <a16:colId xmlns:a16="http://schemas.microsoft.com/office/drawing/2014/main" val="20001"/>
+                    </a:ext>
+                  </a:extLst>
+                </a:gridCol>
+                <a:gridCol w="2133600">
+                  <a:extLst>
+                    <a:ext uri="{9D8B030D-6E8A-4147-A177-3AD203B41FA5}">
+                      <a16:colId xmlns:a16="http://schemas.microsoft.com/office/drawing/2014/main" val="20002"/>
+                    </a:ext>
+                  </a:extLst>
+                </a:gridCol>
+                <a:gridCol w="3200400">
+                  <a:extLst>
+                    <a:ext uri="{9D8B030D-6E8A-4147-A177-3AD203B41FA5}">
+                      <a16:colId xmlns:a16="http://schemas.microsoft.com/office/drawing/2014/main" val="20003"/>
+                    </a:ext>
+                  </a:extLst>
+                </a:gridCol>
+              </a:tblGrid>
+              <a:tr h="760412">
+                <a:tc>
+                  <a:txBody>
+                    <a:bodyPr/>
+                    <a:lstStyle/>
+                    <a:p>
+                      <a:pPr algn="l"/>
+                      <a:r>
+                        <a:rPr sz="1650" b="1" i="0" u="none">
+                          <a:solidFill>
+                            <a:srgbClr val="0F172A"/>
+                          </a:solidFill>
+                          <a:latin typeface="Space Grotesk"/>
+                        </a:rPr>
+                        <a:t>Model</a:t>
+                      </a:r>
+                    </a:p>
+                  </a:txBody>
+                  <a:tcPr marL="63500" marR="63500" marT="25400" marB="25400" anchor="ctr">
+                    <a:lnL>
+                      <a:noFill/>
+                    </a:lnL>
+                    <a:lnR>
+                      <a:noFill/>
+                    </a:lnR>
+                    <a:lnT>
+                      <a:noFill/>
+                    </a:lnT>
+                    <a:lnB>
+                      <a:noFill/>
+                    </a:lnB>
+                    <a:noFill/>
+                  </a:tcPr>
+                </a:tc>
+                <a:tc>
+                  <a:txBody>
+                    <a:bodyPr/>
+                    <a:lstStyle/>
+                    <a:p>
+                      <a:pPr algn="l"/>
+                      <a:r>
+                        <a:rPr sz="1650" b="1" i="0" u="none">
+                          <a:solidFill>
+                            <a:srgbClr val="0F172A"/>
+                          </a:solidFill>
+                          <a:latin typeface="Space Grotesk"/>
+                        </a:rPr>
+                        <a:t>RMSE</a:t>
+                      </a:r>
+                    </a:p>
+                  </a:txBody>
+                  <a:tcPr marL="63500" marR="63500" marT="25400" marB="25400" anchor="ctr">
+                    <a:lnL>
+                      <a:noFill/>
+                    </a:lnL>
+                    <a:lnR>
+                      <a:noFill/>
+                    </a:lnR>
+                    <a:lnT>
+                      <a:noFill/>
+                    </a:lnT>
+                    <a:lnB>
+                      <a:noFill/>
+                    </a:lnB>
+                    <a:noFill/>
+                  </a:tcPr>
+                </a:tc>
+                <a:tc>
+                  <a:txBody>
+                    <a:bodyPr/>
+                    <a:lstStyle/>
+                    <a:p>
+                      <a:pPr algn="l"/>
+                      <a:r>
+                        <a:rPr sz="1650" b="1" i="0" u="none">
+                          <a:solidFill>
+                            <a:srgbClr val="0F172A"/>
+                          </a:solidFill>
+                          <a:latin typeface="Space Grotesk"/>
+                        </a:rPr>
+                        <a:t>R² Score</a:t>
+                      </a:r>
+                    </a:p>
+                  </a:txBody>
+                  <a:tcPr marL="63500" marR="63500" marT="25400" marB="25400" anchor="ctr">
+                    <a:lnL>
+                      <a:noFill/>
+                    </a:lnL>
+                    <a:lnR>
+                      <a:noFill/>
+                    </a:lnR>
+                    <a:lnT>
+                      <a:noFill/>
+                    </a:lnT>
+                    <a:lnB>
+                      <a:noFill/>
+                    </a:lnB>
+                    <a:noFill/>
+                  </a:tcPr>
+                </a:tc>
+                <a:tc>
+                  <a:txBody>
+                    <a:bodyPr/>
+                    <a:lstStyle/>
+                    <a:p>
+                      <a:pPr algn="l"/>
+                      <a:r>
+                        <a:rPr sz="1650" b="1" i="0" u="none">
+                          <a:solidFill>
+                            <a:srgbClr val="0F172A"/>
+                          </a:solidFill>
+                          <a:latin typeface="Space Grotesk"/>
+                        </a:rPr>
+                        <a:t>Observation</a:t>
+                      </a:r>
+                    </a:p>
+                  </a:txBody>
+                  <a:tcPr marL="63500" marR="63500" marT="25400" marB="25400" anchor="ctr">
+                    <a:lnL>
+                      <a:noFill/>
+                    </a:lnL>
+                    <a:lnR>
+                      <a:noFill/>
+                    </a:lnR>
+                    <a:lnT>
+                      <a:noFill/>
+                    </a:lnT>
+                    <a:lnB>
+                      <a:noFill/>
+                    </a:lnB>
+                    <a:noFill/>
+                  </a:tcPr>
+                </a:tc>
+                <a:extLst>
+                  <a:ext uri="{0D108BD9-81ED-4DB2-BD59-A6C34878D82A}">
+                    <a16:rowId xmlns:a16="http://schemas.microsoft.com/office/drawing/2014/main" val="10000"/>
+                  </a:ext>
+                </a:extLst>
+              </a:tr>
+              <a:tr h="760412">
+                <a:tc>
+                  <a:txBody>
+                    <a:bodyPr/>
+                    <a:lstStyle/>
+                    <a:p>
+                      <a:pPr algn="l"/>
+                      <a:r>
+                        <a:rPr sz="1650" b="1" i="0" u="none">
+                          <a:solidFill>
+                            <a:srgbClr val="0F172A"/>
+                          </a:solidFill>
+                          <a:latin typeface="Inter"/>
+                        </a:rPr>
+                        <a:t>Linear Regression</a:t>
+                      </a:r>
+                    </a:p>
+                  </a:txBody>
+                  <a:tcPr marL="419100" marR="63500" marT="25400" marB="25400" anchor="ctr">
+                    <a:lnL>
+                      <a:noFill/>
+                    </a:lnL>
+                    <a:lnR>
+                      <a:noFill/>
+                    </a:lnR>
+                    <a:lnT>
+                      <a:noFill/>
+                    </a:lnT>
+                    <a:lnB>
+                      <a:noFill/>
+                    </a:lnB>
+                    <a:solidFill>
+                      <a:srgbClr val="F8FAFC"/>
+                    </a:solidFill>
+                  </a:tcPr>
+                </a:tc>
+                <a:tc>
+                  <a:txBody>
+                    <a:bodyPr/>
+                    <a:lstStyle/>
+                    <a:p>
+                      <a:pPr algn="l"/>
+                      <a:r>
+                        <a:rPr sz="1650" b="1" i="0" u="none">
+                          <a:solidFill>
+                            <a:srgbClr val="0F172A"/>
+                          </a:solidFill>
+                          <a:latin typeface="Inter"/>
+                        </a:rPr>
+                        <a:t>1.4404</a:t>
+                      </a:r>
+                    </a:p>
+                  </a:txBody>
+                  <a:tcPr marL="63500" marR="63500" marT="25400" marB="25400" anchor="ctr">
+                    <a:lnL>
+                      <a:noFill/>
+                    </a:lnL>
+                    <a:lnR>
+                      <a:noFill/>
+                    </a:lnR>
+                    <a:lnT>
+                      <a:noFill/>
+                    </a:lnT>
+                    <a:lnB>
+                      <a:noFill/>
+                    </a:lnB>
+                    <a:solidFill>
+                      <a:srgbClr val="F8FAFC"/>
+                    </a:solidFill>
+                  </a:tcPr>
+                </a:tc>
+                <a:tc>
+                  <a:txBody>
+                    <a:bodyPr/>
+                    <a:lstStyle/>
+                    <a:p>
+                      <a:pPr algn="l"/>
+                      <a:r>
+                        <a:rPr sz="1650" b="1" i="0" u="none">
+                          <a:solidFill>
+                            <a:srgbClr val="0F172A"/>
+                          </a:solidFill>
+                          <a:latin typeface="Inter"/>
+                        </a:rPr>
+                        <a:t>0.9989</a:t>
+                      </a:r>
+                    </a:p>
+                  </a:txBody>
+                  <a:tcPr marL="63500" marR="63500" marT="25400" marB="25400" anchor="ctr">
+                    <a:lnL>
+                      <a:noFill/>
+                    </a:lnL>
+                    <a:lnR>
+                      <a:noFill/>
+                    </a:lnR>
+                    <a:lnT>
+                      <a:noFill/>
+                    </a:lnT>
+                    <a:lnB>
+                      <a:noFill/>
+                    </a:lnB>
+                    <a:solidFill>
+                      <a:srgbClr val="F8FAFC"/>
+                    </a:solidFill>
+                  </a:tcPr>
+                </a:tc>
+                <a:tc>
+                  <a:txBody>
+                    <a:bodyPr/>
+                    <a:lstStyle/>
+                    <a:p>
+                      <a:pPr algn="l"/>
+                      <a:r>
+                        <a:rPr sz="1650" b="1" i="0" u="none">
+                          <a:solidFill>
+                            <a:srgbClr val="0F172A"/>
+                          </a:solidFill>
+                          <a:latin typeface="Inter"/>
+                        </a:rPr>
+                        <a:t>Best baseline performance.</a:t>
+                      </a:r>
+                    </a:p>
+                  </a:txBody>
+                  <a:tcPr marL="63500" marR="63500" marT="25400" marB="25400" anchor="ctr">
+                    <a:lnL>
+                      <a:noFill/>
+                    </a:lnL>
+                    <a:lnR>
+                      <a:noFill/>
+                    </a:lnR>
+                    <a:lnT>
+                      <a:noFill/>
+                    </a:lnT>
+                    <a:lnB>
+                      <a:noFill/>
+                    </a:lnB>
+                    <a:solidFill>
+                      <a:srgbClr val="F8FAFC"/>
+                    </a:solidFill>
+                  </a:tcPr>
+                </a:tc>
+                <a:extLst>
+                  <a:ext uri="{0D108BD9-81ED-4DB2-BD59-A6C34878D82A}">
+                    <a16:rowId xmlns:a16="http://schemas.microsoft.com/office/drawing/2014/main" val="10001"/>
+                  </a:ext>
+                </a:extLst>
+              </a:tr>
+              <a:tr h="760412">
+                <a:tc>
+                  <a:txBody>
+                    <a:bodyPr/>
+                    <a:lstStyle/>
+                    <a:p>
+                      <a:pPr algn="l"/>
+                      <a:r>
+                        <a:rPr sz="1650" b="0" i="0" u="none">
+                          <a:solidFill>
+                            <a:srgbClr val="334155"/>
+                          </a:solidFill>
+                          <a:latin typeface="Inter Medium"/>
+                        </a:rPr>
+                        <a:t>Gradient Boosting</a:t>
+                      </a:r>
+                    </a:p>
+                  </a:txBody>
+                  <a:tcPr marL="63500" marR="63500" marT="25400" marB="25400" anchor="ctr">
+                    <a:lnL>
+                      <a:noFill/>
+                    </a:lnL>
+                    <a:lnR>
+                      <a:noFill/>
+                    </a:lnR>
+                    <a:lnT>
+                      <a:noFill/>
+                    </a:lnT>
+                    <a:lnB>
+                      <a:noFill/>
+                    </a:lnB>
+                    <a:noFill/>
+                  </a:tcPr>
+                </a:tc>
+                <a:tc>
+                  <a:txBody>
+                    <a:bodyPr/>
+                    <a:lstStyle/>
+                    <a:p>
+                      <a:pPr algn="l"/>
+                      <a:r>
+                        <a:rPr sz="1650" b="0" i="0" u="none">
+                          <a:solidFill>
+                            <a:srgbClr val="64748B"/>
+                          </a:solidFill>
+                          <a:latin typeface="Inter"/>
+                        </a:rPr>
+                        <a:t>1.7437</a:t>
+                      </a:r>
+                    </a:p>
+                  </a:txBody>
+                  <a:tcPr marL="63500" marR="63500" marT="25400" marB="25400" anchor="ctr">
+                    <a:lnL>
+                      <a:noFill/>
+                    </a:lnL>
+                    <a:lnR>
+                      <a:noFill/>
+                    </a:lnR>
+                    <a:lnT>
+                      <a:noFill/>
+                    </a:lnT>
+                    <a:lnB>
+                      <a:noFill/>
+                    </a:lnB>
+                    <a:noFill/>
+                  </a:tcPr>
+                </a:tc>
+                <a:tc>
+                  <a:txBody>
+                    <a:bodyPr/>
+                    <a:lstStyle/>
+                    <a:p>
+                      <a:pPr algn="l"/>
+                      <a:r>
+                        <a:rPr sz="1650" b="0" i="0" u="none">
+                          <a:solidFill>
+                            <a:srgbClr val="64748B"/>
+                          </a:solidFill>
+                          <a:latin typeface="Inter"/>
+                        </a:rPr>
+                        <a:t>0.9984</a:t>
+                      </a:r>
+                    </a:p>
+                  </a:txBody>
+                  <a:tcPr marL="63500" marR="63500" marT="25400" marB="25400" anchor="ctr">
+                    <a:lnL>
+                      <a:noFill/>
+                    </a:lnL>
+                    <a:lnR>
+                      <a:noFill/>
+                    </a:lnR>
+                    <a:lnT>
+                      <a:noFill/>
+                    </a:lnT>
+                    <a:lnB>
+                      <a:noFill/>
+                    </a:lnB>
+                    <a:noFill/>
+                  </a:tcPr>
+                </a:tc>
+                <a:tc>
+                  <a:txBody>
+                    <a:bodyPr/>
+                    <a:lstStyle/>
+                    <a:p>
+                      <a:pPr algn="l"/>
+                      <a:r>
+                        <a:rPr sz="1650" b="0" i="0" u="none">
+                          <a:solidFill>
+                            <a:srgbClr val="64748B"/>
+                          </a:solidFill>
+                          <a:latin typeface="Inter"/>
+                        </a:rPr>
+                        <a:t>Strong generalization.</a:t>
+                      </a:r>
+                    </a:p>
+                  </a:txBody>
+                  <a:tcPr marL="63500" marR="63500" marT="25400" marB="25400" anchor="ctr">
+                    <a:lnL>
+                      <a:noFill/>
+                    </a:lnL>
+                    <a:lnR>
+                      <a:noFill/>
+                    </a:lnR>
+                    <a:lnT>
+                      <a:noFill/>
+                    </a:lnT>
+                    <a:lnB>
+                      <a:noFill/>
+                    </a:lnB>
+                    <a:noFill/>
+                  </a:tcPr>
+                </a:tc>
+                <a:extLst>
+                  <a:ext uri="{0D108BD9-81ED-4DB2-BD59-A6C34878D82A}">
+                    <a16:rowId xmlns:a16="http://schemas.microsoft.com/office/drawing/2014/main" val="10002"/>
+                  </a:ext>
+                </a:extLst>
+              </a:tr>
+              <a:tr h="760412">
+                <a:tc>
+                  <a:txBody>
+                    <a:bodyPr/>
+                    <a:lstStyle/>
+                    <a:p>
+                      <a:pPr algn="l"/>
+                      <a:r>
+                        <a:rPr sz="1650" b="0" i="0" u="none">
+                          <a:solidFill>
+                            <a:srgbClr val="334155"/>
+                          </a:solidFill>
+                          <a:latin typeface="Inter Medium"/>
+                        </a:rPr>
+                        <a:t>XGBoost</a:t>
+                      </a:r>
+                    </a:p>
+                  </a:txBody>
+                  <a:tcPr marL="63500" marR="63500" marT="25400" marB="25400" anchor="ctr">
+                    <a:lnL>
+                      <a:noFill/>
+                    </a:lnL>
+                    <a:lnR>
+                      <a:noFill/>
+                    </a:lnR>
+                    <a:lnT>
+                      <a:noFill/>
+                    </a:lnT>
+                    <a:lnB>
+                      <a:noFill/>
+                    </a:lnB>
+                    <a:noFill/>
+                  </a:tcPr>
+                </a:tc>
+                <a:tc>
+                  <a:txBody>
+                    <a:bodyPr/>
+                    <a:lstStyle/>
+                    <a:p>
+                      <a:pPr algn="l"/>
+                      <a:r>
+                        <a:rPr sz="1650" b="0" i="0" u="none">
+                          <a:solidFill>
+                            <a:srgbClr val="64748B"/>
+                          </a:solidFill>
+                          <a:latin typeface="Inter"/>
+                        </a:rPr>
+                        <a:t>1.7506</a:t>
+                      </a:r>
+                    </a:p>
+                  </a:txBody>
+                  <a:tcPr marL="63500" marR="63500" marT="25400" marB="25400" anchor="ctr">
+                    <a:lnL>
+                      <a:noFill/>
+                    </a:lnL>
+                    <a:lnR>
+                      <a:noFill/>
+                    </a:lnR>
+                    <a:lnT>
+                      <a:noFill/>
+                    </a:lnT>
+                    <a:lnB>
+                      <a:noFill/>
+                    </a:lnB>
+                    <a:noFill/>
+                  </a:tcPr>
+                </a:tc>
+                <a:tc>
+                  <a:txBody>
+                    <a:bodyPr/>
+                    <a:lstStyle/>
+                    <a:p>
+                      <a:pPr algn="l"/>
+                      <a:r>
+                        <a:rPr sz="1650" b="0" i="0" u="none">
+                          <a:solidFill>
+                            <a:srgbClr val="64748B"/>
+                          </a:solidFill>
+                          <a:latin typeface="Inter"/>
+                        </a:rPr>
+                        <a:t>0.9984</a:t>
+                      </a:r>
+                    </a:p>
+                  </a:txBody>
+                  <a:tcPr marL="63500" marR="63500" marT="25400" marB="25400" anchor="ctr">
+                    <a:lnL>
+                      <a:noFill/>
+                    </a:lnL>
+                    <a:lnR>
+                      <a:noFill/>
+                    </a:lnR>
+                    <a:lnT>
+                      <a:noFill/>
+                    </a:lnT>
+                    <a:lnB>
+                      <a:noFill/>
+                    </a:lnB>
+                    <a:noFill/>
+                  </a:tcPr>
+                </a:tc>
+                <a:tc>
+                  <a:txBody>
+                    <a:bodyPr/>
+                    <a:lstStyle/>
+                    <a:p>
+                      <a:pPr algn="l"/>
+                      <a:r>
+                        <a:rPr sz="1650" b="0" i="0" u="none">
+                          <a:solidFill>
+                            <a:srgbClr val="64748B"/>
+                          </a:solidFill>
+                          <a:latin typeface="Inter"/>
+                        </a:rPr>
+                        <a:t>Strong generalization.</a:t>
+                      </a:r>
+                    </a:p>
+                  </a:txBody>
+                  <a:tcPr marL="63500" marR="63500" marT="25400" marB="25400" anchor="ctr">
+                    <a:lnL>
+                      <a:noFill/>
+                    </a:lnL>
+                    <a:lnR>
+                      <a:noFill/>
+                    </a:lnR>
+                    <a:lnT>
+                      <a:noFill/>
+                    </a:lnT>
+                    <a:lnB>
+                      <a:noFill/>
+                    </a:lnB>
+                    <a:noFill/>
+                  </a:tcPr>
+                </a:tc>
+                <a:extLst>
+                  <a:ext uri="{0D108BD9-81ED-4DB2-BD59-A6C34878D82A}">
+                    <a16:rowId xmlns:a16="http://schemas.microsoft.com/office/drawing/2014/main" val="10003"/>
+                  </a:ext>
+                </a:extLst>
+              </a:tr>
+              <a:tr h="760412">
+                <a:tc>
+                  <a:txBody>
+                    <a:bodyPr/>
+                    <a:lstStyle/>
+                    <a:p>
+                      <a:pPr algn="l"/>
+                      <a:r>
+                        <a:rPr sz="1650" b="0" i="0" u="none">
+                          <a:solidFill>
+                            <a:srgbClr val="334155"/>
+                          </a:solidFill>
+                          <a:latin typeface="Inter Medium"/>
+                        </a:rPr>
+                        <a:t>Random Forest</a:t>
+                      </a:r>
+                    </a:p>
+                  </a:txBody>
+                  <a:tcPr marL="63500" marR="63500" marT="25400" marB="25400" anchor="ctr">
+                    <a:lnL>
+                      <a:noFill/>
+                    </a:lnL>
+                    <a:lnR>
+                      <a:noFill/>
+                    </a:lnR>
+                    <a:lnT>
+                      <a:noFill/>
+                    </a:lnT>
+                    <a:lnB>
+                      <a:noFill/>
+                    </a:lnB>
+                    <a:noFill/>
+                  </a:tcPr>
+                </a:tc>
+                <a:tc>
+                  <a:txBody>
+                    <a:bodyPr/>
+                    <a:lstStyle/>
+                    <a:p>
+                      <a:pPr algn="l"/>
+                      <a:r>
+                        <a:rPr sz="1650" b="0" i="0" u="none">
+                          <a:solidFill>
+                            <a:srgbClr val="64748B"/>
+                          </a:solidFill>
+                          <a:latin typeface="Inter"/>
+                        </a:rPr>
+                        <a:t>1.8749</a:t>
+                      </a:r>
+                    </a:p>
+                  </a:txBody>
+                  <a:tcPr marL="63500" marR="63500" marT="25400" marB="25400" anchor="ctr">
+                    <a:lnL>
+                      <a:noFill/>
+                    </a:lnL>
+                    <a:lnR>
+                      <a:noFill/>
+                    </a:lnR>
+                    <a:lnT>
+                      <a:noFill/>
+                    </a:lnT>
+                    <a:lnB>
+                      <a:noFill/>
+                    </a:lnB>
+                    <a:noFill/>
+                  </a:tcPr>
+                </a:tc>
+                <a:tc>
+                  <a:txBody>
+                    <a:bodyPr/>
+                    <a:lstStyle/>
+                    <a:p>
+                      <a:pPr algn="l"/>
+                      <a:r>
+                        <a:rPr sz="1650" b="0" i="0" u="none">
+                          <a:solidFill>
+                            <a:srgbClr val="64748B"/>
+                          </a:solidFill>
+                          <a:latin typeface="Inter"/>
+                        </a:rPr>
+                        <a:t>0.9981</a:t>
+                      </a:r>
+                    </a:p>
+                  </a:txBody>
+                  <a:tcPr marL="63500" marR="63500" marT="25400" marB="25400" anchor="ctr">
+                    <a:lnL>
+                      <a:noFill/>
+                    </a:lnL>
+                    <a:lnR>
+                      <a:noFill/>
+                    </a:lnR>
+                    <a:lnT>
+                      <a:noFill/>
+                    </a:lnT>
+                    <a:lnB>
+                      <a:noFill/>
+                    </a:lnB>
+                    <a:noFill/>
+                  </a:tcPr>
+                </a:tc>
+                <a:tc>
+                  <a:txBody>
+                    <a:bodyPr/>
+                    <a:lstStyle/>
+                    <a:p>
+                      <a:pPr algn="l"/>
+                      <a:r>
+                        <a:rPr sz="1650" b="0" i="0" u="none">
+                          <a:solidFill>
+                            <a:srgbClr val="64748B"/>
+                          </a:solidFill>
+                          <a:latin typeface="Inter"/>
+                        </a:rPr>
+                        <a:t>Adequate non-linear fit.</a:t>
+                      </a:r>
+                    </a:p>
+                  </a:txBody>
+                  <a:tcPr marL="63500" marR="63500" marT="25400" marB="25400" anchor="ctr">
+                    <a:lnL>
+                      <a:noFill/>
+                    </a:lnL>
+                    <a:lnR>
+                      <a:noFill/>
+                    </a:lnR>
+                    <a:lnT>
+                      <a:noFill/>
+                    </a:lnT>
+                    <a:lnB>
+                      <a:noFill/>
+                    </a:lnB>
+                    <a:noFill/>
+                  </a:tcPr>
+                </a:tc>
+                <a:extLst>
+                  <a:ext uri="{0D108BD9-81ED-4DB2-BD59-A6C34878D82A}">
+                    <a16:rowId xmlns:a16="http://schemas.microsoft.com/office/drawing/2014/main" val="10004"/>
+                  </a:ext>
+                </a:extLst>
+              </a:tr>
+              <a:tr h="760415">
+                <a:tc>
+                  <a:txBody>
+                    <a:bodyPr/>
+                    <a:lstStyle/>
+                    <a:p>
+                      <a:pPr algn="l"/>
+                      <a:r>
+                        <a:rPr sz="1650" b="0" i="0" u="none">
+                          <a:solidFill>
+                            <a:srgbClr val="334155"/>
+                          </a:solidFill>
+                          <a:latin typeface="Inter Medium"/>
+                        </a:rPr>
+                        <a:t>Decision Tree</a:t>
+                      </a:r>
+                    </a:p>
+                  </a:txBody>
+                  <a:tcPr marL="63500" marR="63500" marT="25400" marB="25400" anchor="ctr">
+                    <a:lnL>
+                      <a:noFill/>
+                    </a:lnL>
+                    <a:lnR>
+                      <a:noFill/>
+                    </a:lnR>
+                    <a:lnT>
+                      <a:noFill/>
+                    </a:lnT>
+                    <a:lnB>
+                      <a:noFill/>
+                    </a:lnB>
+                    <a:noFill/>
+                  </a:tcPr>
+                </a:tc>
+                <a:tc>
+                  <a:txBody>
+                    <a:bodyPr/>
+                    <a:lstStyle/>
+                    <a:p>
+                      <a:pPr algn="l"/>
+                      <a:r>
+                        <a:rPr sz="1650" b="0" i="0" u="none">
+                          <a:solidFill>
+                            <a:srgbClr val="64748B"/>
+                          </a:solidFill>
+                          <a:latin typeface="Inter"/>
+                        </a:rPr>
+                        <a:t>2.7350</a:t>
+                      </a:r>
+                    </a:p>
+                  </a:txBody>
+                  <a:tcPr marL="63500" marR="63500" marT="25400" marB="25400" anchor="ctr">
+                    <a:lnL>
+                      <a:noFill/>
+                    </a:lnL>
+                    <a:lnR>
+                      <a:noFill/>
+                    </a:lnR>
+                    <a:lnT>
+                      <a:noFill/>
+                    </a:lnT>
+                    <a:lnB>
+                      <a:noFill/>
+                    </a:lnB>
+                    <a:noFill/>
+                  </a:tcPr>
+                </a:tc>
+                <a:tc>
+                  <a:txBody>
+                    <a:bodyPr/>
+                    <a:lstStyle/>
+                    <a:p>
+                      <a:pPr algn="l"/>
+                      <a:r>
+                        <a:rPr sz="1650" b="0" i="0" u="none">
+                          <a:solidFill>
+                            <a:srgbClr val="64748B"/>
+                          </a:solidFill>
+                          <a:latin typeface="Inter"/>
+                        </a:rPr>
+                        <a:t>0.9960</a:t>
+                      </a:r>
+                    </a:p>
+                  </a:txBody>
+                  <a:tcPr marL="63500" marR="63500" marT="25400" marB="25400" anchor="ctr">
+                    <a:lnL>
+                      <a:noFill/>
+                    </a:lnL>
+                    <a:lnR>
+                      <a:noFill/>
+                    </a:lnR>
+                    <a:lnT>
+                      <a:noFill/>
+                    </a:lnT>
+                    <a:lnB>
+                      <a:noFill/>
+                    </a:lnB>
+                    <a:noFill/>
+                  </a:tcPr>
+                </a:tc>
+                <a:tc>
+                  <a:txBody>
+                    <a:bodyPr/>
+                    <a:lstStyle/>
+                    <a:p>
+                      <a:pPr algn="l"/>
+                      <a:r>
+                        <a:rPr sz="1650" b="0" i="0" u="none">
+                          <a:solidFill>
+                            <a:srgbClr val="64748B"/>
+                          </a:solidFill>
+                          <a:latin typeface="Inter"/>
+                        </a:rPr>
+                        <a:t>Highest prediction error.</a:t>
+                      </a:r>
+                    </a:p>
+                  </a:txBody>
+                  <a:tcPr marL="63500" marR="63500" marT="25400" marB="25400" anchor="ctr">
+                    <a:lnL>
+                      <a:noFill/>
+                    </a:lnL>
+                    <a:lnR>
+                      <a:noFill/>
+                    </a:lnR>
+                    <a:lnT>
+                      <a:noFill/>
+                    </a:lnT>
+                    <a:lnB>
+                      <a:noFill/>
+                    </a:lnB>
+                    <a:noFill/>
+                  </a:tcPr>
+                </a:tc>
+                <a:extLst>
+                  <a:ext uri="{0D108BD9-81ED-4DB2-BD59-A6C34878D82A}">
+                    <a16:rowId xmlns:a16="http://schemas.microsoft.com/office/drawing/2014/main" val="10005"/>
+                  </a:ext>
+                </a:extLst>
+              </a:tr>
+            </a:tbl>
+          </a:graphicData>
+        </a:graphic>
+      </p:graphicFrame>
       <p:pic>
         <p:nvPicPr>
-          <p:cNvPr id="2" name="Picture 1" descr="image.png"/>
+          <p:cNvPr id="5" name="Picture 4" descr="image.png"/>
           <p:cNvPicPr>
             <a:picLocks noChangeAspect="1"/>
           </p:cNvPicPr>
@@ -5701,24 +7418,129 @@
         </p:blipFill>
         <p:spPr>
           <a:xfrm>
-            <a:off x="762000" y="2295525"/>
-            <a:ext cx="10668000" cy="1685925"/>
+            <a:off x="990600" y="3305175"/>
+            <a:ext cx="190500" cy="171450"/>
           </a:xfrm>
           <a:prstGeom prst="rect">
             <a:avLst/>
           </a:prstGeom>
         </p:spPr>
       </p:pic>
-      <p:sp>
-        <p:nvSpPr>
-          <p:cNvPr id="3" name="TextBox 2"/>
+      <p:pic>
+        <p:nvPicPr>
+          <p:cNvPr id="6" name="Picture 5" descr="image.png"/>
+          <p:cNvPicPr>
+            <a:picLocks noChangeAspect="1"/>
+          </p:cNvPicPr>
+          <p:nvPr/>
+        </p:nvPicPr>
+        <p:blipFill>
+          <a:blip r:embed="rId2"/>
+          <a:stretch>
+            <a:fillRect/>
+          </a:stretch>
+        </p:blipFill>
+        <p:spPr>
+          <a:xfrm>
+            <a:off x="990600" y="3305175"/>
+            <a:ext cx="190500" cy="171450"/>
+          </a:xfrm>
+          <a:prstGeom prst="rect">
+            <a:avLst/>
+          </a:prstGeom>
+        </p:spPr>
+      </p:pic>
+    </p:spTree>
+  </p:cSld>
+  <p:clrMapOvr>
+    <a:masterClrMapping/>
+  </p:clrMapOvr>
+</p:sld>
+</file>
+
+<file path=ppt/slides/slide8.xml><?xml version="1.0" encoding="utf-8"?>
+<p:sld xmlns:a="http://schemas.openxmlformats.org/drawingml/2006/main" xmlns:r="http://schemas.openxmlformats.org/officeDocument/2006/relationships" xmlns:p="http://schemas.openxmlformats.org/presentationml/2006/main">
+  <p:cSld>
+    <p:bg>
+      <p:bgPr>
+        <a:solidFill>
+          <a:srgbClr val="F8FAFC"/>
+        </a:solidFill>
+        <a:effectLst/>
+      </p:bgPr>
+    </p:bg>
+    <p:spTree>
+      <p:nvGrpSpPr>
+        <p:cNvPr id="1" name=""/>
+        <p:cNvGrpSpPr/>
+        <p:nvPr/>
+      </p:nvGrpSpPr>
+      <p:grpSpPr>
+        <a:xfrm>
+          <a:off x="0" y="0"/>
+          <a:ext cx="0" cy="0"/>
+          <a:chOff x="0" y="0"/>
+          <a:chExt cx="0" cy="0"/>
+        </a:xfrm>
+      </p:grpSpPr>
+      <p:pic>
+        <p:nvPicPr>
+          <p:cNvPr id="2" name="Picture 1" descr="image.png"/>
+          <p:cNvPicPr>
+            <a:picLocks noChangeAspect="1"/>
+          </p:cNvPicPr>
+          <p:nvPr/>
+        </p:nvPicPr>
+        <p:blipFill>
+          <a:blip r:embed="rId2"/>
+          <a:stretch>
+            <a:fillRect/>
+          </a:stretch>
+        </p:blipFill>
+        <p:spPr>
+          <a:xfrm>
+            <a:off x="6091237" y="0"/>
+            <a:ext cx="6100762" cy="6858000"/>
+          </a:xfrm>
+          <a:prstGeom prst="rect">
+            <a:avLst/>
+          </a:prstGeom>
+        </p:spPr>
+      </p:pic>
+      <p:pic>
+        <p:nvPicPr>
+          <p:cNvPr id="3" name="Picture 2" descr="image.png"/>
+          <p:cNvPicPr>
+            <a:picLocks noChangeAspect="1"/>
+          </p:cNvPicPr>
+          <p:nvPr/>
+        </p:nvPicPr>
+        <p:blipFill>
+          <a:blip r:embed="rId3"/>
+          <a:stretch>
+            <a:fillRect/>
+          </a:stretch>
+        </p:blipFill>
+        <p:spPr>
+          <a:xfrm>
+            <a:off x="762000" y="4398615"/>
+            <a:ext cx="4567237" cy="1190625"/>
+          </a:xfrm>
+          <a:prstGeom prst="rect">
+            <a:avLst/>
+          </a:prstGeom>
+        </p:spPr>
+      </p:pic>
+      <p:sp>
+        <p:nvSpPr>
+          <p:cNvPr id="4" name="TextBox 3"/>
           <p:cNvSpPr txBox="1"/>
           <p:nvPr/>
         </p:nvSpPr>
         <p:spPr>
           <a:xfrm>
-            <a:off x="762000" y="762000"/>
-            <a:ext cx="10668000" cy="190500"/>
+            <a:off x="762000" y="1268759"/>
+            <a:ext cx="4567237" cy="190500"/>
           </a:xfrm>
           <a:prstGeom prst="rect">
             <a:avLst/>
@@ -5726,34 +7548,34 @@
           <a:noFill/>
         </p:spPr>
         <p:txBody>
-          <a:bodyPr wrap="square" lIns="0" rIns="0" tIns="0" bIns="0" anchor="t">
+          <a:bodyPr wrap="square" lIns="0" tIns="0" rIns="0" bIns="0" anchor="t">
             <a:spAutoFit/>
           </a:bodyPr>
           <a:lstStyle/>
           <a:p>
             <a:pPr algn="l"/>
             <a:r>
-              <a:rPr b="1" sz="1200" i="0" u="none">
+              <a:rPr sz="1200" b="1" i="0" u="none">
                 <a:solidFill>
                   <a:srgbClr val="38BDF8"/>
                 </a:solidFill>
                 <a:latin typeface="Inter"/>
               </a:rPr>
-              <a:t>04 • CONCLUSION</a:t>
-            </a:r>
-          </a:p>
-        </p:txBody>
-      </p:sp>
-      <p:sp>
-        <p:nvSpPr>
-          <p:cNvPr id="4" name="TextBox 3"/>
+              <a:t>07 • FINAL OPTIMIZATION</a:t>
+            </a:r>
+          </a:p>
+        </p:txBody>
+      </p:sp>
+      <p:sp>
+        <p:nvSpPr>
+          <p:cNvPr id="5" name="TextBox 4"/>
           <p:cNvSpPr txBox="1"/>
           <p:nvPr/>
         </p:nvSpPr>
         <p:spPr>
           <a:xfrm>
-            <a:off x="762000" y="1104900"/>
-            <a:ext cx="11201400" cy="581025"/>
+            <a:off x="762000" y="1611659"/>
+            <a:ext cx="4795599" cy="1005780"/>
           </a:xfrm>
           <a:prstGeom prst="rect">
             <a:avLst/>
@@ -5761,40 +7583,205 @@
           <a:noFill/>
         </p:spPr>
         <p:txBody>
-          <a:bodyPr wrap="square" lIns="0" rIns="0" tIns="0" bIns="0" anchor="t">
+          <a:bodyPr wrap="square" lIns="0" tIns="0" rIns="0" bIns="0" anchor="t">
             <a:spAutoFit/>
           </a:bodyPr>
           <a:lstStyle/>
           <a:p>
+            <a:pPr algn="l">
+              <a:lnSpc>
+                <a:spcPts val="3959"/>
+              </a:lnSpc>
+            </a:pPr>
+            <a:r>
+              <a:rPr sz="3600" b="1" i="0" u="none">
+                <a:solidFill>
+                  <a:srgbClr val="0F172A"/>
+                </a:solidFill>
+                <a:latin typeface="Space Grotesk"/>
+              </a:rPr>
+              <a:t>Ridge Regression</a:t>
+            </a:r>
+            <a:r>
+              <a:t>
+</a:t>
+            </a:r>
+            <a:r>
+              <a:rPr sz="3600" b="1" i="0" u="none">
+                <a:solidFill>
+                  <a:srgbClr val="0F172A"/>
+                </a:solidFill>
+                <a:latin typeface="Space Grotesk"/>
+              </a:rPr>
+              <a:t> Tuning</a:t>
+            </a:r>
+          </a:p>
+        </p:txBody>
+      </p:sp>
+      <p:sp>
+        <p:nvSpPr>
+          <p:cNvPr id="6" name="TextBox 5"/>
+          <p:cNvSpPr txBox="1"/>
+          <p:nvPr/>
+        </p:nvSpPr>
+        <p:spPr>
+          <a:xfrm>
+            <a:off x="762000" y="3074640"/>
+            <a:ext cx="4567237" cy="942975"/>
+          </a:xfrm>
+          <a:prstGeom prst="rect">
+            <a:avLst/>
+          </a:prstGeom>
+          <a:noFill/>
+        </p:spPr>
+        <p:txBody>
+          <a:bodyPr wrap="square" lIns="0" tIns="0" rIns="0" bIns="0" anchor="t">
+            <a:spAutoFit/>
+          </a:bodyPr>
+          <a:lstStyle/>
+          <a:p>
+            <a:pPr algn="l">
+              <a:lnSpc>
+                <a:spcPts val="2475"/>
+              </a:lnSpc>
+            </a:pPr>
+            <a:r>
+              <a:rPr sz="1650" b="0" i="0" u="none">
+                <a:solidFill>
+                  <a:srgbClr val="64748B"/>
+                </a:solidFill>
+                <a:latin typeface="Inter"/>
+              </a:rPr>
+              <a:t>GridSearchCV + 5-fold cross-validation applied to control coefficient magnitude among highly correlated predictors.</a:t>
+            </a:r>
+          </a:p>
+        </p:txBody>
+      </p:sp>
+      <p:sp>
+        <p:nvSpPr>
+          <p:cNvPr id="7" name="TextBox 6"/>
+          <p:cNvSpPr txBox="1"/>
+          <p:nvPr/>
+        </p:nvSpPr>
+        <p:spPr>
+          <a:xfrm>
+            <a:off x="7955756" y="1271587"/>
+            <a:ext cx="2381250" cy="228600"/>
+          </a:xfrm>
+          <a:prstGeom prst="rect">
+            <a:avLst/>
+          </a:prstGeom>
+          <a:noFill/>
+        </p:spPr>
+        <p:txBody>
+          <a:bodyPr wrap="square" lIns="0" tIns="0" rIns="0" bIns="0" anchor="t">
+            <a:spAutoFit/>
+          </a:bodyPr>
+          <a:lstStyle/>
+          <a:p>
             <a:pPr algn="l"/>
             <a:r>
-              <a:rPr b="1" sz="3600" i="0" u="none">
+              <a:rPr sz="1500" b="1" i="0" u="none">
                 <a:solidFill>
                   <a:srgbClr val="0F172A"/>
                 </a:solidFill>
+                <a:latin typeface="Inter"/>
+              </a:rPr>
+              <a:t>UNSEEN TEST RESULTS</a:t>
+            </a:r>
+          </a:p>
+        </p:txBody>
+      </p:sp>
+      <p:sp>
+        <p:nvSpPr>
+          <p:cNvPr id="8" name="TextBox 7"/>
+          <p:cNvSpPr txBox="1"/>
+          <p:nvPr/>
+        </p:nvSpPr>
+        <p:spPr>
+          <a:xfrm>
+            <a:off x="8179593" y="1957387"/>
+            <a:ext cx="1933575" cy="952500"/>
+          </a:xfrm>
+          <a:prstGeom prst="rect">
+            <a:avLst/>
+          </a:prstGeom>
+          <a:noFill/>
+        </p:spPr>
+        <p:txBody>
+          <a:bodyPr wrap="square" lIns="0" tIns="0" rIns="0" bIns="0" anchor="t">
+            <a:spAutoFit/>
+          </a:bodyPr>
+          <a:lstStyle/>
+          <a:p>
+            <a:pPr algn="l">
+              <a:lnSpc>
+                <a:spcPts val="7500"/>
+              </a:lnSpc>
+            </a:pPr>
+            <a:r>
+              <a:rPr sz="7500" b="1" i="0" u="none">
+                <a:solidFill>
+                  <a:srgbClr val="0F172A"/>
+                </a:solidFill>
                 <a:latin typeface="Space Grotesk"/>
               </a:rPr>
-              <a:t>Pipeline Delivered</a:t>
-            </a:r>
-          </a:p>
-        </p:txBody>
-      </p:sp>
-      <p:sp>
-        <p:nvSpPr>
-          <p:cNvPr id="5" name="Rectangle 4"/>
+              <a:t>1.44</a:t>
+            </a:r>
+          </a:p>
+        </p:txBody>
+      </p:sp>
+      <p:sp>
+        <p:nvSpPr>
+          <p:cNvPr id="9" name="TextBox 8"/>
+          <p:cNvSpPr txBox="1"/>
+          <p:nvPr/>
+        </p:nvSpPr>
+        <p:spPr>
+          <a:xfrm>
+            <a:off x="7770018" y="3024187"/>
+            <a:ext cx="2752725" cy="276225"/>
+          </a:xfrm>
+          <a:prstGeom prst="rect">
+            <a:avLst/>
+          </a:prstGeom>
+          <a:noFill/>
+        </p:spPr>
+        <p:txBody>
+          <a:bodyPr wrap="square" lIns="0" tIns="0" rIns="0" bIns="0" anchor="t">
+            <a:spAutoFit/>
+          </a:bodyPr>
+          <a:lstStyle/>
+          <a:p>
+            <a:pPr algn="l"/>
+            <a:r>
+              <a:rPr sz="1800" b="0" i="0" u="none">
+                <a:solidFill>
+                  <a:srgbClr val="64748B"/>
+                </a:solidFill>
+                <a:latin typeface="Inter Medium"/>
+              </a:rPr>
+              <a:t>Root Mean Squared Error</a:t>
+            </a:r>
+          </a:p>
+        </p:txBody>
+      </p:sp>
+      <p:sp>
+        <p:nvSpPr>
+          <p:cNvPr id="10" name="Rectangle 9"/>
           <p:cNvSpPr/>
           <p:nvPr/>
         </p:nvSpPr>
         <p:spPr>
           <a:xfrm>
-            <a:off x="3571875" y="2833687"/>
-            <a:ext cx="9525" cy="609600"/>
+            <a:off x="8841581" y="3757612"/>
+            <a:ext cx="609600" cy="28575"/>
           </a:xfrm>
           <a:prstGeom prst="rect">
             <a:avLst/>
           </a:prstGeom>
           <a:solidFill>
-            <a:srgbClr val="334155"/>
+            <a:srgbClr val="38BDF8"/>
           </a:solidFill>
           <a:ln>
             <a:noFill/>
@@ -5820,63 +7807,20 @@
           <a:lstStyle/>
           <a:p>
             <a:pPr algn="ctr"/>
-          </a:p>
-        </p:txBody>
-      </p:sp>
-      <p:sp>
-        <p:nvSpPr>
-          <p:cNvPr id="6" name="Rectangle 5"/>
-          <p:cNvSpPr/>
-          <p:nvPr/>
-        </p:nvSpPr>
-        <p:spPr>
-          <a:xfrm>
-            <a:off x="7667625" y="2833687"/>
-            <a:ext cx="9525" cy="609600"/>
-          </a:xfrm>
-          <a:prstGeom prst="rect">
-            <a:avLst/>
-          </a:prstGeom>
-          <a:solidFill>
-            <a:srgbClr val="334155"/>
-          </a:solidFill>
-          <a:ln>
-            <a:noFill/>
-          </a:ln>
-          <a:effectLst/>
-        </p:spPr>
-        <p:style>
-          <a:lnRef idx="1">
-            <a:schemeClr val="accent1"/>
-          </a:lnRef>
-          <a:fillRef idx="3">
-            <a:schemeClr val="accent1"/>
-          </a:fillRef>
-          <a:effectRef idx="2">
-            <a:schemeClr val="accent1"/>
-          </a:effectRef>
-          <a:fontRef idx="minor">
-            <a:schemeClr val="lt1"/>
-          </a:fontRef>
-        </p:style>
-        <p:txBody>
-          <a:bodyPr rtlCol="0" anchor="ctr"/>
-          <a:lstStyle/>
-          <a:p>
-            <a:pPr algn="ctr"/>
-          </a:p>
-        </p:txBody>
-      </p:sp>
-      <p:sp>
-        <p:nvSpPr>
-          <p:cNvPr id="7" name="TextBox 6"/>
+            <a:endParaRPr/>
+          </a:p>
+        </p:txBody>
+      </p:sp>
+      <p:sp>
+        <p:nvSpPr>
+          <p:cNvPr id="11" name="TextBox 10"/>
           <p:cNvSpPr txBox="1"/>
           <p:nvPr/>
         </p:nvSpPr>
         <p:spPr>
           <a:xfrm>
-            <a:off x="1371600" y="2752725"/>
-            <a:ext cx="933450" cy="457200"/>
+            <a:off x="7760493" y="4243387"/>
+            <a:ext cx="2771775" cy="952500"/>
           </a:xfrm>
           <a:prstGeom prst="rect">
             <a:avLst/>
@@ -5884,24 +7828,334 @@
           <a:noFill/>
         </p:spPr>
         <p:txBody>
-          <a:bodyPr wrap="square" lIns="0" rIns="0" tIns="0" bIns="0" anchor="t">
+          <a:bodyPr wrap="square" lIns="0" tIns="0" rIns="0" bIns="0" anchor="t">
             <a:spAutoFit/>
           </a:bodyPr>
           <a:lstStyle/>
           <a:p>
-            <a:pPr algn="ctr">
+            <a:pPr algn="l">
+              <a:lnSpc>
+                <a:spcPts val="7500"/>
+              </a:lnSpc>
+            </a:pPr>
+            <a:r>
+              <a:rPr sz="7500" b="1" i="0" u="none">
+                <a:solidFill>
+                  <a:srgbClr val="0F172A"/>
+                </a:solidFill>
+                <a:latin typeface="Space Grotesk"/>
+              </a:rPr>
+              <a:t>99.9%</a:t>
+            </a:r>
+          </a:p>
+        </p:txBody>
+      </p:sp>
+      <p:sp>
+        <p:nvSpPr>
+          <p:cNvPr id="12" name="TextBox 11"/>
+          <p:cNvSpPr txBox="1"/>
+          <p:nvPr/>
+        </p:nvSpPr>
+        <p:spPr>
+          <a:xfrm>
+            <a:off x="7865268" y="5310187"/>
+            <a:ext cx="2562225" cy="276225"/>
+          </a:xfrm>
+          <a:prstGeom prst="rect">
+            <a:avLst/>
+          </a:prstGeom>
+          <a:noFill/>
+        </p:spPr>
+        <p:txBody>
+          <a:bodyPr wrap="square" lIns="0" tIns="0" rIns="0" bIns="0" anchor="t">
+            <a:spAutoFit/>
+          </a:bodyPr>
+          <a:lstStyle/>
+          <a:p>
+            <a:pPr algn="l"/>
+            <a:r>
+              <a:rPr sz="1800" b="0" i="0" u="none">
+                <a:solidFill>
+                  <a:srgbClr val="64748B"/>
+                </a:solidFill>
+                <a:latin typeface="Inter Medium"/>
+              </a:rPr>
+              <a:t>Explained Variance (R²)</a:t>
+            </a:r>
+          </a:p>
+        </p:txBody>
+      </p:sp>
+      <p:sp>
+        <p:nvSpPr>
+          <p:cNvPr id="13" name="TextBox 12"/>
+          <p:cNvSpPr txBox="1"/>
+          <p:nvPr/>
+        </p:nvSpPr>
+        <p:spPr>
+          <a:xfrm>
+            <a:off x="1028700" y="4627215"/>
+            <a:ext cx="4071937" cy="457200"/>
+          </a:xfrm>
+          <a:prstGeom prst="rect">
+            <a:avLst/>
+          </a:prstGeom>
+          <a:noFill/>
+        </p:spPr>
+        <p:txBody>
+          <a:bodyPr wrap="square" lIns="0" tIns="0" rIns="0" bIns="0" anchor="t">
+            <a:spAutoFit/>
+          </a:bodyPr>
+          <a:lstStyle/>
+          <a:p>
+            <a:pPr algn="l">
               <a:lnSpc>
                 <a:spcPts val="3600"/>
               </a:lnSpc>
             </a:pPr>
             <a:r>
-              <a:rPr b="1" sz="3600" i="0" u="none">
+              <a:rPr sz="3600" b="1" i="0" u="none">
+                <a:solidFill>
+                  <a:srgbClr val="0F172A"/>
+                </a:solidFill>
+                <a:latin typeface="Space Grotesk"/>
+              </a:rPr>
+              <a:t>α = 0.01</a:t>
+            </a:r>
+          </a:p>
+        </p:txBody>
+      </p:sp>
+      <p:sp>
+        <p:nvSpPr>
+          <p:cNvPr id="14" name="TextBox 13"/>
+          <p:cNvSpPr txBox="1"/>
+          <p:nvPr/>
+        </p:nvSpPr>
+        <p:spPr>
+          <a:xfrm>
+            <a:off x="1028700" y="5160615"/>
+            <a:ext cx="4071937" cy="200025"/>
+          </a:xfrm>
+          <a:prstGeom prst="rect">
+            <a:avLst/>
+          </a:prstGeom>
+          <a:noFill/>
+        </p:spPr>
+        <p:txBody>
+          <a:bodyPr wrap="square" lIns="0" tIns="0" rIns="0" bIns="0" anchor="t">
+            <a:spAutoFit/>
+          </a:bodyPr>
+          <a:lstStyle/>
+          <a:p>
+            <a:pPr algn="l"/>
+            <a:r>
+              <a:rPr sz="1350" b="0" i="0" u="none">
+                <a:solidFill>
+                  <a:srgbClr val="64748B"/>
+                </a:solidFill>
+                <a:latin typeface="Inter"/>
+              </a:rPr>
+              <a:t>Optimal L2 penalty selected.</a:t>
+            </a:r>
+          </a:p>
+        </p:txBody>
+      </p:sp>
+    </p:spTree>
+  </p:cSld>
+  <p:clrMapOvr>
+    <a:masterClrMapping/>
+  </p:clrMapOvr>
+</p:sld>
+</file>
+
+<file path=ppt/slides/slide9.xml><?xml version="1.0" encoding="utf-8"?>
+<p:sld xmlns:a="http://schemas.openxmlformats.org/drawingml/2006/main" xmlns:r="http://schemas.openxmlformats.org/officeDocument/2006/relationships" xmlns:p="http://schemas.openxmlformats.org/presentationml/2006/main">
+  <p:cSld>
+    <p:bg>
+      <p:bgPr>
+        <a:solidFill>
+          <a:srgbClr val="FFFFFF"/>
+        </a:solidFill>
+        <a:effectLst/>
+      </p:bgPr>
+    </p:bg>
+    <p:spTree>
+      <p:nvGrpSpPr>
+        <p:cNvPr id="1" name=""/>
+        <p:cNvGrpSpPr/>
+        <p:nvPr/>
+      </p:nvGrpSpPr>
+      <p:grpSpPr>
+        <a:xfrm>
+          <a:off x="0" y="0"/>
+          <a:ext cx="0" cy="0"/>
+          <a:chOff x="0" y="0"/>
+          <a:chExt cx="0" cy="0"/>
+        </a:xfrm>
+      </p:grpSpPr>
+      <p:pic>
+        <p:nvPicPr>
+          <p:cNvPr id="2" name="Picture 1" descr="image.png"/>
+          <p:cNvPicPr>
+            <a:picLocks noChangeAspect="1"/>
+          </p:cNvPicPr>
+          <p:nvPr/>
+        </p:nvPicPr>
+        <p:blipFill>
+          <a:blip r:embed="rId2"/>
+          <a:stretch>
+            <a:fillRect/>
+          </a:stretch>
+        </p:blipFill>
+        <p:spPr>
+          <a:xfrm>
+            <a:off x="4301613" y="0"/>
+            <a:ext cx="7890387" cy="6858000"/>
+          </a:xfrm>
+          <a:prstGeom prst="rect">
+            <a:avLst/>
+          </a:prstGeom>
+        </p:spPr>
+      </p:pic>
+      <p:sp>
+        <p:nvSpPr>
+          <p:cNvPr id="3" name="TextBox 2"/>
+          <p:cNvSpPr txBox="1"/>
+          <p:nvPr/>
+        </p:nvSpPr>
+        <p:spPr>
+          <a:xfrm>
+            <a:off x="339213" y="1544984"/>
+            <a:ext cx="3962400" cy="190500"/>
+          </a:xfrm>
+          <a:prstGeom prst="rect">
+            <a:avLst/>
+          </a:prstGeom>
+          <a:noFill/>
+        </p:spPr>
+        <p:txBody>
+          <a:bodyPr wrap="square" lIns="0" tIns="0" rIns="0" bIns="0" anchor="t">
+            <a:spAutoFit/>
+          </a:bodyPr>
+          <a:lstStyle/>
+          <a:p>
+            <a:pPr algn="l"/>
+            <a:r>
+              <a:rPr sz="1200" b="1" i="0" u="none" dirty="0">
                 <a:solidFill>
                   <a:srgbClr val="38BDF8"/>
                 </a:solidFill>
+                <a:latin typeface="Inter"/>
+              </a:rPr>
+              <a:t>08 • DEPLOYMENT</a:t>
+            </a:r>
+          </a:p>
+        </p:txBody>
+      </p:sp>
+      <p:sp>
+        <p:nvSpPr>
+          <p:cNvPr id="4" name="TextBox 3"/>
+          <p:cNvSpPr txBox="1"/>
+          <p:nvPr/>
+        </p:nvSpPr>
+        <p:spPr>
+          <a:xfrm>
+            <a:off x="339213" y="1887884"/>
+            <a:ext cx="4160520" cy="512961"/>
+          </a:xfrm>
+          <a:prstGeom prst="rect">
+            <a:avLst/>
+          </a:prstGeom>
+          <a:noFill/>
+        </p:spPr>
+        <p:txBody>
+          <a:bodyPr wrap="square" lIns="0" tIns="0" rIns="0" bIns="0" anchor="t">
+            <a:spAutoFit/>
+          </a:bodyPr>
+          <a:lstStyle/>
+          <a:p>
+            <a:pPr algn="l">
+              <a:lnSpc>
+                <a:spcPts val="3959"/>
+              </a:lnSpc>
+            </a:pPr>
+            <a:r>
+              <a:rPr sz="3600" b="1" i="0" u="none" dirty="0">
+                <a:solidFill>
+                  <a:srgbClr val="0F172A"/>
+                </a:solidFill>
                 <a:latin typeface="Space Grotesk"/>
               </a:rPr>
-              <a:t>1.44</a:t>
+              <a:t>Business Intelligence</a:t>
+            </a:r>
+          </a:p>
+        </p:txBody>
+      </p:sp>
+      <p:sp>
+        <p:nvSpPr>
+          <p:cNvPr id="6" name="TextBox 5"/>
+          <p:cNvSpPr txBox="1"/>
+          <p:nvPr/>
+        </p:nvSpPr>
+        <p:spPr>
+          <a:xfrm>
+            <a:off x="339213" y="2761704"/>
+            <a:ext cx="4160520" cy="295275"/>
+          </a:xfrm>
+          <a:prstGeom prst="rect">
+            <a:avLst/>
+          </a:prstGeom>
+          <a:noFill/>
+        </p:spPr>
+        <p:txBody>
+          <a:bodyPr wrap="square" lIns="0" tIns="0" rIns="0" bIns="0" anchor="t">
+            <a:spAutoFit/>
+          </a:bodyPr>
+          <a:lstStyle/>
+          <a:p>
+            <a:pPr algn="l"/>
+            <a:r>
+              <a:rPr sz="1800" b="1" i="0" u="none" dirty="0">
+                <a:solidFill>
+                  <a:srgbClr val="0F172A"/>
+                </a:solidFill>
+                <a:latin typeface="Space Grotesk"/>
+              </a:rPr>
+              <a:t>Interactive Prediction Map</a:t>
+            </a:r>
+          </a:p>
+        </p:txBody>
+      </p:sp>
+      <p:sp>
+        <p:nvSpPr>
+          <p:cNvPr id="7" name="TextBox 6"/>
+          <p:cNvSpPr txBox="1"/>
+          <p:nvPr/>
+        </p:nvSpPr>
+        <p:spPr>
+          <a:xfrm>
+            <a:off x="339213" y="3542059"/>
+            <a:ext cx="3962400" cy="457200"/>
+          </a:xfrm>
+          <a:prstGeom prst="rect">
+            <a:avLst/>
+          </a:prstGeom>
+          <a:noFill/>
+        </p:spPr>
+        <p:txBody>
+          <a:bodyPr wrap="square" lIns="0" tIns="0" rIns="0" bIns="0" anchor="t">
+            <a:spAutoFit/>
+          </a:bodyPr>
+          <a:lstStyle/>
+          <a:p>
+            <a:pPr algn="l"/>
+            <a:r>
+              <a:rPr sz="1500" b="0" i="0" u="none" dirty="0">
+                <a:solidFill>
+                  <a:srgbClr val="64748B"/>
+                </a:solidFill>
+                <a:latin typeface="Inter"/>
+              </a:rPr>
+              <a:t>Visualizes live crowd density estimates by exact seating zone.</a:t>
             </a:r>
           </a:p>
         </p:txBody>
@@ -5914,8 +8168,8 @@
         </p:nvSpPr>
         <p:spPr>
           <a:xfrm>
-            <a:off x="1371600" y="3324225"/>
-            <a:ext cx="933450" cy="200025"/>
+            <a:off x="339213" y="4381451"/>
+            <a:ext cx="4160520" cy="295275"/>
           </a:xfrm>
           <a:prstGeom prst="rect">
             <a:avLst/>
@@ -5923,20 +8177,20 @@
           <a:noFill/>
         </p:spPr>
         <p:txBody>
-          <a:bodyPr wrap="square" lIns="0" rIns="0" tIns="0" bIns="0" anchor="t">
+          <a:bodyPr wrap="square" lIns="0" tIns="0" rIns="0" bIns="0" anchor="t">
             <a:spAutoFit/>
           </a:bodyPr>
           <a:lstStyle/>
           <a:p>
-            <a:pPr algn="ctr"/>
-            <a:r>
-              <a:rPr b="0" sz="1350" i="0" u="none">
-                <a:solidFill>
-                  <a:srgbClr val="F8FAFC"/>
-                </a:solidFill>
-                <a:latin typeface="Inter"/>
-              </a:rPr>
-              <a:t>Final RMSE</a:t>
+            <a:pPr algn="l"/>
+            <a:r>
+              <a:rPr sz="1800" b="1" i="0" u="none" dirty="0">
+                <a:solidFill>
+                  <a:srgbClr val="0F172A"/>
+                </a:solidFill>
+                <a:latin typeface="Space Grotesk"/>
+              </a:rPr>
+              <a:t>Hotspot Identification</a:t>
             </a:r>
           </a:p>
         </p:txBody>
@@ -5949,8 +8203,8 @@
         </p:nvSpPr>
         <p:spPr>
           <a:xfrm>
-            <a:off x="4848225" y="2752725"/>
-            <a:ext cx="1552575" cy="457200"/>
+            <a:off x="339213" y="4866531"/>
+            <a:ext cx="3962400" cy="457200"/>
           </a:xfrm>
           <a:prstGeom prst="rect">
             <a:avLst/>
@@ -5958,347 +8212,54 @@
           <a:noFill/>
         </p:spPr>
         <p:txBody>
-          <a:bodyPr wrap="square" lIns="0" rIns="0" tIns="0" bIns="0" anchor="t">
+          <a:bodyPr wrap="square" lIns="0" tIns="0" rIns="0" bIns="0" anchor="t">
             <a:spAutoFit/>
           </a:bodyPr>
           <a:lstStyle/>
           <a:p>
-            <a:pPr algn="ctr">
-              <a:lnSpc>
-                <a:spcPts val="3600"/>
-              </a:lnSpc>
-            </a:pPr>
-            <a:r>
-              <a:rPr b="1" sz="3600" i="0" u="none">
-                <a:solidFill>
-                  <a:srgbClr val="38BDF8"/>
-                </a:solidFill>
-                <a:latin typeface="Space Grotesk"/>
-              </a:rPr>
-              <a:t>0.9989</a:t>
-            </a:r>
-          </a:p>
-        </p:txBody>
-      </p:sp>
-      <p:sp>
-        <p:nvSpPr>
-          <p:cNvPr id="10" name="TextBox 9"/>
-          <p:cNvSpPr txBox="1"/>
-          <p:nvPr/>
-        </p:nvSpPr>
-        <p:spPr>
-          <a:xfrm>
-            <a:off x="4848225" y="3324225"/>
-            <a:ext cx="1552575" cy="200025"/>
-          </a:xfrm>
-          <a:prstGeom prst="rect">
-            <a:avLst/>
-          </a:prstGeom>
-          <a:noFill/>
-        </p:spPr>
-        <p:txBody>
-          <a:bodyPr wrap="square" lIns="0" rIns="0" tIns="0" bIns="0" anchor="t">
-            <a:spAutoFit/>
-          </a:bodyPr>
-          <a:lstStyle/>
-          <a:p>
-            <a:pPr algn="ctr"/>
-            <a:r>
-              <a:rPr b="0" sz="1350" i="0" u="none">
-                <a:solidFill>
-                  <a:srgbClr val="F8FAFC"/>
+            <a:pPr algn="l"/>
+            <a:r>
+              <a:rPr sz="1500" b="0" i="0" u="none" dirty="0">
+                <a:solidFill>
+                  <a:srgbClr val="64748B"/>
                 </a:solidFill>
                 <a:latin typeface="Inter"/>
               </a:rPr>
-              <a:t>Final R²</a:t>
-            </a:r>
-          </a:p>
-        </p:txBody>
-      </p:sp>
-      <p:sp>
-        <p:nvSpPr>
-          <p:cNvPr id="11" name="TextBox 10"/>
-          <p:cNvSpPr txBox="1"/>
-          <p:nvPr/>
-        </p:nvSpPr>
-        <p:spPr>
-          <a:xfrm>
-            <a:off x="8943975" y="2752725"/>
-            <a:ext cx="1876425" cy="457200"/>
-          </a:xfrm>
-          <a:prstGeom prst="rect">
-            <a:avLst/>
-          </a:prstGeom>
-          <a:noFill/>
-        </p:spPr>
-        <p:txBody>
-          <a:bodyPr wrap="square" lIns="0" rIns="0" tIns="0" bIns="0" anchor="t">
-            <a:spAutoFit/>
-          </a:bodyPr>
-          <a:lstStyle/>
-          <a:p>
-            <a:pPr algn="ctr">
-              <a:lnSpc>
-                <a:spcPts val="3600"/>
-              </a:lnSpc>
-            </a:pPr>
-            <a:r>
-              <a:rPr b="1" sz="3600" i="0" u="none">
-                <a:solidFill>
-                  <a:srgbClr val="38BDF8"/>
-                </a:solidFill>
-                <a:latin typeface="Space Grotesk"/>
-              </a:rPr>
-              <a:t>0.01</a:t>
-            </a:r>
-          </a:p>
-        </p:txBody>
-      </p:sp>
-      <p:sp>
-        <p:nvSpPr>
-          <p:cNvPr id="12" name="TextBox 11"/>
-          <p:cNvSpPr txBox="1"/>
-          <p:nvPr/>
-        </p:nvSpPr>
-        <p:spPr>
-          <a:xfrm>
-            <a:off x="8943975" y="3324225"/>
-            <a:ext cx="1876425" cy="200025"/>
-          </a:xfrm>
-          <a:prstGeom prst="rect">
-            <a:avLst/>
-          </a:prstGeom>
-          <a:noFill/>
-        </p:spPr>
-        <p:txBody>
-          <a:bodyPr wrap="square" lIns="0" rIns="0" tIns="0" bIns="0" anchor="t">
-            <a:spAutoFit/>
-          </a:bodyPr>
-          <a:lstStyle/>
-          <a:p>
-            <a:pPr algn="ctr"/>
-            <a:r>
-              <a:rPr b="0" sz="1350" i="0" u="none">
-                <a:solidFill>
-                  <a:srgbClr val="F8FAFC"/>
-                </a:solidFill>
-                <a:latin typeface="Inter"/>
-              </a:rPr>
-              <a:t>Best Regularization (α)</a:t>
-            </a:r>
-          </a:p>
-        </p:txBody>
-      </p:sp>
-      <p:sp>
-        <p:nvSpPr>
-          <p:cNvPr id="13" name="TextBox 12"/>
-          <p:cNvSpPr txBox="1"/>
-          <p:nvPr/>
-        </p:nvSpPr>
-        <p:spPr>
-          <a:xfrm>
-            <a:off x="762000" y="4862512"/>
-            <a:ext cx="3520440" cy="295275"/>
-          </a:xfrm>
-          <a:prstGeom prst="rect">
-            <a:avLst/>
-          </a:prstGeom>
-          <a:noFill/>
-        </p:spPr>
-        <p:txBody>
-          <a:bodyPr wrap="square" lIns="0" rIns="0" tIns="0" bIns="0" anchor="t">
-            <a:spAutoFit/>
-          </a:bodyPr>
-          <a:lstStyle/>
-          <a:p>
-            <a:pPr algn="l"/>
-            <a:r>
-              <a:rPr b="1" sz="1800" i="0" u="none">
-                <a:solidFill>
-                  <a:srgbClr val="0F172A"/>
-                </a:solidFill>
-                <a:latin typeface="Space Grotesk"/>
-              </a:rPr>
-              <a:t>1. Data Integration</a:t>
-            </a:r>
-          </a:p>
-        </p:txBody>
-      </p:sp>
-      <p:sp>
-        <p:nvSpPr>
-          <p:cNvPr id="14" name="TextBox 13"/>
-          <p:cNvSpPr txBox="1"/>
-          <p:nvPr/>
-        </p:nvSpPr>
-        <p:spPr>
-          <a:xfrm>
-            <a:off x="762000" y="5272087"/>
-            <a:ext cx="3352800" cy="400050"/>
-          </a:xfrm>
-          <a:prstGeom prst="rect">
-            <a:avLst/>
-          </a:prstGeom>
-          <a:noFill/>
-        </p:spPr>
-        <p:txBody>
-          <a:bodyPr wrap="square" lIns="0" rIns="0" tIns="0" bIns="0" anchor="t">
-            <a:spAutoFit/>
-          </a:bodyPr>
-          <a:lstStyle/>
-          <a:p>
-            <a:pPr algn="l"/>
-            <a:r>
-              <a:rPr b="0" sz="1350" i="0" u="none">
-                <a:solidFill>
-                  <a:srgbClr val="64748B"/>
-                </a:solidFill>
-                <a:latin typeface="Inter"/>
-              </a:rPr>
-              <a:t>Unified sensor, spatial, and movement telemetry.</a:t>
-            </a:r>
-          </a:p>
-        </p:txBody>
-      </p:sp>
-      <p:sp>
-        <p:nvSpPr>
-          <p:cNvPr id="15" name="TextBox 14"/>
-          <p:cNvSpPr txBox="1"/>
-          <p:nvPr/>
-        </p:nvSpPr>
-        <p:spPr>
-          <a:xfrm>
-            <a:off x="4419600" y="4862512"/>
-            <a:ext cx="3520440" cy="295275"/>
-          </a:xfrm>
-          <a:prstGeom prst="rect">
-            <a:avLst/>
-          </a:prstGeom>
-          <a:noFill/>
-        </p:spPr>
-        <p:txBody>
-          <a:bodyPr wrap="square" lIns="0" rIns="0" tIns="0" bIns="0" anchor="t">
-            <a:spAutoFit/>
-          </a:bodyPr>
-          <a:lstStyle/>
-          <a:p>
-            <a:pPr algn="l"/>
-            <a:r>
-              <a:rPr b="1" sz="1800" i="0" u="none">
-                <a:solidFill>
-                  <a:srgbClr val="0F172A"/>
-                </a:solidFill>
-                <a:latin typeface="Space Grotesk"/>
-              </a:rPr>
-              <a:t>2. Model Tuning</a:t>
-            </a:r>
-          </a:p>
-        </p:txBody>
-      </p:sp>
-      <p:sp>
-        <p:nvSpPr>
-          <p:cNvPr id="16" name="TextBox 15"/>
-          <p:cNvSpPr txBox="1"/>
-          <p:nvPr/>
-        </p:nvSpPr>
-        <p:spPr>
-          <a:xfrm>
-            <a:off x="4419600" y="5272087"/>
-            <a:ext cx="3352800" cy="400050"/>
-          </a:xfrm>
-          <a:prstGeom prst="rect">
-            <a:avLst/>
-          </a:prstGeom>
-          <a:noFill/>
-        </p:spPr>
-        <p:txBody>
-          <a:bodyPr wrap="square" lIns="0" rIns="0" tIns="0" bIns="0" anchor="t">
-            <a:spAutoFit/>
-          </a:bodyPr>
-          <a:lstStyle/>
-          <a:p>
-            <a:pPr algn="l"/>
-            <a:r>
-              <a:rPr b="0" sz="1350" i="0" u="none">
-                <a:solidFill>
-                  <a:srgbClr val="64748B"/>
-                </a:solidFill>
-                <a:latin typeface="Inter"/>
-              </a:rPr>
-              <a:t>Linear baseline optimized via Ridge GridSearchCV.</a:t>
-            </a:r>
-          </a:p>
-        </p:txBody>
-      </p:sp>
-      <p:sp>
-        <p:nvSpPr>
-          <p:cNvPr id="17" name="TextBox 16"/>
-          <p:cNvSpPr txBox="1"/>
-          <p:nvPr/>
-        </p:nvSpPr>
-        <p:spPr>
-          <a:xfrm>
-            <a:off x="8077200" y="4862512"/>
-            <a:ext cx="3520440" cy="295275"/>
-          </a:xfrm>
-          <a:prstGeom prst="rect">
-            <a:avLst/>
-          </a:prstGeom>
-          <a:noFill/>
-        </p:spPr>
-        <p:txBody>
-          <a:bodyPr wrap="square" lIns="0" rIns="0" tIns="0" bIns="0" anchor="t">
-            <a:spAutoFit/>
-          </a:bodyPr>
-          <a:lstStyle/>
-          <a:p>
-            <a:pPr algn="l"/>
-            <a:r>
-              <a:rPr b="1" sz="1800" i="0" u="none">
-                <a:solidFill>
-                  <a:srgbClr val="0F172A"/>
-                </a:solidFill>
-                <a:latin typeface="Space Grotesk"/>
-              </a:rPr>
-              <a:t>3. BI Deployment</a:t>
-            </a:r>
-          </a:p>
-        </p:txBody>
-      </p:sp>
-      <p:sp>
-        <p:nvSpPr>
-          <p:cNvPr id="18" name="TextBox 17"/>
-          <p:cNvSpPr txBox="1"/>
-          <p:nvPr/>
-        </p:nvSpPr>
-        <p:spPr>
-          <a:xfrm>
-            <a:off x="8077200" y="5272087"/>
-            <a:ext cx="3352800" cy="400050"/>
-          </a:xfrm>
-          <a:prstGeom prst="rect">
-            <a:avLst/>
-          </a:prstGeom>
-          <a:noFill/>
-        </p:spPr>
-        <p:txBody>
-          <a:bodyPr wrap="square" lIns="0" rIns="0" tIns="0" bIns="0" anchor="t">
-            <a:spAutoFit/>
-          </a:bodyPr>
-          <a:lstStyle/>
-          <a:p>
-            <a:pPr algn="l"/>
-            <a:r>
-              <a:rPr b="0" sz="1350" i="0" u="none">
-                <a:solidFill>
-                  <a:srgbClr val="64748B"/>
-                </a:solidFill>
-                <a:latin typeface="Inter"/>
-              </a:rPr>
-              <a:t>Interactive Power BI spatial congestion dashboard.</a:t>
-            </a:r>
-          </a:p>
-        </p:txBody>
-      </p:sp>
+              <a:t>Dynamic filtering by gate and congestion zone.</a:t>
+            </a:r>
+          </a:p>
+        </p:txBody>
+      </p:sp>
+      <p:pic>
+        <p:nvPicPr>
+          <p:cNvPr id="11" name="Picture 10">
+            <a:extLst>
+              <a:ext uri="{FF2B5EF4-FFF2-40B4-BE49-F238E27FC236}">
+                <a16:creationId xmlns:a16="http://schemas.microsoft.com/office/drawing/2014/main" id="{32D086B1-252D-5843-1CA3-70269B1BA2BB}"/>
+              </a:ext>
+            </a:extLst>
+          </p:cNvPr>
+          <p:cNvPicPr>
+            <a:picLocks noChangeAspect="1"/>
+          </p:cNvPicPr>
+          <p:nvPr/>
+        </p:nvPicPr>
+        <p:blipFill>
+          <a:blip r:embed="rId3"/>
+          <a:stretch>
+            <a:fillRect/>
+          </a:stretch>
+        </p:blipFill>
+        <p:spPr>
+          <a:xfrm>
+            <a:off x="4301613" y="0"/>
+            <a:ext cx="7890387" cy="6927501"/>
+          </a:xfrm>
+          <a:prstGeom prst="rect">
+            <a:avLst/>
+          </a:prstGeom>
+        </p:spPr>
+      </p:pic>
     </p:spTree>
   </p:cSld>
   <p:clrMapOvr>
